--- a/docs/presentations/Group9_Status_2026-10-28.pptx
+++ b/docs/presentations/Group9_Status_2026-10-28.pptx
@@ -8997,16 +8997,86 @@
           </a:p>
         </p:txBody>
       </p:sp>
-      <p:sp>
-        <p:nvSpPr>
-          <p:cNvPr id="16" name="TextBox 15"/>
+      <p:pic>
+        <p:nvPicPr>
+          <p:cNvPr id="16" name="Picture 15" descr="g_lcddiag.png"/>
+          <p:cNvPicPr>
+            <a:picLocks noChangeAspect="1"/>
+          </p:cNvPicPr>
+          <p:nvPr/>
+        </p:nvPicPr>
+        <p:blipFill>
+          <a:blip r:embed="rId2"/>
+          <a:stretch>
+            <a:fillRect/>
+          </a:stretch>
+        </p:blipFill>
+        <p:spPr>
+          <a:xfrm>
+            <a:off x="502920" y="4206240"/>
+            <a:ext cx="5029200" cy="1865671"/>
+          </a:xfrm>
+          <a:prstGeom prst="rect">
+            <a:avLst/>
+          </a:prstGeom>
+        </p:spPr>
+      </p:pic>
+      <p:sp>
+        <p:nvSpPr>
+          <p:cNvPr id="17" name="Rectangle 16"/>
+          <p:cNvSpPr/>
+          <p:nvPr/>
+        </p:nvSpPr>
+        <p:spPr>
+          <a:xfrm>
+            <a:off x="5715000" y="4206240"/>
+            <a:ext cx="5989320" cy="1856231"/>
+          </a:xfrm>
+          <a:prstGeom prst="rect">
+            <a:avLst/>
+          </a:prstGeom>
+          <a:solidFill>
+            <a:srgbClr val="F2F5FA"/>
+          </a:solidFill>
+          <a:ln w="15875">
+            <a:solidFill>
+              <a:srgbClr val="5E6B85"/>
+            </a:solidFill>
+          </a:ln>
+          <a:effectLst/>
+        </p:spPr>
+        <p:style>
+          <a:lnRef idx="1">
+            <a:schemeClr val="accent1"/>
+          </a:lnRef>
+          <a:fillRef idx="3">
+            <a:schemeClr val="accent1"/>
+          </a:fillRef>
+          <a:effectRef idx="2">
+            <a:schemeClr val="accent1"/>
+          </a:effectRef>
+          <a:fontRef idx="minor">
+            <a:schemeClr val="lt1"/>
+          </a:fontRef>
+        </p:style>
+        <p:txBody>
+          <a:bodyPr rtlCol="0" anchor="ctr"/>
+          <a:lstStyle/>
+          <a:p>
+            <a:pPr algn="ctr"/>
+          </a:p>
+        </p:txBody>
+      </p:sp>
+      <p:sp>
+        <p:nvSpPr>
+          <p:cNvPr id="18" name="TextBox 17"/>
           <p:cNvSpPr txBox="1"/>
           <p:nvPr/>
         </p:nvSpPr>
         <p:spPr>
           <a:xfrm>
-            <a:off x="502920" y="4251960"/>
-            <a:ext cx="11155680" cy="822960"/>
+            <a:off x="5879592" y="4325112"/>
+            <a:ext cx="5660136" cy="1618487"/>
           </a:xfrm>
           <a:prstGeom prst="rect">
             <a:avLst/>
@@ -9019,15 +9089,30 @@
           </a:bodyPr>
           <a:lstStyle/>
           <a:p>
-            <a:pPr algn="l"/>
-            <a:r>
-              <a:rPr sz="1200" b="0" i="1">
+            <a:r>
+              <a:rPr sz="1250" b="1" spc="100">
                 <a:solidFill>
                   <a:srgbClr val="5E6B85"/>
                 </a:solidFill>
                 <a:latin typeface="Cambria"/>
               </a:rPr>
-              <a:t>Everything above is committed and pushed. The private repository holds the channel key, the config snapshots and the fix-1 firmware images; nothing with the key is public.</a:t>
+              <a:t>THE BENCH RECORD BEHIND THE 0.21 MI</a:t>
+            </a:r>
+          </a:p>
+          <a:p>
+            <a:pPr>
+              <a:spcBef>
+                <a:spcPts val="400"/>
+              </a:spcBef>
+            </a:pPr>
+            <a:r>
+              <a:rPr sz="1100">
+                <a:solidFill>
+                  <a:srgbClr val="222A3F"/>
+                </a:solidFill>
+                <a:latin typeface="Cambria"/>
+              </a:rPr>
+              <a:t>Parsed from both displays' serial logs on 24 October: clean boots, pairing in under 8 s, correct node tables, and SF's indoor GPS fix wandering 100 to 400 m between packets with phantom speed. The displays were right; the fixes were wrong. Everything on this sheet is committed and pushed; nothing with the channel key is public.</a:t>
             </a:r>
           </a:p>
         </p:txBody>

--- a/docs/presentations/Group9_Status_2026-10-28.pptx
+++ b/docs/presentations/Group9_Status_2026-10-28.pptx
@@ -577,7 +577,7 @@
           <a:lstStyle/>
           <a:p>
             <a:r>
-              <a:t>Say plainly that the test is rescheduled, not dropped, and that the radios are in better shape for it than they were on the 25th.</a:t>
+              <a:t>The team was on site. Say that first: the test was not skipped, it was stopped by a flash flood warning, which is a travel ban, not a judgment call. Rescheduled, not dropped, and the radios are in better shape for it than they were on the 25th.</a:t>
             </a:r>
           </a:p>
         </p:txBody>
@@ -5799,7 +5799,7 @@
                 </a:solidFill>
                 <a:latin typeface="Cambria"/>
               </a:rPr>
-              <a:t>THE NEW MEXICO TEST: CANCELLED BY WEATHER</a:t>
+              <a:t>NEW MEXICO: ON SITE, THEN CANCELLED BY WEATHER</a:t>
             </a:r>
           </a:p>
         </p:txBody>
@@ -5834,14 +5834,14 @@
                 </a:solidFill>
                 <a:latin typeface="Cambria"/>
               </a:rPr>
-              <a:t>Planned for 25 October: maximum range on open highway, the one geometry we have not measured</a:t>
+              <a:t>25 October, below the Capitan Mountains: the maximum-range geometry we have not measured</a:t>
             </a:r>
           </a:p>
         </p:txBody>
       </p:sp>
       <p:pic>
         <p:nvPicPr>
-          <p:cNvPr id="11" name="Picture 10" descr="g_onset4.png"/>
+          <p:cNvPr id="11" name="Picture 10" descr="g_nm_cancel.png"/>
           <p:cNvPicPr>
             <a:picLocks noChangeAspect="1"/>
           </p:cNvPicPr>
@@ -5855,24 +5855,83 @@
         </p:blipFill>
         <p:spPr>
           <a:xfrm>
-            <a:off x="502920" y="1280160"/>
-            <a:ext cx="6035040" cy="2703195"/>
+            <a:off x="502920" y="1234440"/>
+            <a:ext cx="7680960" cy="2743200"/>
           </a:xfrm>
           <a:prstGeom prst="rect">
             <a:avLst/>
           </a:prstGeom>
         </p:spPr>
       </p:pic>
-      <p:sp>
-        <p:nvSpPr>
-          <p:cNvPr id="12" name="Rectangle 11"/>
+      <p:pic>
+        <p:nvPicPr>
+          <p:cNvPr id="12" name="Picture 11" descr="g_nm_alert.jpg"/>
+          <p:cNvPicPr>
+            <a:picLocks noChangeAspect="1"/>
+          </p:cNvPicPr>
+          <p:nvPr/>
+        </p:nvPicPr>
+        <p:blipFill>
+          <a:blip r:embed="rId3"/>
+          <a:stretch>
+            <a:fillRect/>
+          </a:stretch>
+        </p:blipFill>
+        <p:spPr>
+          <a:xfrm>
+            <a:off x="8366760" y="1417320"/>
+            <a:ext cx="3337560" cy="1201522"/>
+          </a:xfrm>
+          <a:prstGeom prst="rect">
+            <a:avLst/>
+          </a:prstGeom>
+        </p:spPr>
+      </p:pic>
+      <p:sp>
+        <p:nvSpPr>
+          <p:cNvPr id="13" name="TextBox 12"/>
+          <p:cNvSpPr txBox="1"/>
+          <p:nvPr/>
+        </p:nvSpPr>
+        <p:spPr>
+          <a:xfrm>
+            <a:off x="8366760" y="2697480"/>
+            <a:ext cx="3337560" cy="1188720"/>
+          </a:xfrm>
+          <a:prstGeom prst="rect">
+            <a:avLst/>
+          </a:prstGeom>
+          <a:noFill/>
+        </p:spPr>
+        <p:txBody>
+          <a:bodyPr wrap="square" lIns="0" rIns="0" tIns="0" bIns="0">
+            <a:spAutoFit/>
+          </a:bodyPr>
+          <a:lstStyle/>
+          <a:p>
+            <a:pPr algn="l"/>
+            <a:r>
+              <a:rPr sz="950" b="1" i="0">
+                <a:solidFill>
+                  <a:srgbClr val="C43A4B"/>
+                </a:solidFill>
+                <a:latin typeface="Courier New"/>
+              </a:rPr>
+              <a:t>NATIONAL WEATHER SERVICE, 25 OCTOBER: FLASH FLOOD WARNING FOR THE AREA UNTIL 9:15 PM MDT. "DO NOT ATTEMPT TO TRAVEL."</a:t>
+            </a:r>
+          </a:p>
+        </p:txBody>
+      </p:sp>
+      <p:sp>
+        <p:nvSpPr>
+          <p:cNvPr id="14" name="Rectangle 13"/>
           <p:cNvSpPr/>
           <p:nvPr/>
         </p:nvSpPr>
         <p:spPr>
           <a:xfrm>
-            <a:off x="6766560" y="1280160"/>
-            <a:ext cx="4937760" cy="1920240"/>
+            <a:off x="502920" y="4251960"/>
+            <a:ext cx="3611880" cy="1783080"/>
           </a:xfrm>
           <a:prstGeom prst="rect">
             <a:avLst/>
@@ -5911,14 +5970,14 @@
       </p:sp>
       <p:sp>
         <p:nvSpPr>
-          <p:cNvPr id="13" name="TextBox 12"/>
+          <p:cNvPr id="15" name="TextBox 14"/>
           <p:cNvSpPr txBox="1"/>
           <p:nvPr/>
         </p:nvSpPr>
         <p:spPr>
           <a:xfrm>
-            <a:off x="6931152" y="1399031"/>
-            <a:ext cx="4608576" cy="1682496"/>
+            <a:off x="667512" y="4370832"/>
+            <a:ext cx="3282696" cy="1545336"/>
           </a:xfrm>
           <a:prstGeom prst="rect">
             <a:avLst/>
@@ -5932,7 +5991,7 @@
           <a:lstStyle/>
           <a:p>
             <a:r>
-              <a:rPr sz="1300" b="1" spc="100">
+              <a:rPr sz="1250" b="1" spc="100">
                 <a:solidFill>
                   <a:srgbClr val="16213D"/>
                 </a:solidFill>
@@ -5948,13 +6007,13 @@
               </a:spcBef>
             </a:pPr>
             <a:r>
-              <a:rPr sz="1150">
+              <a:rPr sz="1100">
                 <a:solidFill>
                   <a:srgbClr val="222A3F"/>
                 </a:solidFill>
                 <a:latin typeface="Cambria"/>
               </a:rPr>
-              <a:t>•  Flat open road with no terrain: the true maximum of the radios</a:t>
+              <a:t>•  Open country with no terrain in the path: the true maximum of the radios</a:t>
             </a:r>
           </a:p>
           <a:p>
@@ -5964,43 +6023,27 @@
               </a:spcBef>
             </a:pPr>
             <a:r>
-              <a:rPr sz="1150">
+              <a:rPr sz="1100">
                 <a:solidFill>
                   <a:srgbClr val="222A3F"/>
                 </a:solidFill>
                 <a:latin typeface="Cambria"/>
               </a:rPr>
-              <a:t>•  Range so far: 0.5 mi in town, 3.26 to 3.75 mi on a farm road, 1.29 to 4.7 mi at the canyon</a:t>
-            </a:r>
-          </a:p>
-          <a:p>
-            <a:pPr>
-              <a:spcBef>
-                <a:spcPts val="400"/>
-              </a:spcBef>
-            </a:pPr>
-            <a:r>
-              <a:rPr sz="1150">
-                <a:solidFill>
-                  <a:srgbClr val="222A3F"/>
-                </a:solidFill>
-                <a:latin typeface="Cambria"/>
-              </a:rPr>
-              <a:t>•  Expectation from the two-ray model: beyond 4.7 mi with both antennas on the roof</a:t>
-            </a:r>
-          </a:p>
-        </p:txBody>
-      </p:sp>
-      <p:sp>
-        <p:nvSpPr>
-          <p:cNvPr id="14" name="Rectangle 13"/>
+              <a:t>•  Measured so far: 0.5 mi in town, 3.75 mi on a farm road, 4.7 mi from the canyon rim</a:t>
+            </a:r>
+          </a:p>
+        </p:txBody>
+      </p:sp>
+      <p:sp>
+        <p:nvSpPr>
+          <p:cNvPr id="16" name="Rectangle 15"/>
           <p:cNvSpPr/>
           <p:nvPr/>
         </p:nvSpPr>
         <p:spPr>
           <a:xfrm>
-            <a:off x="6766560" y="3383280"/>
-            <a:ext cx="4937760" cy="1463040"/>
+            <a:off x="4274820" y="4251960"/>
+            <a:ext cx="3611880" cy="1783080"/>
           </a:xfrm>
           <a:prstGeom prst="rect">
             <a:avLst/>
@@ -6039,14 +6082,14 @@
       </p:sp>
       <p:sp>
         <p:nvSpPr>
-          <p:cNvPr id="15" name="TextBox 14"/>
+          <p:cNvPr id="17" name="TextBox 16"/>
           <p:cNvSpPr txBox="1"/>
           <p:nvPr/>
         </p:nvSpPr>
         <p:spPr>
           <a:xfrm>
-            <a:off x="6931152" y="3502152"/>
-            <a:ext cx="4608576" cy="1225296"/>
+            <a:off x="4439412" y="4370832"/>
+            <a:ext cx="3282696" cy="1545336"/>
           </a:xfrm>
           <a:prstGeom prst="rect">
             <a:avLst/>
@@ -6060,13 +6103,13 @@
           <a:lstStyle/>
           <a:p>
             <a:r>
-              <a:rPr sz="1300" b="1" spc="100">
+              <a:rPr sz="1250" b="1" spc="100">
                 <a:solidFill>
                   <a:srgbClr val="C43A4B"/>
                 </a:solidFill>
                 <a:latin typeface="Cambria"/>
               </a:rPr>
-              <a:t>WHY IT DID NOT HAPPEN</a:t>
+              <a:t>WHAT HAPPENED ON SITE</a:t>
             </a:r>
           </a:p>
           <a:p>
@@ -6076,27 +6119,43 @@
               </a:spcBef>
             </a:pPr>
             <a:r>
-              <a:rPr sz="1150">
+              <a:rPr sz="1100">
                 <a:solidFill>
                   <a:srgbClr val="222A3F"/>
                 </a:solidFill>
                 <a:latin typeface="Cambria"/>
               </a:rPr>
-              <a:t>Rain and low visibility on the 25th; a range drive needs a clear day and two cars for about two hours. Pre-flight was done (both OLEDs 912.875) before the call to cancel.</a:t>
-            </a:r>
-          </a:p>
-        </p:txBody>
-      </p:sp>
-      <p:sp>
-        <p:nvSpPr>
-          <p:cNvPr id="16" name="Rectangle 15"/>
+              <a:t>•  Flash flood warning from the National Weather Service for the area, 'do not attempt to travel'</a:t>
+            </a:r>
+          </a:p>
+          <a:p>
+            <a:pPr>
+              <a:spcBef>
+                <a:spcPts val="400"/>
+              </a:spcBef>
+            </a:pPr>
+            <a:r>
+              <a:rPr sz="1100">
+                <a:solidFill>
+                  <a:srgbClr val="222A3F"/>
+                </a:solidFill>
+                <a:latin typeface="Cambria"/>
+              </a:rPr>
+              <a:t>•  Low cloud on the peaks, rain moving in; the pre-flight (both OLEDs 912.875) was done, the drive was not started</a:t>
+            </a:r>
+          </a:p>
+        </p:txBody>
+      </p:sp>
+      <p:sp>
+        <p:nvSpPr>
+          <p:cNvPr id="18" name="Rectangle 17"/>
           <p:cNvSpPr/>
           <p:nvPr/>
         </p:nvSpPr>
         <p:spPr>
           <a:xfrm>
-            <a:off x="502920" y="4572000"/>
-            <a:ext cx="11201400" cy="1371600"/>
+            <a:off x="8046720" y="4251960"/>
+            <a:ext cx="3611880" cy="1783080"/>
           </a:xfrm>
           <a:prstGeom prst="rect">
             <a:avLst/>
@@ -6135,14 +6194,14 @@
       </p:sp>
       <p:sp>
         <p:nvSpPr>
-          <p:cNvPr id="17" name="TextBox 16"/>
+          <p:cNvPr id="19" name="TextBox 18"/>
           <p:cNvSpPr txBox="1"/>
           <p:nvPr/>
         </p:nvSpPr>
         <p:spPr>
           <a:xfrm>
-            <a:off x="667512" y="4690872"/>
-            <a:ext cx="10872216" cy="1133856"/>
+            <a:off x="8211312" y="4370832"/>
+            <a:ext cx="3282696" cy="1545336"/>
           </a:xfrm>
           <a:prstGeom prst="rect">
             <a:avLst/>
@@ -6156,7 +6215,7 @@
           <a:lstStyle/>
           <a:p>
             <a:r>
-              <a:rPr sz="1300" b="1" spc="100">
+              <a:rPr sz="1250" b="1" spc="100">
                 <a:solidFill>
                   <a:srgbClr val="1F9D68"/>
                 </a:solidFill>
@@ -6172,13 +6231,29 @@
               </a:spcBef>
             </a:pPr>
             <a:r>
-              <a:rPr sz="1150">
+              <a:rPr sz="1100">
                 <a:solidFill>
                   <a:srgbClr val="222A3F"/>
                 </a:solidFill>
                 <a:latin typeface="Cambria"/>
               </a:rPr>
-              <a:t>Next clear weekend, same plan: two cars, one radio each on the roof, drive apart on US-84 or US-62 until the display shows LINK LOST, log the last packet distance, drive back. Both radios now carry the fix described on sheet 4, so a flat battery on the way cannot cost the test.</a:t>
+              <a:t>•  Next clear weekend, same site and plan: two cars, radios on the roofs, drive apart until LINK LOST, log the last packet</a:t>
+            </a:r>
+          </a:p>
+          <a:p>
+            <a:pPr>
+              <a:spcBef>
+                <a:spcPts val="400"/>
+              </a:spcBef>
+            </a:pPr>
+            <a:r>
+              <a:rPr sz="1100">
+                <a:solidFill>
+                  <a:srgbClr val="222A3F"/>
+                </a:solidFill>
+                <a:latin typeface="Cambria"/>
+              </a:rPr>
+              <a:t>•  Both radios now carry fix 1 (sheet 4), so a flat battery on the way cannot cost the test</a:t>
             </a:r>
           </a:p>
         </p:txBody>

--- a/docs/presentations/Group9_Status_2026-10-28.pptx
+++ b/docs/presentations/Group9_Status_2026-10-28.pptx
@@ -11,6 +11,9 @@
     <p:sldId id="259" r:id="rId11"/>
     <p:sldId id="260" r:id="rId12"/>
     <p:sldId id="261" r:id="rId13"/>
+    <p:sldId id="262" r:id="rId14"/>
+    <p:sldId id="263" r:id="rId15"/>
+    <p:sldId id="264" r:id="rId16"/>
   </p:sldIdLst>
   <p:sldSz cx="12191695" cy="6858000" type="screen4x3"/>
   <p:notesSz cx="6858000" cy="9144000"/>
@@ -507,7 +510,7 @@
           <a:lstStyle/>
           <a:p>
             <a:r>
-              <a:t>Five minutes. One cancelled test, one investigation, one fix, one plan.</a:t>
+              <a:t>SAY: This is a short status update. Three things: the range test we planned in New Mexico, why it did not run, and what the team did with the weekend instead. About five minutes.</a:t>
             </a:r>
           </a:p>
         </p:txBody>
@@ -577,7 +580,7 @@
           <a:lstStyle/>
           <a:p>
             <a:r>
-              <a:t>The team was on site. Say that first: the test was not skipped, it was stopped by a flash flood warning, which is a travel ban, not a judgment call. Rescheduled, not dropped, and the radios are in better shape for it than they were on the 25th.</a:t>
+              <a:t>SAY: The chart shows the range we have measured so far, in four kinds of terrain. All of them were limited by what was in the way: buildings, hills, canyon walls. The plan for New Mexico was to remove those limits: antenna on the roof, open flat country, drive apart until the link drops. That gives the true maximum of the radios, which we still do not have.</a:t>
             </a:r>
           </a:p>
         </p:txBody>
@@ -647,7 +650,7 @@
           <a:lstStyle/>
           <a:p>
             <a:r>
-              <a:t>Keep this to the headline. The hypothesis came from a Qualcomm engineer; the experiment design and scripts were drafted with an AI assistant; every measurement was run by us on our radios, with the records in the repository. Details next week.</a:t>
+              <a:t>SAY: We were there. The map shows where, just below the Capitan Mountains. The photos show the cloud on the peaks and the road we were on. Then the phone alert on the right: a flash flood warning, do not attempt to travel. That is a travel ban, so the drive was not started. The test is rescheduled, not dropped. Next sheet.</a:t>
             </a:r>
           </a:p>
         </p:txBody>
@@ -717,7 +720,7 @@
           <a:lstStyle/>
           <a:p>
             <a:r>
-              <a:t>This is the deliverable of the week: a configuration loss is now invisible to the driver.</a:t>
+              <a:t>SAY: Same site, same plan, five steps. Nothing new has to be built for it. The one change since the 25th is that both radios now have a firmware fix, which I will get to, so even a dead battery on the way cannot lose the radio settings and cost us the day.</a:t>
             </a:r>
           </a:p>
         </p:txBody>
@@ -787,7 +790,7 @@
           <a:lstStyle/>
           <a:p>
             <a:r>
-              <a:t>One sheet for the rest of the team's output. The display changes were validated on the bench; the next drive validates them on the road.</a:t>
+              <a:t>SAY: While the weather stopped the drive, the weekend went into a problem that has hit us three times: a radio runs its battery flat and comes back with its settings gone. An engineer at Qualcomm suggested the memory chip itself might be bad, so we measured it. Left picture is radio SF: the red blocks gave a different answer every time we read them. Right is radio RG: clean. Rewriting the red blocks fixed them, so the chip is fine; it was written while the battery was too low. That is the cause. The full evidence is a separate presentation.</a:t>
             </a:r>
           </a:p>
         </p:txBody>
@@ -857,7 +860,217 @@
           <a:lstStyle/>
           <a:p>
             <a:r>
-              <a:t>End on the ask.</a:t>
+              <a:t>SAY: The fix is simple to explain. The radio software was rebuilt so that its factory settings are our settings. If it ever forgets again, it forgets back to the right values. We tested it by forcing a factory reset on both radios: each came back on our channel with the right name, with nobody touching it.</a:t>
+            </a:r>
+          </a:p>
+        </p:txBody>
+      </p:sp>
+      <p:sp>
+        <p:nvSpPr>
+          <p:cNvPr id="4" name="Slide Number Placeholder 3"/>
+          <p:cNvSpPr>
+            <a:spLocks noGrp="1"/>
+          </p:cNvSpPr>
+          <p:nvPr>
+            <p:ph type="sldNum" idx="5" sz="quarter"/>
+          </p:nvPr>
+        </p:nvSpPr>
+        <p:spPr/>
+      </p:sp>
+    </p:spTree>
+  </p:cSld>
+  <p:clrMapOvr>
+    <a:masterClrMapping/>
+  </p:clrMapOvr>
+</p:notes>
+</file>
+
+<file path=ppt/notesSlides/notesSlide7.xml><?xml version="1.0" encoding="utf-8"?>
+<p:notes xmlns:a="http://schemas.openxmlformats.org/drawingml/2006/main" xmlns:p="http://schemas.openxmlformats.org/presentationml/2006/main" xmlns:r="http://schemas.openxmlformats.org/officeDocument/2006/relationships">
+  <p:cSld>
+    <p:spTree>
+      <p:nvGrpSpPr>
+        <p:cNvPr id="1" name=""/>
+        <p:cNvGrpSpPr/>
+        <p:nvPr/>
+      </p:nvGrpSpPr>
+      <p:grpSpPr>
+        <a:xfrm>
+          <a:off x="0" y="0"/>
+          <a:ext cx="0" cy="0"/>
+          <a:chOff x="0" y="0"/>
+          <a:chExt cx="0" cy="0"/>
+        </a:xfrm>
+      </p:grpSpPr>
+      <p:sp>
+        <p:nvSpPr>
+          <p:cNvPr id="2" name="Slide Image Placeholder 1"/>
+          <p:cNvSpPr>
+            <a:spLocks noGrp="1"/>
+          </p:cNvSpPr>
+          <p:nvPr>
+            <p:ph type="sldImg" idx="2"/>
+          </p:nvPr>
+        </p:nvSpPr>
+        <p:spPr/>
+      </p:sp>
+      <p:sp>
+        <p:nvSpPr>
+          <p:cNvPr id="3" name="Notes Placeholder 2"/>
+          <p:cNvSpPr>
+            <a:spLocks noGrp="1"/>
+          </p:cNvSpPr>
+          <p:nvPr>
+            <p:ph type="body" idx="3" sz="quarter"/>
+          </p:nvPr>
+        </p:nvSpPr>
+        <p:spPr/>
+        <p:txBody>
+          <a:bodyPr/>
+          <a:lstStyle/>
+          <a:p>
+            <a:r>
+              <a:t>SAY: Three changes on the display, all from the night drive and the canyon. Directions are clock positions, the screen says holding when both cars are parked, and it says LINK LOST if the radio drops. One bench lesson: indoors the GPS can be hundreds of metres off, so only trust distances outside.</a:t>
+            </a:r>
+          </a:p>
+        </p:txBody>
+      </p:sp>
+      <p:sp>
+        <p:nvSpPr>
+          <p:cNvPr id="4" name="Slide Number Placeholder 3"/>
+          <p:cNvSpPr>
+            <a:spLocks noGrp="1"/>
+          </p:cNvSpPr>
+          <p:nvPr>
+            <p:ph type="sldNum" idx="5" sz="quarter"/>
+          </p:nvPr>
+        </p:nvSpPr>
+        <p:spPr/>
+      </p:sp>
+    </p:spTree>
+  </p:cSld>
+  <p:clrMapOvr>
+    <a:masterClrMapping/>
+  </p:clrMapOvr>
+</p:notes>
+</file>
+
+<file path=ppt/notesSlides/notesSlide8.xml><?xml version="1.0" encoding="utf-8"?>
+<p:notes xmlns:a="http://schemas.openxmlformats.org/drawingml/2006/main" xmlns:p="http://schemas.openxmlformats.org/presentationml/2006/main" xmlns:r="http://schemas.openxmlformats.org/officeDocument/2006/relationships">
+  <p:cSld>
+    <p:spTree>
+      <p:nvGrpSpPr>
+        <p:cNvPr id="1" name=""/>
+        <p:cNvGrpSpPr/>
+        <p:nvPr/>
+      </p:nvGrpSpPr>
+      <p:grpSpPr>
+        <a:xfrm>
+          <a:off x="0" y="0"/>
+          <a:ext cx="0" cy="0"/>
+          <a:chOff x="0" y="0"/>
+          <a:chExt cx="0" cy="0"/>
+        </a:xfrm>
+      </p:grpSpPr>
+      <p:sp>
+        <p:nvSpPr>
+          <p:cNvPr id="2" name="Slide Image Placeholder 1"/>
+          <p:cNvSpPr>
+            <a:spLocks noGrp="1"/>
+          </p:cNvSpPr>
+          <p:nvPr>
+            <p:ph type="sldImg" idx="2"/>
+          </p:nvPr>
+        </p:nvSpPr>
+        <p:spPr/>
+      </p:sp>
+      <p:sp>
+        <p:nvSpPr>
+          <p:cNvPr id="3" name="Notes Placeholder 2"/>
+          <p:cNvSpPr>
+            <a:spLocks noGrp="1"/>
+          </p:cNvSpPr>
+          <p:nvPr>
+            <p:ph type="body" idx="3" sz="quarter"/>
+          </p:nvPr>
+        </p:nvSpPr>
+        <p:spPr/>
+        <p:txBody>
+          <a:bodyPr/>
+          <a:lstStyle/>
+          <a:p>
+            <a:r>
+              <a:t>SAY: Everything is written down and in the repository: how to recover a radio with a phone or a laptop, the full failure catalog, the measurement records, and the long presentation. The channel key never leaves the private repo.</a:t>
+            </a:r>
+          </a:p>
+        </p:txBody>
+      </p:sp>
+      <p:sp>
+        <p:nvSpPr>
+          <p:cNvPr id="4" name="Slide Number Placeholder 3"/>
+          <p:cNvSpPr>
+            <a:spLocks noGrp="1"/>
+          </p:cNvSpPr>
+          <p:nvPr>
+            <p:ph type="sldNum" idx="5" sz="quarter"/>
+          </p:nvPr>
+        </p:nvSpPr>
+        <p:spPr/>
+      </p:sp>
+    </p:spTree>
+  </p:cSld>
+  <p:clrMapOvr>
+    <a:masterClrMapping/>
+  </p:clrMapOvr>
+</p:notes>
+</file>
+
+<file path=ppt/notesSlides/notesSlide9.xml><?xml version="1.0" encoding="utf-8"?>
+<p:notes xmlns:a="http://schemas.openxmlformats.org/drawingml/2006/main" xmlns:p="http://schemas.openxmlformats.org/presentationml/2006/main" xmlns:r="http://schemas.openxmlformats.org/officeDocument/2006/relationships">
+  <p:cSld>
+    <p:spTree>
+      <p:nvGrpSpPr>
+        <p:cNvPr id="1" name=""/>
+        <p:cNvGrpSpPr/>
+        <p:nvPr/>
+      </p:nvGrpSpPr>
+      <p:grpSpPr>
+        <a:xfrm>
+          <a:off x="0" y="0"/>
+          <a:ext cx="0" cy="0"/>
+          <a:chOff x="0" y="0"/>
+          <a:chExt cx="0" cy="0"/>
+        </a:xfrm>
+      </p:grpSpPr>
+      <p:sp>
+        <p:nvSpPr>
+          <p:cNvPr id="2" name="Slide Image Placeholder 1"/>
+          <p:cNvSpPr>
+            <a:spLocks noGrp="1"/>
+          </p:cNvSpPr>
+          <p:nvPr>
+            <p:ph type="sldImg" idx="2"/>
+          </p:nvPr>
+        </p:nvSpPr>
+        <p:spPr/>
+      </p:sp>
+      <p:sp>
+        <p:nvSpPr>
+          <p:cNvPr id="3" name="Notes Placeholder 2"/>
+          <p:cNvSpPr>
+            <a:spLocks noGrp="1"/>
+          </p:cNvSpPr>
+          <p:nvPr>
+            <p:ph type="body" idx="3" sz="quarter"/>
+          </p:nvPr>
+        </p:nvSpPr>
+        <p:spPr/>
+        <p:txBody>
+          <a:bodyPr/>
+          <a:lstStyle/>
+          <a:p>
+            <a:r>
+              <a:t>SAY: Four items. The range drive, rescheduled for the next clear weekend. The flat-battery test that proves the fix. Josiah's waterproof enclosure for the display, due next week. And a scope measurement on the radio's supply. The ask is to approve the flat-battery test before the next drive.</a:t>
             </a:r>
           </a:p>
         </p:txBody>
@@ -5327,7 +5540,7 @@
                 </a:solidFill>
                 <a:latin typeface="Courier New"/>
               </a:rPr>
-              <a:t>SHEET 01/06  STATUS  2026-10-28</a:t>
+              <a:t>SHEET 01/09  STATUS  2026-10-28</a:t>
             </a:r>
           </a:p>
         </p:txBody>
@@ -5397,7 +5610,7 @@
                 </a:solidFill>
                 <a:latin typeface="Cambria"/>
               </a:rPr>
-              <a:t>NEW MEXICO RAINED OUT; THE WEEKEND WENT INTO THE RADIOS INSTEAD</a:t>
+              <a:t>THE ROOF-TOP ANTENNA DRIVE, THE WEATHER, AND WHAT WE DID INSTEAD</a:t>
             </a:r>
           </a:p>
         </p:txBody>
@@ -5411,7 +5624,7 @@
         <p:spPr>
           <a:xfrm>
             <a:off x="658368" y="2331720"/>
-            <a:ext cx="7315200" cy="1188720"/>
+            <a:ext cx="7315200" cy="1371600"/>
           </a:xfrm>
           <a:prstGeom prst="rect">
             <a:avLst/>
@@ -5426,13 +5639,13 @@
           <a:p>
             <a:pPr algn="l"/>
             <a:r>
-              <a:rPr sz="1300" b="0" i="0">
+              <a:rPr sz="1400" b="0" i="0">
                 <a:solidFill>
                   <a:srgbClr val="222A3F"/>
                 </a:solidFill>
                 <a:latin typeface="Cambria"/>
               </a:rPr>
-              <a:t>The maximum-range drive was cancelled by weather. In its place: the battery-death configuration loss was traced to the flash cells and measured on both radios, SF was repaired, and a firmware build that makes the failure harmless is now on both radios. Full root-cause presentation on 4 November.</a:t>
+              <a:t>We went to New Mexico to measure the radios' maximum range with the antenna on the roof of the car. A flash flood warning stopped the drive. The weekend went into the radios instead: the settings-loss problem was traced to its cause, and a fix is now on both radios.</a:t>
             </a:r>
           </a:p>
         </p:txBody>
@@ -5683,67 +5896,21 @@
                 </a:solidFill>
                 <a:latin typeface="Courier New"/>
               </a:rPr>
-              <a:t>SHEET 02/06  STATUS  2026-10-28</a:t>
-            </a:r>
-          </a:p>
-        </p:txBody>
-      </p:sp>
-      <p:sp>
-        <p:nvSpPr>
-          <p:cNvPr id="7" name="Rectangle 6"/>
-          <p:cNvSpPr/>
-          <p:nvPr/>
-        </p:nvSpPr>
-        <p:spPr>
-          <a:xfrm>
-            <a:off x="9646920" y="347472"/>
-            <a:ext cx="2148840" cy="420624"/>
-          </a:xfrm>
-          <a:prstGeom prst="rect">
-            <a:avLst/>
-          </a:prstGeom>
-          <a:solidFill>
-            <a:srgbClr val="FFFFFF"/>
-          </a:solidFill>
-          <a:ln w="19050">
-            <a:solidFill>
-              <a:srgbClr val="D9488C"/>
-            </a:solidFill>
-          </a:ln>
-          <a:effectLst/>
-        </p:spPr>
-        <p:style>
-          <a:lnRef idx="1">
-            <a:schemeClr val="accent1"/>
-          </a:lnRef>
-          <a:fillRef idx="3">
-            <a:schemeClr val="accent1"/>
-          </a:fillRef>
-          <a:effectRef idx="2">
-            <a:schemeClr val="accent1"/>
-          </a:effectRef>
-          <a:fontRef idx="minor">
-            <a:schemeClr val="lt1"/>
-          </a:fontRef>
-        </p:style>
-        <p:txBody>
-          <a:bodyPr rtlCol="0" anchor="ctr"/>
-          <a:lstStyle/>
-          <a:p>
-            <a:pPr algn="ctr"/>
-          </a:p>
-        </p:txBody>
-      </p:sp>
-      <p:sp>
-        <p:nvSpPr>
-          <p:cNvPr id="8" name="TextBox 7"/>
+              <a:t>SHEET 02/09  STATUS  2026-10-28</a:t>
+            </a:r>
+          </a:p>
+        </p:txBody>
+      </p:sp>
+      <p:sp>
+        <p:nvSpPr>
+          <p:cNvPr id="7" name="TextBox 6"/>
           <p:cNvSpPr txBox="1"/>
           <p:nvPr/>
         </p:nvSpPr>
         <p:spPr>
           <a:xfrm>
-            <a:off x="9646920" y="402336"/>
-            <a:ext cx="2148840" cy="310896"/>
+            <a:off x="457200" y="329184"/>
+            <a:ext cx="9052560" cy="566928"/>
           </a:xfrm>
           <a:prstGeom prst="rect">
             <a:avLst/>
@@ -5756,29 +5923,29 @@
           </a:bodyPr>
           <a:lstStyle/>
           <a:p>
-            <a:pPr algn="ctr"/>
-            <a:r>
-              <a:rPr sz="1100" b="1" i="0">
-                <a:solidFill>
-                  <a:srgbClr val="D9488C"/>
-                </a:solidFill>
-                <a:latin typeface="Courier New"/>
+            <a:pPr algn="l"/>
+            <a:r>
+              <a:rPr sz="2300" b="1" i="0" spc="200">
+                <a:solidFill>
+                  <a:srgbClr val="16213D"/>
+                </a:solidFill>
+                <a:latin typeface="Cambria"/>
               </a:rPr>
-              <a:t>OWNER: CANNON</a:t>
-            </a:r>
-          </a:p>
-        </p:txBody>
-      </p:sp>
-      <p:sp>
-        <p:nvSpPr>
-          <p:cNvPr id="9" name="TextBox 8"/>
+              <a:t>THE PLAN: A ROOF-TOP ANTENNA RANGE DRIVE</a:t>
+            </a:r>
+          </a:p>
+        </p:txBody>
+      </p:sp>
+      <p:sp>
+        <p:nvSpPr>
+          <p:cNvPr id="8" name="TextBox 7"/>
           <p:cNvSpPr txBox="1"/>
           <p:nvPr/>
         </p:nvSpPr>
         <p:spPr>
           <a:xfrm>
-            <a:off x="457200" y="329184"/>
-            <a:ext cx="9052560" cy="566928"/>
+            <a:off x="475488" y="868680"/>
+            <a:ext cx="9052560" cy="320040"/>
           </a:xfrm>
           <a:prstGeom prst="rect">
             <a:avLst/>
@@ -5793,55 +5960,20 @@
           <a:p>
             <a:pPr algn="l"/>
             <a:r>
-              <a:rPr sz="2300" b="1" i="0" spc="200">
-                <a:solidFill>
-                  <a:srgbClr val="16213D"/>
+              <a:rPr sz="1250" b="0" i="1">
+                <a:solidFill>
+                  <a:srgbClr val="5E6B85"/>
                 </a:solidFill>
                 <a:latin typeface="Cambria"/>
               </a:rPr>
-              <a:t>NEW MEXICO: ON SITE, THEN CANCELLED BY WEATHER</a:t>
-            </a:r>
-          </a:p>
-        </p:txBody>
-      </p:sp>
-      <p:sp>
-        <p:nvSpPr>
-          <p:cNvPr id="10" name="TextBox 9"/>
-          <p:cNvSpPr txBox="1"/>
-          <p:nvPr/>
-        </p:nvSpPr>
-        <p:spPr>
-          <a:xfrm>
-            <a:off x="475488" y="868680"/>
-            <a:ext cx="9052560" cy="320040"/>
-          </a:xfrm>
-          <a:prstGeom prst="rect">
-            <a:avLst/>
-          </a:prstGeom>
-          <a:noFill/>
-        </p:spPr>
-        <p:txBody>
-          <a:bodyPr wrap="square" lIns="0" rIns="0" tIns="0" bIns="0">
-            <a:spAutoFit/>
-          </a:bodyPr>
-          <a:lstStyle/>
-          <a:p>
-            <a:pPr algn="l"/>
-            <a:r>
-              <a:rPr sz="1250" b="0" i="1">
-                <a:solidFill>
-                  <a:srgbClr val="5E6B85"/>
-                </a:solidFill>
-                <a:latin typeface="Cambria"/>
-              </a:rPr>
-              <a:t>25 October, below the Capitan Mountains: the maximum-range geometry we have not measured</a:t>
+              <a:t>The one range number we still do not have</a:t>
             </a:r>
           </a:p>
         </p:txBody>
       </p:sp>
       <p:pic>
         <p:nvPicPr>
-          <p:cNvPr id="11" name="Picture 10" descr="g_nm_cancel.png"/>
+          <p:cNvPr id="9" name="Picture 8" descr="g_onset4.png"/>
           <p:cNvPicPr>
             <a:picLocks noChangeAspect="1"/>
           </p:cNvPicPr>
@@ -5855,83 +5987,24 @@
         </p:blipFill>
         <p:spPr>
           <a:xfrm>
-            <a:off x="502920" y="1234440"/>
-            <a:ext cx="7680960" cy="2743200"/>
+            <a:off x="502920" y="1280160"/>
+            <a:ext cx="6035040" cy="2703195"/>
           </a:xfrm>
           <a:prstGeom prst="rect">
             <a:avLst/>
           </a:prstGeom>
         </p:spPr>
       </p:pic>
-      <p:pic>
-        <p:nvPicPr>
-          <p:cNvPr id="12" name="Picture 11" descr="g_nm_alert.jpg"/>
-          <p:cNvPicPr>
-            <a:picLocks noChangeAspect="1"/>
-          </p:cNvPicPr>
-          <p:nvPr/>
-        </p:nvPicPr>
-        <p:blipFill>
-          <a:blip r:embed="rId3"/>
-          <a:stretch>
-            <a:fillRect/>
-          </a:stretch>
-        </p:blipFill>
-        <p:spPr>
-          <a:xfrm>
-            <a:off x="8366760" y="1417320"/>
-            <a:ext cx="3337560" cy="1201522"/>
-          </a:xfrm>
-          <a:prstGeom prst="rect">
-            <a:avLst/>
-          </a:prstGeom>
-        </p:spPr>
-      </p:pic>
-      <p:sp>
-        <p:nvSpPr>
-          <p:cNvPr id="13" name="TextBox 12"/>
-          <p:cNvSpPr txBox="1"/>
-          <p:nvPr/>
-        </p:nvSpPr>
-        <p:spPr>
-          <a:xfrm>
-            <a:off x="8366760" y="2697480"/>
-            <a:ext cx="3337560" cy="1188720"/>
-          </a:xfrm>
-          <a:prstGeom prst="rect">
-            <a:avLst/>
-          </a:prstGeom>
-          <a:noFill/>
-        </p:spPr>
-        <p:txBody>
-          <a:bodyPr wrap="square" lIns="0" rIns="0" tIns="0" bIns="0">
-            <a:spAutoFit/>
-          </a:bodyPr>
-          <a:lstStyle/>
-          <a:p>
-            <a:pPr algn="l"/>
-            <a:r>
-              <a:rPr sz="950" b="1" i="0">
-                <a:solidFill>
-                  <a:srgbClr val="C43A4B"/>
-                </a:solidFill>
-                <a:latin typeface="Courier New"/>
-              </a:rPr>
-              <a:t>NATIONAL WEATHER SERVICE, 25 OCTOBER: FLASH FLOOD WARNING FOR THE AREA UNTIL 9:15 PM MDT. "DO NOT ATTEMPT TO TRAVEL."</a:t>
-            </a:r>
-          </a:p>
-        </p:txBody>
-      </p:sp>
-      <p:sp>
-        <p:nvSpPr>
-          <p:cNvPr id="14" name="Rectangle 13"/>
+      <p:sp>
+        <p:nvSpPr>
+          <p:cNvPr id="10" name="Rectangle 9"/>
           <p:cNvSpPr/>
           <p:nvPr/>
         </p:nvSpPr>
         <p:spPr>
           <a:xfrm>
-            <a:off x="502920" y="4251960"/>
-            <a:ext cx="3611880" cy="1783080"/>
+            <a:off x="6766560" y="1280160"/>
+            <a:ext cx="4937760" cy="2240280"/>
           </a:xfrm>
           <a:prstGeom prst="rect">
             <a:avLst/>
@@ -5970,14 +6043,14 @@
       </p:sp>
       <p:sp>
         <p:nvSpPr>
-          <p:cNvPr id="15" name="TextBox 14"/>
+          <p:cNvPr id="11" name="TextBox 10"/>
           <p:cNvSpPr txBox="1"/>
           <p:nvPr/>
         </p:nvSpPr>
         <p:spPr>
           <a:xfrm>
-            <a:off x="667512" y="4370832"/>
-            <a:ext cx="3282696" cy="1545336"/>
+            <a:off x="6931152" y="1399031"/>
+            <a:ext cx="4608576" cy="2002536"/>
           </a:xfrm>
           <a:prstGeom prst="rect">
             <a:avLst/>
@@ -5991,13 +6064,13 @@
           <a:lstStyle/>
           <a:p>
             <a:r>
-              <a:rPr sz="1250" b="1" spc="100">
+              <a:rPr sz="1400" b="1" spc="100">
                 <a:solidFill>
                   <a:srgbClr val="16213D"/>
                 </a:solidFill>
                 <a:latin typeface="Cambria"/>
               </a:rPr>
-              <a:t>WHAT IT WOULD HAVE MEASURED</a:t>
+              <a:t>THE IDEA</a:t>
             </a:r>
           </a:p>
           <a:p>
@@ -6007,13 +6080,13 @@
               </a:spcBef>
             </a:pPr>
             <a:r>
-              <a:rPr sz="1100">
+              <a:rPr sz="1300">
                 <a:solidFill>
                   <a:srgbClr val="222A3F"/>
                 </a:solidFill>
                 <a:latin typeface="Cambria"/>
               </a:rPr>
-              <a:t>•  Open country with no terrain in the path: the true maximum of the radios</a:t>
+              <a:t>•  Put the radio's antenna on the roof of the car instead of inside it</a:t>
             </a:r>
           </a:p>
           <a:p>
@@ -6023,27 +6096,43 @@
               </a:spcBef>
             </a:pPr>
             <a:r>
-              <a:rPr sz="1100">
+              <a:rPr sz="1300">
                 <a:solidFill>
                   <a:srgbClr val="222A3F"/>
                 </a:solidFill>
                 <a:latin typeface="Cambria"/>
               </a:rPr>
-              <a:t>•  Measured so far: 0.5 mi in town, 3.75 mi on a farm road, 4.7 mi from the canyon rim</a:t>
-            </a:r>
-          </a:p>
-        </p:txBody>
-      </p:sp>
-      <p:sp>
-        <p:nvSpPr>
-          <p:cNvPr id="16" name="Rectangle 15"/>
+              <a:t>•  Drive two cars apart on open road with no hills in between</a:t>
+            </a:r>
+          </a:p>
+          <a:p>
+            <a:pPr>
+              <a:spcBef>
+                <a:spcPts val="400"/>
+              </a:spcBef>
+            </a:pPr>
+            <a:r>
+              <a:rPr sz="1300">
+                <a:solidFill>
+                  <a:srgbClr val="222A3F"/>
+                </a:solidFill>
+                <a:latin typeface="Cambria"/>
+              </a:rPr>
+              <a:t>•  Record the distance where the display says LINK LOST</a:t>
+            </a:r>
+          </a:p>
+        </p:txBody>
+      </p:sp>
+      <p:sp>
+        <p:nvSpPr>
+          <p:cNvPr id="12" name="Rectangle 11"/>
           <p:cNvSpPr/>
           <p:nvPr/>
         </p:nvSpPr>
         <p:spPr>
           <a:xfrm>
-            <a:off x="4274820" y="4251960"/>
-            <a:ext cx="3611880" cy="1783080"/>
+            <a:off x="6766560" y="3703320"/>
+            <a:ext cx="4937760" cy="2240280"/>
           </a:xfrm>
           <a:prstGeom prst="rect">
             <a:avLst/>
@@ -6053,7 +6142,7 @@
           </a:solidFill>
           <a:ln w="15875">
             <a:solidFill>
-              <a:srgbClr val="C43A4B"/>
+              <a:srgbClr val="E58E1A"/>
             </a:solidFill>
           </a:ln>
           <a:effectLst/>
@@ -6082,14 +6171,14 @@
       </p:sp>
       <p:sp>
         <p:nvSpPr>
-          <p:cNvPr id="17" name="TextBox 16"/>
+          <p:cNvPr id="13" name="TextBox 12"/>
           <p:cNvSpPr txBox="1"/>
           <p:nvPr/>
         </p:nvSpPr>
         <p:spPr>
           <a:xfrm>
-            <a:off x="4439412" y="4370832"/>
-            <a:ext cx="3282696" cy="1545336"/>
+            <a:off x="6931152" y="3822191"/>
+            <a:ext cx="4608576" cy="2002536"/>
           </a:xfrm>
           <a:prstGeom prst="rect">
             <a:avLst/>
@@ -6103,13 +6192,13 @@
           <a:lstStyle/>
           <a:p>
             <a:r>
-              <a:rPr sz="1250" b="1" spc="100">
-                <a:solidFill>
-                  <a:srgbClr val="C43A4B"/>
+              <a:rPr sz="1400" b="1" spc="100">
+                <a:solidFill>
+                  <a:srgbClr val="E58E1A"/>
                 </a:solidFill>
                 <a:latin typeface="Cambria"/>
               </a:rPr>
-              <a:t>WHAT HAPPENED ON SITE</a:t>
+              <a:t>WHY IT MATTERS</a:t>
             </a:r>
           </a:p>
           <a:p>
@@ -6119,13 +6208,13 @@
               </a:spcBef>
             </a:pPr>
             <a:r>
-              <a:rPr sz="1100">
+              <a:rPr sz="1300">
                 <a:solidFill>
                   <a:srgbClr val="222A3F"/>
                 </a:solidFill>
                 <a:latin typeface="Cambria"/>
               </a:rPr>
-              <a:t>•  Flash flood warning from the National Weather Service for the area, 'do not attempt to travel'</a:t>
+              <a:t>•  Every range we have so far was limited by terrain or buildings: 0.5 mi in town, 3.75 mi on a farm road, 4.7 mi from a canyon rim</a:t>
             </a:r>
           </a:p>
           <a:p>
@@ -6135,125 +6224,13 @@
               </a:spcBef>
             </a:pPr>
             <a:r>
-              <a:rPr sz="1100">
+              <a:rPr sz="1300">
                 <a:solidFill>
                   <a:srgbClr val="222A3F"/>
                 </a:solidFill>
                 <a:latin typeface="Cambria"/>
               </a:rPr>
-              <a:t>•  Low cloud on the peaks, rain moving in; the pre-flight (both OLEDs 912.875) was done, the drive was not started</a:t>
-            </a:r>
-          </a:p>
-        </p:txBody>
-      </p:sp>
-      <p:sp>
-        <p:nvSpPr>
-          <p:cNvPr id="18" name="Rectangle 17"/>
-          <p:cNvSpPr/>
-          <p:nvPr/>
-        </p:nvSpPr>
-        <p:spPr>
-          <a:xfrm>
-            <a:off x="8046720" y="4251960"/>
-            <a:ext cx="3611880" cy="1783080"/>
-          </a:xfrm>
-          <a:prstGeom prst="rect">
-            <a:avLst/>
-          </a:prstGeom>
-          <a:solidFill>
-            <a:srgbClr val="F2F5FA"/>
-          </a:solidFill>
-          <a:ln w="15875">
-            <a:solidFill>
-              <a:srgbClr val="1F9D68"/>
-            </a:solidFill>
-          </a:ln>
-          <a:effectLst/>
-        </p:spPr>
-        <p:style>
-          <a:lnRef idx="1">
-            <a:schemeClr val="accent1"/>
-          </a:lnRef>
-          <a:fillRef idx="3">
-            <a:schemeClr val="accent1"/>
-          </a:fillRef>
-          <a:effectRef idx="2">
-            <a:schemeClr val="accent1"/>
-          </a:effectRef>
-          <a:fontRef idx="minor">
-            <a:schemeClr val="lt1"/>
-          </a:fontRef>
-        </p:style>
-        <p:txBody>
-          <a:bodyPr rtlCol="0" anchor="ctr"/>
-          <a:lstStyle/>
-          <a:p>
-            <a:pPr algn="ctr"/>
-          </a:p>
-        </p:txBody>
-      </p:sp>
-      <p:sp>
-        <p:nvSpPr>
-          <p:cNvPr id="19" name="TextBox 18"/>
-          <p:cNvSpPr txBox="1"/>
-          <p:nvPr/>
-        </p:nvSpPr>
-        <p:spPr>
-          <a:xfrm>
-            <a:off x="8211312" y="4370832"/>
-            <a:ext cx="3282696" cy="1545336"/>
-          </a:xfrm>
-          <a:prstGeom prst="rect">
-            <a:avLst/>
-          </a:prstGeom>
-          <a:noFill/>
-        </p:spPr>
-        <p:txBody>
-          <a:bodyPr wrap="square" lIns="0" rIns="0" tIns="0" bIns="0">
-            <a:spAutoFit/>
-          </a:bodyPr>
-          <a:lstStyle/>
-          <a:p>
-            <a:r>
-              <a:rPr sz="1250" b="1" spc="100">
-                <a:solidFill>
-                  <a:srgbClr val="1F9D68"/>
-                </a:solidFill>
-                <a:latin typeface="Cambria"/>
-              </a:rPr>
-              <a:t>RESCHEDULE</a:t>
-            </a:r>
-          </a:p>
-          <a:p>
-            <a:pPr>
-              <a:spcBef>
-                <a:spcPts val="400"/>
-              </a:spcBef>
-            </a:pPr>
-            <a:r>
-              <a:rPr sz="1100">
-                <a:solidFill>
-                  <a:srgbClr val="222A3F"/>
-                </a:solidFill>
-                <a:latin typeface="Cambria"/>
-              </a:rPr>
-              <a:t>•  Next clear weekend, same site and plan: two cars, radios on the roofs, drive apart until LINK LOST, log the last packet</a:t>
-            </a:r>
-          </a:p>
-          <a:p>
-            <a:pPr>
-              <a:spcBef>
-                <a:spcPts val="400"/>
-              </a:spcBef>
-            </a:pPr>
-            <a:r>
-              <a:rPr sz="1100">
-                <a:solidFill>
-                  <a:srgbClr val="222A3F"/>
-                </a:solidFill>
-                <a:latin typeface="Cambria"/>
-              </a:rPr>
-              <a:t>•  Both radios now carry fix 1 (sheet 4), so a flat battery on the way cannot cost the test</a:t>
+              <a:t>•  Open country with a roof antenna gives the true maximum of the hardware</a:t>
             </a:r>
           </a:p>
         </p:txBody>
@@ -6464,67 +6441,21 @@
                 </a:solidFill>
                 <a:latin typeface="Courier New"/>
               </a:rPr>
-              <a:t>SHEET 03/06  STATUS  2026-10-28</a:t>
-            </a:r>
-          </a:p>
-        </p:txBody>
-      </p:sp>
-      <p:sp>
-        <p:nvSpPr>
-          <p:cNvPr id="7" name="Rectangle 6"/>
-          <p:cNvSpPr/>
-          <p:nvPr/>
-        </p:nvSpPr>
-        <p:spPr>
-          <a:xfrm>
-            <a:off x="9646920" y="347472"/>
-            <a:ext cx="2148840" cy="420624"/>
-          </a:xfrm>
-          <a:prstGeom prst="rect">
-            <a:avLst/>
-          </a:prstGeom>
-          <a:solidFill>
-            <a:srgbClr val="FFFFFF"/>
-          </a:solidFill>
-          <a:ln w="19050">
-            <a:solidFill>
-              <a:srgbClr val="1199BD"/>
-            </a:solidFill>
-          </a:ln>
-          <a:effectLst/>
-        </p:spPr>
-        <p:style>
-          <a:lnRef idx="1">
-            <a:schemeClr val="accent1"/>
-          </a:lnRef>
-          <a:fillRef idx="3">
-            <a:schemeClr val="accent1"/>
-          </a:fillRef>
-          <a:effectRef idx="2">
-            <a:schemeClr val="accent1"/>
-          </a:effectRef>
-          <a:fontRef idx="minor">
-            <a:schemeClr val="lt1"/>
-          </a:fontRef>
-        </p:style>
-        <p:txBody>
-          <a:bodyPr rtlCol="0" anchor="ctr"/>
-          <a:lstStyle/>
-          <a:p>
-            <a:pPr algn="ctr"/>
-          </a:p>
-        </p:txBody>
-      </p:sp>
-      <p:sp>
-        <p:nvSpPr>
-          <p:cNvPr id="8" name="TextBox 7"/>
+              <a:t>SHEET 03/09  STATUS  2026-10-28</a:t>
+            </a:r>
+          </a:p>
+        </p:txBody>
+      </p:sp>
+      <p:sp>
+        <p:nvSpPr>
+          <p:cNvPr id="7" name="TextBox 6"/>
           <p:cNvSpPr txBox="1"/>
           <p:nvPr/>
         </p:nvSpPr>
         <p:spPr>
           <a:xfrm>
-            <a:off x="9646920" y="402336"/>
-            <a:ext cx="2148840" cy="310896"/>
+            <a:off x="457200" y="329184"/>
+            <a:ext cx="9052560" cy="566928"/>
           </a:xfrm>
           <a:prstGeom prst="rect">
             <a:avLst/>
@@ -6537,29 +6468,29 @@
           </a:bodyPr>
           <a:lstStyle/>
           <a:p>
-            <a:pPr algn="ctr"/>
-            <a:r>
-              <a:rPr sz="1100" b="1" i="0">
-                <a:solidFill>
-                  <a:srgbClr val="1199BD"/>
-                </a:solidFill>
-                <a:latin typeface="Courier New"/>
+            <a:pPr algn="l"/>
+            <a:r>
+              <a:rPr sz="2300" b="1" i="0" spc="200">
+                <a:solidFill>
+                  <a:srgbClr val="16213D"/>
+                </a:solidFill>
+                <a:latin typeface="Cambria"/>
               </a:rPr>
-              <a:t>OWNER: DEO</a:t>
-            </a:r>
-          </a:p>
-        </p:txBody>
-      </p:sp>
-      <p:sp>
-        <p:nvSpPr>
-          <p:cNvPr id="9" name="TextBox 8"/>
+              <a:t>ON SITE, 25 OCTOBER: CANCELLED BY WEATHER</a:t>
+            </a:r>
+          </a:p>
+        </p:txBody>
+      </p:sp>
+      <p:sp>
+        <p:nvSpPr>
+          <p:cNvPr id="8" name="TextBox 7"/>
           <p:cNvSpPr txBox="1"/>
           <p:nvPr/>
         </p:nvSpPr>
         <p:spPr>
           <a:xfrm>
-            <a:off x="457200" y="329184"/>
-            <a:ext cx="9052560" cy="566928"/>
+            <a:off x="475488" y="868680"/>
+            <a:ext cx="9052560" cy="320040"/>
           </a:xfrm>
           <a:prstGeom prst="rect">
             <a:avLst/>
@@ -6574,55 +6505,20 @@
           <a:p>
             <a:pPr algn="l"/>
             <a:r>
-              <a:rPr sz="2300" b="1" i="0" spc="200">
-                <a:solidFill>
-                  <a:srgbClr val="16213D"/>
+              <a:rPr sz="1250" b="0" i="1">
+                <a:solidFill>
+                  <a:srgbClr val="5E6B85"/>
                 </a:solidFill>
                 <a:latin typeface="Cambria"/>
               </a:rPr>
-              <a:t>THE WEEKEND INSTEAD: WHY THE RADIOS FORGET</a:t>
-            </a:r>
-          </a:p>
-        </p:txBody>
-      </p:sp>
-      <p:sp>
-        <p:nvSpPr>
-          <p:cNvPr id="10" name="TextBox 9"/>
-          <p:cNvSpPr txBox="1"/>
-          <p:nvPr/>
-        </p:nvSpPr>
-        <p:spPr>
-          <a:xfrm>
-            <a:off x="475488" y="868680"/>
-            <a:ext cx="9052560" cy="320040"/>
-          </a:xfrm>
-          <a:prstGeom prst="rect">
-            <a:avLst/>
-          </a:prstGeom>
-          <a:noFill/>
-        </p:spPr>
-        <p:txBody>
-          <a:bodyPr wrap="square" lIns="0" rIns="0" tIns="0" bIns="0">
-            <a:spAutoFit/>
-          </a:bodyPr>
-          <a:lstStyle/>
-          <a:p>
-            <a:pPr algn="l"/>
-            <a:r>
-              <a:rPr sz="1250" b="0" i="1">
-                <a:solidFill>
-                  <a:srgbClr val="5E6B85"/>
-                </a:solidFill>
-                <a:latin typeface="Cambria"/>
-              </a:rPr>
-              <a:t>A Qualcomm engineer asked whether the memory itself was at fault. We measured it.</a:t>
+              <a:t>Below the Capitan Mountains, north of Capitan, New Mexico</a:t>
             </a:r>
           </a:p>
         </p:txBody>
       </p:sp>
       <p:pic>
         <p:nvPicPr>
-          <p:cNvPr id="11" name="Picture 10" descr="g_maps_compare.png"/>
+          <p:cNvPr id="9" name="Picture 8" descr="g_nm_cancel.png"/>
           <p:cNvPicPr>
             <a:picLocks noChangeAspect="1"/>
           </p:cNvPicPr>
@@ -6636,14 +6532,73 @@
         </p:blipFill>
         <p:spPr>
           <a:xfrm>
-            <a:off x="502920" y="1280160"/>
-            <a:ext cx="7863840" cy="2283050"/>
+            <a:off x="502920" y="1234440"/>
+            <a:ext cx="7680960" cy="2743200"/>
           </a:xfrm>
           <a:prstGeom prst="rect">
             <a:avLst/>
           </a:prstGeom>
         </p:spPr>
       </p:pic>
+      <p:pic>
+        <p:nvPicPr>
+          <p:cNvPr id="10" name="Picture 9" descr="g_nm_alert.jpg"/>
+          <p:cNvPicPr>
+            <a:picLocks noChangeAspect="1"/>
+          </p:cNvPicPr>
+          <p:nvPr/>
+        </p:nvPicPr>
+        <p:blipFill>
+          <a:blip r:embed="rId3"/>
+          <a:stretch>
+            <a:fillRect/>
+          </a:stretch>
+        </p:blipFill>
+        <p:spPr>
+          <a:xfrm>
+            <a:off x="8366760" y="1417320"/>
+            <a:ext cx="3337560" cy="1201522"/>
+          </a:xfrm>
+          <a:prstGeom prst="rect">
+            <a:avLst/>
+          </a:prstGeom>
+        </p:spPr>
+      </p:pic>
+      <p:sp>
+        <p:nvSpPr>
+          <p:cNvPr id="11" name="TextBox 10"/>
+          <p:cNvSpPr txBox="1"/>
+          <p:nvPr/>
+        </p:nvSpPr>
+        <p:spPr>
+          <a:xfrm>
+            <a:off x="8366760" y="2697480"/>
+            <a:ext cx="3337560" cy="1280160"/>
+          </a:xfrm>
+          <a:prstGeom prst="rect">
+            <a:avLst/>
+          </a:prstGeom>
+          <a:noFill/>
+        </p:spPr>
+        <p:txBody>
+          <a:bodyPr wrap="square" lIns="0" rIns="0" tIns="0" bIns="0">
+            <a:spAutoFit/>
+          </a:bodyPr>
+          <a:lstStyle/>
+          <a:p>
+            <a:pPr algn="l"/>
+            <a:r>
+              <a:rPr sz="1000" b="1" i="0">
+                <a:solidFill>
+                  <a:srgbClr val="C43A4B"/>
+                </a:solidFill>
+                <a:latin typeface="Courier New"/>
+              </a:rPr>
+              <a:t>NATIONAL WEATHER SERVICE: FLASH FLOOD WARNING FOR THE AREA UNTIL 9:15 PM MDT. "DO NOT ATTEMPT TO TRAVEL."</a:t>
+            </a:r>
+          </a:p>
+        </p:txBody>
+      </p:sp>
       <p:sp>
         <p:nvSpPr>
           <p:cNvPr id="12" name="Rectangle 11"/>
@@ -6652,8 +6607,8 @@
         </p:nvSpPr>
         <p:spPr>
           <a:xfrm>
-            <a:off x="8549640" y="1280160"/>
-            <a:ext cx="3154680" cy="2286000"/>
+            <a:off x="502920" y="4251960"/>
+            <a:ext cx="11201400" cy="1783080"/>
           </a:xfrm>
           <a:prstGeom prst="rect">
             <a:avLst/>
@@ -6663,7 +6618,7 @@
           </a:solidFill>
           <a:ln w="15875">
             <a:solidFill>
-              <a:srgbClr val="E58E1A"/>
+              <a:srgbClr val="C43A4B"/>
             </a:solidFill>
           </a:ln>
           <a:effectLst/>
@@ -6698,8 +6653,8 @@
         </p:nvSpPr>
         <p:spPr>
           <a:xfrm>
-            <a:off x="8714232" y="1399031"/>
-            <a:ext cx="2825496" cy="2048256"/>
+            <a:off x="667512" y="4370832"/>
+            <a:ext cx="10872216" cy="1545336"/>
           </a:xfrm>
           <a:prstGeom prst="rect">
             <a:avLst/>
@@ -6713,13 +6668,13 @@
           <a:lstStyle/>
           <a:p>
             <a:r>
-              <a:rPr sz="1250" b="1" spc="100">
-                <a:solidFill>
-                  <a:srgbClr val="E58E1A"/>
+              <a:rPr sz="1400" b="1" spc="100">
+                <a:solidFill>
+                  <a:srgbClr val="C43A4B"/>
                 </a:solidFill>
                 <a:latin typeface="Cambria"/>
               </a:rPr>
-              <a:t>THE MEASUREMENT</a:t>
+              <a:t>WHAT HAPPENED</a:t>
             </a:r>
           </a:p>
           <a:p>
@@ -6729,13 +6684,13 @@
               </a:spcBef>
             </a:pPr>
             <a:r>
-              <a:rPr sz="1050">
+              <a:rPr sz="1300">
                 <a:solidFill>
                   <a:srgbClr val="222A3F"/>
                 </a:solidFill>
                 <a:latin typeface="Cambria"/>
               </a:rPr>
-              <a:t>•  Settings area of the flash read three times with the firmware stopped, on both radios</a:t>
+              <a:t>•  The team was on site with both radios checked and ready (both screens read 912.875 MHz)</a:t>
             </a:r>
           </a:p>
           <a:p>
@@ -6745,13 +6700,13 @@
               </a:spcBef>
             </a:pPr>
             <a:r>
-              <a:rPr sz="1050">
+              <a:rPr sz="1300">
                 <a:solidFill>
                   <a:srgbClr val="222A3F"/>
                 </a:solidFill>
                 <a:latin typeface="Cambria"/>
               </a:rPr>
-              <a:t>•  SF: 21 sectors gave different bytes on every pass</a:t>
+              <a:t>•  Low cloud sat on the peaks and rain was moving in</a:t>
             </a:r>
           </a:p>
           <a:p>
@@ -6761,540 +6716,13 @@
               </a:spcBef>
             </a:pPr>
             <a:r>
-              <a:rPr sz="1050">
+              <a:rPr sz="1300">
                 <a:solidFill>
                   <a:srgbClr val="222A3F"/>
                 </a:solidFill>
                 <a:latin typeface="Cambria"/>
               </a:rPr>
-              <a:t>•  RG: zero</a:t>
-            </a:r>
-          </a:p>
-          <a:p>
-            <a:pPr>
-              <a:spcBef>
-                <a:spcPts val="400"/>
-              </a:spcBef>
-            </a:pPr>
-            <a:r>
-              <a:rPr sz="1050">
-                <a:solidFill>
-                  <a:srgbClr val="222A3F"/>
-                </a:solidFill>
-                <a:latin typeface="Cambria"/>
-              </a:rPr>
-              <a:t>•  Program code, read the same way: zero differences</a:t>
-            </a:r>
-          </a:p>
-        </p:txBody>
-      </p:sp>
-      <p:sp>
-        <p:nvSpPr>
-          <p:cNvPr id="14" name="Rectangle 13"/>
-          <p:cNvSpPr/>
-          <p:nvPr/>
-        </p:nvSpPr>
-        <p:spPr>
-          <a:xfrm>
-            <a:off x="8549640" y="3703320"/>
-            <a:ext cx="3154680" cy="2240280"/>
-          </a:xfrm>
-          <a:prstGeom prst="rect">
-            <a:avLst/>
-          </a:prstGeom>
-          <a:solidFill>
-            <a:srgbClr val="F2F5FA"/>
-          </a:solidFill>
-          <a:ln w="15875">
-            <a:solidFill>
-              <a:srgbClr val="1F9D68"/>
-            </a:solidFill>
-          </a:ln>
-          <a:effectLst/>
-        </p:spPr>
-        <p:style>
-          <a:lnRef idx="1">
-            <a:schemeClr val="accent1"/>
-          </a:lnRef>
-          <a:fillRef idx="3">
-            <a:schemeClr val="accent1"/>
-          </a:fillRef>
-          <a:effectRef idx="2">
-            <a:schemeClr val="accent1"/>
-          </a:effectRef>
-          <a:fontRef idx="minor">
-            <a:schemeClr val="lt1"/>
-          </a:fontRef>
-        </p:style>
-        <p:txBody>
-          <a:bodyPr rtlCol="0" anchor="ctr"/>
-          <a:lstStyle/>
-          <a:p>
-            <a:pPr algn="ctr"/>
-          </a:p>
-        </p:txBody>
-      </p:sp>
-      <p:sp>
-        <p:nvSpPr>
-          <p:cNvPr id="15" name="TextBox 14"/>
-          <p:cNvSpPr txBox="1"/>
-          <p:nvPr/>
-        </p:nvSpPr>
-        <p:spPr>
-          <a:xfrm>
-            <a:off x="8714232" y="3822191"/>
-            <a:ext cx="2825496" cy="2002536"/>
-          </a:xfrm>
-          <a:prstGeom prst="rect">
-            <a:avLst/>
-          </a:prstGeom>
-          <a:noFill/>
-        </p:spPr>
-        <p:txBody>
-          <a:bodyPr wrap="square" lIns="0" rIns="0" tIns="0" bIns="0">
-            <a:spAutoFit/>
-          </a:bodyPr>
-          <a:lstStyle/>
-          <a:p>
-            <a:r>
-              <a:rPr sz="1250" b="1" spc="100">
-                <a:solidFill>
-                  <a:srgbClr val="1F9D68"/>
-                </a:solidFill>
-                <a:latin typeface="Cambria"/>
-              </a:rPr>
-              <a:t>THE ANSWER</a:t>
-            </a:r>
-          </a:p>
-          <a:p>
-            <a:pPr>
-              <a:spcBef>
-                <a:spcPts val="400"/>
-              </a:spcBef>
-            </a:pPr>
-            <a:r>
-              <a:rPr sz="1050">
-                <a:solidFill>
-                  <a:srgbClr val="222A3F"/>
-                </a:solidFill>
-                <a:latin typeface="Cambria"/>
-              </a:rPr>
-              <a:t>•  The cells are healthy: erased and rewritten on a good supply they held every pattern</a:t>
-            </a:r>
-          </a:p>
-          <a:p>
-            <a:pPr>
-              <a:spcBef>
-                <a:spcPts val="400"/>
-              </a:spcBef>
-            </a:pPr>
-            <a:r>
-              <a:rPr sz="1050">
-                <a:solidFill>
-                  <a:srgbClr val="222A3F"/>
-                </a:solidFill>
-                <a:latin typeface="Cambria"/>
-              </a:rPr>
-              <a:t>•  They were left half-written when the firmware wrote to flash while the battery sagged below the chip's 2.7 V minimum</a:t>
-            </a:r>
-          </a:p>
-          <a:p>
-            <a:pPr>
-              <a:spcBef>
-                <a:spcPts val="400"/>
-              </a:spcBef>
-            </a:pPr>
-            <a:r>
-              <a:rPr sz="1050">
-                <a:solidFill>
-                  <a:srgbClr val="222A3F"/>
-                </a:solidFill>
-                <a:latin typeface="Cambria"/>
-              </a:rPr>
-              <a:t>•  The firmware then overwrites any unreadable file with factory settings</a:t>
-            </a:r>
-          </a:p>
-        </p:txBody>
-      </p:sp>
-      <p:sp>
-        <p:nvSpPr>
-          <p:cNvPr id="16" name="TextBox 15"/>
-          <p:cNvSpPr txBox="1"/>
-          <p:nvPr/>
-        </p:nvSpPr>
-        <p:spPr>
-          <a:xfrm>
-            <a:off x="502920" y="3703320"/>
-            <a:ext cx="7863840" cy="822960"/>
-          </a:xfrm>
-          <a:prstGeom prst="rect">
-            <a:avLst/>
-          </a:prstGeom>
-          <a:noFill/>
-        </p:spPr>
-        <p:txBody>
-          <a:bodyPr wrap="square" lIns="0" rIns="0" tIns="0" bIns="0">
-            <a:spAutoFit/>
-          </a:bodyPr>
-          <a:lstStyle/>
-          <a:p>
-            <a:pPr algn="l"/>
-            <a:r>
-              <a:rPr sz="1150" b="0" i="0">
-                <a:solidFill>
-                  <a:srgbClr val="222A3F"/>
-                </a:solidFill>
-                <a:latin typeface="Cambria"/>
-              </a:rPr>
-              <a:t>Each square is one 4 KB sector. Red: read differently every time with nothing running. Green: the live settings files. SF was repaired the same day (21 to 0 unstable sectors). The full chain of evidence, the firmware source, the datasheets and the upstream reports are the 4 November presentation.</a:t>
-            </a:r>
-          </a:p>
-        </p:txBody>
-      </p:sp>
-      <p:sp>
-        <p:nvSpPr>
-          <p:cNvPr id="17" name="Rectangle 16"/>
-          <p:cNvSpPr/>
-          <p:nvPr/>
-        </p:nvSpPr>
-        <p:spPr>
-          <a:xfrm>
-            <a:off x="502920" y="4663440"/>
-            <a:ext cx="2468880" cy="1234440"/>
-          </a:xfrm>
-          <a:prstGeom prst="rect">
-            <a:avLst/>
-          </a:prstGeom>
-          <a:solidFill>
-            <a:srgbClr val="F2F5FA"/>
-          </a:solidFill>
-          <a:ln w="12700">
-            <a:solidFill>
-              <a:srgbClr val="9AA7BE"/>
-            </a:solidFill>
-          </a:ln>
-          <a:effectLst/>
-        </p:spPr>
-        <p:style>
-          <a:lnRef idx="1">
-            <a:schemeClr val="accent1"/>
-          </a:lnRef>
-          <a:fillRef idx="3">
-            <a:schemeClr val="accent1"/>
-          </a:fillRef>
-          <a:effectRef idx="2">
-            <a:schemeClr val="accent1"/>
-          </a:effectRef>
-          <a:fontRef idx="minor">
-            <a:schemeClr val="lt1"/>
-          </a:fontRef>
-        </p:style>
-        <p:txBody>
-          <a:bodyPr rtlCol="0" anchor="ctr"/>
-          <a:lstStyle/>
-          <a:p>
-            <a:pPr algn="ctr"/>
-          </a:p>
-        </p:txBody>
-      </p:sp>
-      <p:sp>
-        <p:nvSpPr>
-          <p:cNvPr id="18" name="TextBox 17"/>
-          <p:cNvSpPr txBox="1"/>
-          <p:nvPr/>
-        </p:nvSpPr>
-        <p:spPr>
-          <a:xfrm>
-            <a:off x="502920" y="4773168"/>
-            <a:ext cx="2468880" cy="558800"/>
-          </a:xfrm>
-          <a:prstGeom prst="rect">
-            <a:avLst/>
-          </a:prstGeom>
-          <a:noFill/>
-        </p:spPr>
-        <p:txBody>
-          <a:bodyPr wrap="square" lIns="0" rIns="0" tIns="0" bIns="0">
-            <a:spAutoFit/>
-          </a:bodyPr>
-          <a:lstStyle/>
-          <a:p>
-            <a:pPr algn="ctr"/>
-            <a:r>
-              <a:rPr sz="2200" b="1" i="0">
-                <a:solidFill>
-                  <a:srgbClr val="C43A4B"/>
-                </a:solidFill>
-                <a:latin typeface="Cambria"/>
-              </a:rPr>
-              <a:t>21 -&gt; 0</a:t>
-            </a:r>
-          </a:p>
-        </p:txBody>
-      </p:sp>
-      <p:sp>
-        <p:nvSpPr>
-          <p:cNvPr id="19" name="TextBox 18"/>
-          <p:cNvSpPr txBox="1"/>
-          <p:nvPr/>
-        </p:nvSpPr>
-        <p:spPr>
-          <a:xfrm>
-            <a:off x="640080" y="5423408"/>
-            <a:ext cx="2194560" cy="401320"/>
-          </a:xfrm>
-          <a:prstGeom prst="rect">
-            <a:avLst/>
-          </a:prstGeom>
-          <a:noFill/>
-        </p:spPr>
-        <p:txBody>
-          <a:bodyPr wrap="square" lIns="0" rIns="0" tIns="0" bIns="0">
-            <a:spAutoFit/>
-          </a:bodyPr>
-          <a:lstStyle/>
-          <a:p>
-            <a:pPr algn="ctr"/>
-            <a:r>
-              <a:rPr sz="1100" b="0" i="0">
-                <a:solidFill>
-                  <a:srgbClr val="222A3F"/>
-                </a:solidFill>
-                <a:latin typeface="Cambria"/>
-              </a:rPr>
-              <a:t>unstable sectors on SF, before and after repair</a:t>
-            </a:r>
-          </a:p>
-        </p:txBody>
-      </p:sp>
-      <p:sp>
-        <p:nvSpPr>
-          <p:cNvPr id="20" name="Rectangle 19"/>
-          <p:cNvSpPr/>
-          <p:nvPr/>
-        </p:nvSpPr>
-        <p:spPr>
-          <a:xfrm>
-            <a:off x="3200400" y="4663440"/>
-            <a:ext cx="2468880" cy="1234440"/>
-          </a:xfrm>
-          <a:prstGeom prst="rect">
-            <a:avLst/>
-          </a:prstGeom>
-          <a:solidFill>
-            <a:srgbClr val="F2F5FA"/>
-          </a:solidFill>
-          <a:ln w="12700">
-            <a:solidFill>
-              <a:srgbClr val="9AA7BE"/>
-            </a:solidFill>
-          </a:ln>
-          <a:effectLst/>
-        </p:spPr>
-        <p:style>
-          <a:lnRef idx="1">
-            <a:schemeClr val="accent1"/>
-          </a:lnRef>
-          <a:fillRef idx="3">
-            <a:schemeClr val="accent1"/>
-          </a:fillRef>
-          <a:effectRef idx="2">
-            <a:schemeClr val="accent1"/>
-          </a:effectRef>
-          <a:fontRef idx="minor">
-            <a:schemeClr val="lt1"/>
-          </a:fontRef>
-        </p:style>
-        <p:txBody>
-          <a:bodyPr rtlCol="0" anchor="ctr"/>
-          <a:lstStyle/>
-          <a:p>
-            <a:pPr algn="ctr"/>
-          </a:p>
-        </p:txBody>
-      </p:sp>
-      <p:sp>
-        <p:nvSpPr>
-          <p:cNvPr id="21" name="TextBox 20"/>
-          <p:cNvSpPr txBox="1"/>
-          <p:nvPr/>
-        </p:nvSpPr>
-        <p:spPr>
-          <a:xfrm>
-            <a:off x="3200400" y="4773168"/>
-            <a:ext cx="2468880" cy="558800"/>
-          </a:xfrm>
-          <a:prstGeom prst="rect">
-            <a:avLst/>
-          </a:prstGeom>
-          <a:noFill/>
-        </p:spPr>
-        <p:txBody>
-          <a:bodyPr wrap="square" lIns="0" rIns="0" tIns="0" bIns="0">
-            <a:spAutoFit/>
-          </a:bodyPr>
-          <a:lstStyle/>
-          <a:p>
-            <a:pPr algn="ctr"/>
-            <a:r>
-              <a:rPr sz="2200" b="1" i="0">
-                <a:solidFill>
-                  <a:srgbClr val="1F9D68"/>
-                </a:solidFill>
-                <a:latin typeface="Cambria"/>
-              </a:rPr>
-              <a:t>0</a:t>
-            </a:r>
-          </a:p>
-        </p:txBody>
-      </p:sp>
-      <p:sp>
-        <p:nvSpPr>
-          <p:cNvPr id="22" name="TextBox 21"/>
-          <p:cNvSpPr txBox="1"/>
-          <p:nvPr/>
-        </p:nvSpPr>
-        <p:spPr>
-          <a:xfrm>
-            <a:off x="3337560" y="5423408"/>
-            <a:ext cx="2194560" cy="401320"/>
-          </a:xfrm>
-          <a:prstGeom prst="rect">
-            <a:avLst/>
-          </a:prstGeom>
-          <a:noFill/>
-        </p:spPr>
-        <p:txBody>
-          <a:bodyPr wrap="square" lIns="0" rIns="0" tIns="0" bIns="0">
-            <a:spAutoFit/>
-          </a:bodyPr>
-          <a:lstStyle/>
-          <a:p>
-            <a:pPr algn="ctr"/>
-            <a:r>
-              <a:rPr sz="1100" b="0" i="0">
-                <a:solidFill>
-                  <a:srgbClr val="222A3F"/>
-                </a:solidFill>
-                <a:latin typeface="Cambria"/>
-              </a:rPr>
-              <a:t>unstable sectors on RG</a:t>
-            </a:r>
-          </a:p>
-        </p:txBody>
-      </p:sp>
-      <p:sp>
-        <p:nvSpPr>
-          <p:cNvPr id="23" name="Rectangle 22"/>
-          <p:cNvSpPr/>
-          <p:nvPr/>
-        </p:nvSpPr>
-        <p:spPr>
-          <a:xfrm>
-            <a:off x="5897880" y="4663440"/>
-            <a:ext cx="2468880" cy="1234440"/>
-          </a:xfrm>
-          <a:prstGeom prst="rect">
-            <a:avLst/>
-          </a:prstGeom>
-          <a:solidFill>
-            <a:srgbClr val="F2F5FA"/>
-          </a:solidFill>
-          <a:ln w="12700">
-            <a:solidFill>
-              <a:srgbClr val="9AA7BE"/>
-            </a:solidFill>
-          </a:ln>
-          <a:effectLst/>
-        </p:spPr>
-        <p:style>
-          <a:lnRef idx="1">
-            <a:schemeClr val="accent1"/>
-          </a:lnRef>
-          <a:fillRef idx="3">
-            <a:schemeClr val="accent1"/>
-          </a:fillRef>
-          <a:effectRef idx="2">
-            <a:schemeClr val="accent1"/>
-          </a:effectRef>
-          <a:fontRef idx="minor">
-            <a:schemeClr val="lt1"/>
-          </a:fontRef>
-        </p:style>
-        <p:txBody>
-          <a:bodyPr rtlCol="0" anchor="ctr"/>
-          <a:lstStyle/>
-          <a:p>
-            <a:pPr algn="ctr"/>
-          </a:p>
-        </p:txBody>
-      </p:sp>
-      <p:sp>
-        <p:nvSpPr>
-          <p:cNvPr id="24" name="TextBox 23"/>
-          <p:cNvSpPr txBox="1"/>
-          <p:nvPr/>
-        </p:nvSpPr>
-        <p:spPr>
-          <a:xfrm>
-            <a:off x="5897880" y="4773168"/>
-            <a:ext cx="2468880" cy="558800"/>
-          </a:xfrm>
-          <a:prstGeom prst="rect">
-            <a:avLst/>
-          </a:prstGeom>
-          <a:noFill/>
-        </p:spPr>
-        <p:txBody>
-          <a:bodyPr wrap="square" lIns="0" rIns="0" tIns="0" bIns="0">
-            <a:spAutoFit/>
-          </a:bodyPr>
-          <a:lstStyle/>
-          <a:p>
-            <a:pPr algn="ctr"/>
-            <a:r>
-              <a:rPr sz="2200" b="1" i="0">
-                <a:solidFill>
-                  <a:srgbClr val="E58E1A"/>
-                </a:solidFill>
-                <a:latin typeface="Cambria"/>
-              </a:rPr>
-              <a:t>260 mV</a:t>
-            </a:r>
-          </a:p>
-        </p:txBody>
-      </p:sp>
-      <p:sp>
-        <p:nvSpPr>
-          <p:cNvPr id="25" name="TextBox 24"/>
-          <p:cNvSpPr txBox="1"/>
-          <p:nvPr/>
-        </p:nvSpPr>
-        <p:spPr>
-          <a:xfrm>
-            <a:off x="6035040" y="5423408"/>
-            <a:ext cx="2194560" cy="401320"/>
-          </a:xfrm>
-          <a:prstGeom prst="rect">
-            <a:avLst/>
-          </a:prstGeom>
-          <a:noFill/>
-        </p:spPr>
-        <p:txBody>
-          <a:bodyPr wrap="square" lIns="0" rIns="0" tIns="0" bIns="0">
-            <a:spAutoFit/>
-          </a:bodyPr>
-          <a:lstStyle/>
-          <a:p>
-            <a:pPr algn="ctr"/>
-            <a:r>
-              <a:rPr sz="1100" b="0" i="0">
-                <a:solidFill>
-                  <a:srgbClr val="222A3F"/>
-                </a:solidFill>
-                <a:latin typeface="Cambria"/>
-              </a:rPr>
-              <a:t>gap between CPU reset (2.44 V) and flash minimum (2.70 V)</a:t>
+              <a:t>•  A National Weather Service flash flood warning covered the area: a travel ban, not a judgment call. The drive was not started</a:t>
             </a:r>
           </a:p>
         </p:txBody>
@@ -7505,32 +6933,65 @@
                 </a:solidFill>
                 <a:latin typeface="Courier New"/>
               </a:rPr>
-              <a:t>SHEET 04/06  STATUS  2026-10-28</a:t>
-            </a:r>
-          </a:p>
-        </p:txBody>
-      </p:sp>
-      <p:sp>
-        <p:nvSpPr>
-          <p:cNvPr id="7" name="Rectangle 6"/>
+              <a:t>SHEET 04/09  STATUS  2026-10-28</a:t>
+            </a:r>
+          </a:p>
+        </p:txBody>
+      </p:sp>
+      <p:sp>
+        <p:nvSpPr>
+          <p:cNvPr id="7" name="TextBox 6"/>
+          <p:cNvSpPr txBox="1"/>
+          <p:nvPr/>
+        </p:nvSpPr>
+        <p:spPr>
+          <a:xfrm>
+            <a:off x="457200" y="329184"/>
+            <a:ext cx="9052560" cy="566928"/>
+          </a:xfrm>
+          <a:prstGeom prst="rect">
+            <a:avLst/>
+          </a:prstGeom>
+          <a:noFill/>
+        </p:spPr>
+        <p:txBody>
+          <a:bodyPr wrap="square" lIns="0" rIns="0" tIns="0" bIns="0">
+            <a:spAutoFit/>
+          </a:bodyPr>
+          <a:lstStyle/>
+          <a:p>
+            <a:pPr algn="l"/>
+            <a:r>
+              <a:rPr sz="2300" b="1" i="0" spc="200">
+                <a:solidFill>
+                  <a:srgbClr val="16213D"/>
+                </a:solidFill>
+                <a:latin typeface="Cambria"/>
+              </a:rPr>
+              <a:t>RESCHEDULED: SAME TEST, NEXT CLEAR WEEKEND</a:t>
+            </a:r>
+          </a:p>
+        </p:txBody>
+      </p:sp>
+      <p:sp>
+        <p:nvSpPr>
+          <p:cNvPr id="8" name="Rectangle 7"/>
           <p:cNvSpPr/>
           <p:nvPr/>
         </p:nvSpPr>
         <p:spPr>
           <a:xfrm>
-            <a:off x="9646920" y="347472"/>
-            <a:ext cx="2148840" cy="420624"/>
+            <a:off x="502920" y="1280160"/>
+            <a:ext cx="640080" cy="777240"/>
           </a:xfrm>
           <a:prstGeom prst="rect">
             <a:avLst/>
           </a:prstGeom>
           <a:solidFill>
-            <a:srgbClr val="FFFFFF"/>
+            <a:srgbClr val="16213D"/>
           </a:solidFill>
-          <a:ln w="19050">
-            <a:solidFill>
-              <a:srgbClr val="1199BD"/>
-            </a:solidFill>
+          <a:ln>
+            <a:noFill/>
           </a:ln>
           <a:effectLst/>
         </p:spPr>
@@ -7558,14 +7019,14 @@
       </p:sp>
       <p:sp>
         <p:nvSpPr>
-          <p:cNvPr id="8" name="TextBox 7"/>
+          <p:cNvPr id="9" name="TextBox 8"/>
           <p:cNvSpPr txBox="1"/>
           <p:nvPr/>
         </p:nvSpPr>
         <p:spPr>
           <a:xfrm>
-            <a:off x="9646920" y="402336"/>
-            <a:ext cx="2148840" cy="310896"/>
+            <a:off x="502920" y="1444751"/>
+            <a:ext cx="640080" cy="457200"/>
           </a:xfrm>
           <a:prstGeom prst="rect">
             <a:avLst/>
@@ -7580,337 +7041,27 @@
           <a:p>
             <a:pPr algn="ctr"/>
             <a:r>
-              <a:rPr sz="1100" b="1" i="0">
-                <a:solidFill>
-                  <a:srgbClr val="1199BD"/>
-                </a:solidFill>
-                <a:latin typeface="Courier New"/>
-              </a:rPr>
-              <a:t>OWNER: DEO</a:t>
-            </a:r>
-          </a:p>
-        </p:txBody>
-      </p:sp>
-      <p:sp>
-        <p:nvSpPr>
-          <p:cNvPr id="9" name="TextBox 8"/>
-          <p:cNvSpPr txBox="1"/>
-          <p:nvPr/>
-        </p:nvSpPr>
-        <p:spPr>
-          <a:xfrm>
-            <a:off x="457200" y="329184"/>
-            <a:ext cx="9052560" cy="566928"/>
-          </a:xfrm>
-          <a:prstGeom prst="rect">
-            <a:avLst/>
-          </a:prstGeom>
-          <a:noFill/>
-        </p:spPr>
-        <p:txBody>
-          <a:bodyPr wrap="square" lIns="0" rIns="0" tIns="0" bIns="0">
-            <a:spAutoFit/>
-          </a:bodyPr>
-          <a:lstStyle/>
-          <a:p>
-            <a:pPr algn="l"/>
-            <a:r>
-              <a:rPr sz="2300" b="1" i="0" spc="200">
-                <a:solidFill>
-                  <a:srgbClr val="16213D"/>
+              <a:rPr sz="2200" b="1" i="0">
+                <a:solidFill>
+                  <a:srgbClr val="FFFFFF"/>
                 </a:solidFill>
                 <a:latin typeface="Cambria"/>
               </a:rPr>
-              <a:t>FIX 1 IS ON BOTH RADIOS</a:t>
-            </a:r>
-          </a:p>
-        </p:txBody>
-      </p:sp>
-      <p:sp>
-        <p:nvSpPr>
-          <p:cNvPr id="10" name="TextBox 9"/>
-          <p:cNvSpPr txBox="1"/>
-          <p:nvPr/>
-        </p:nvSpPr>
-        <p:spPr>
-          <a:xfrm>
-            <a:off x="475488" y="868680"/>
-            <a:ext cx="9052560" cy="320040"/>
-          </a:xfrm>
-          <a:prstGeom prst="rect">
-            <a:avLst/>
-          </a:prstGeom>
-          <a:noFill/>
-        </p:spPr>
-        <p:txBody>
-          <a:bodyPr wrap="square" lIns="0" rIns="0" tIns="0" bIns="0">
-            <a:spAutoFit/>
-          </a:bodyPr>
-          <a:lstStyle/>
-          <a:p>
-            <a:pPr algn="l"/>
-            <a:r>
-              <a:rPr sz="1250" b="0" i="1">
-                <a:solidFill>
-                  <a:srgbClr val="5E6B85"/>
-                </a:solidFill>
-                <a:latin typeface="Cambria"/>
-              </a:rPr>
-              <a:t>Built 27 October, flashed and accepted 28 October</a:t>
-            </a:r>
-          </a:p>
-        </p:txBody>
-      </p:sp>
-      <p:sp>
-        <p:nvSpPr>
-          <p:cNvPr id="11" name="Rectangle 10"/>
+              <a:t>1</a:t>
+            </a:r>
+          </a:p>
+        </p:txBody>
+      </p:sp>
+      <p:sp>
+        <p:nvSpPr>
+          <p:cNvPr id="10" name="Rectangle 9"/>
           <p:cNvSpPr/>
           <p:nvPr/>
         </p:nvSpPr>
         <p:spPr>
           <a:xfrm>
-            <a:off x="502920" y="1280160"/>
-            <a:ext cx="5486400" cy="2377440"/>
-          </a:xfrm>
-          <a:prstGeom prst="rect">
-            <a:avLst/>
-          </a:prstGeom>
-          <a:solidFill>
-            <a:srgbClr val="F2F5FA"/>
-          </a:solidFill>
-          <a:ln w="15875">
-            <a:solidFill>
-              <a:srgbClr val="1F9D68"/>
-            </a:solidFill>
-          </a:ln>
-          <a:effectLst/>
-        </p:spPr>
-        <p:style>
-          <a:lnRef idx="1">
-            <a:schemeClr val="accent1"/>
-          </a:lnRef>
-          <a:fillRef idx="3">
-            <a:schemeClr val="accent1"/>
-          </a:fillRef>
-          <a:effectRef idx="2">
-            <a:schemeClr val="accent1"/>
-          </a:effectRef>
-          <a:fontRef idx="minor">
-            <a:schemeClr val="lt1"/>
-          </a:fontRef>
-        </p:style>
-        <p:txBody>
-          <a:bodyPr rtlCol="0" anchor="ctr"/>
-          <a:lstStyle/>
-          <a:p>
-            <a:pPr algn="ctr"/>
-          </a:p>
-        </p:txBody>
-      </p:sp>
-      <p:sp>
-        <p:nvSpPr>
-          <p:cNvPr id="12" name="TextBox 11"/>
-          <p:cNvSpPr txBox="1"/>
-          <p:nvPr/>
-        </p:nvSpPr>
-        <p:spPr>
-          <a:xfrm>
-            <a:off x="667512" y="1399031"/>
-            <a:ext cx="5157216" cy="2139696"/>
-          </a:xfrm>
-          <a:prstGeom prst="rect">
-            <a:avLst/>
-          </a:prstGeom>
-          <a:noFill/>
-        </p:spPr>
-        <p:txBody>
-          <a:bodyPr wrap="square" lIns="0" rIns="0" tIns="0" bIns="0">
-            <a:spAutoFit/>
-          </a:bodyPr>
-          <a:lstStyle/>
-          <a:p>
-            <a:r>
-              <a:rPr sz="1350" b="1" spc="100">
-                <a:solidFill>
-                  <a:srgbClr val="1F9D68"/>
-                </a:solidFill>
-                <a:latin typeface="Cambria"/>
-              </a:rPr>
-              <a:t>WHAT IT IS</a:t>
-            </a:r>
-          </a:p>
-          <a:p>
-            <a:pPr>
-              <a:spcBef>
-                <a:spcPts val="400"/>
-              </a:spcBef>
-            </a:pPr>
-            <a:r>
-              <a:rPr sz="1200">
-                <a:solidFill>
-                  <a:srgbClr val="222A3F"/>
-                </a:solidFill>
-                <a:latin typeface="Cambria"/>
-              </a:rPr>
-              <a:t>Meshtastic rebuilt from source so that its factory settings are our settings: Group9 at 912.875 MHz, No PIN, CLIENT_MUTE, named SF or RG, our GPS cadence. When the firmware falls back to defaults after a bad write, the defaults are now right. The key is compiled into a binary that never leaves the private repository.</a:t>
-            </a:r>
-          </a:p>
-        </p:txBody>
-      </p:sp>
-      <p:sp>
-        <p:nvSpPr>
-          <p:cNvPr id="13" name="Rectangle 12"/>
-          <p:cNvSpPr/>
-          <p:nvPr/>
-        </p:nvSpPr>
-        <p:spPr>
-          <a:xfrm>
-            <a:off x="6172200" y="1280160"/>
-            <a:ext cx="5532120" cy="2377440"/>
-          </a:xfrm>
-          <a:prstGeom prst="rect">
-            <a:avLst/>
-          </a:prstGeom>
-          <a:solidFill>
-            <a:srgbClr val="F2F5FA"/>
-          </a:solidFill>
-          <a:ln w="15875">
-            <a:solidFill>
-              <a:srgbClr val="16213D"/>
-            </a:solidFill>
-          </a:ln>
-          <a:effectLst/>
-        </p:spPr>
-        <p:style>
-          <a:lnRef idx="1">
-            <a:schemeClr val="accent1"/>
-          </a:lnRef>
-          <a:fillRef idx="3">
-            <a:schemeClr val="accent1"/>
-          </a:fillRef>
-          <a:effectRef idx="2">
-            <a:schemeClr val="accent1"/>
-          </a:effectRef>
-          <a:fontRef idx="minor">
-            <a:schemeClr val="lt1"/>
-          </a:fontRef>
-        </p:style>
-        <p:txBody>
-          <a:bodyPr rtlCol="0" anchor="ctr"/>
-          <a:lstStyle/>
-          <a:p>
-            <a:pPr algn="ctr"/>
-          </a:p>
-        </p:txBody>
-      </p:sp>
-      <p:sp>
-        <p:nvSpPr>
-          <p:cNvPr id="14" name="TextBox 13"/>
-          <p:cNvSpPr txBox="1"/>
-          <p:nvPr/>
-        </p:nvSpPr>
-        <p:spPr>
-          <a:xfrm>
-            <a:off x="6336792" y="1399031"/>
-            <a:ext cx="5202936" cy="2139696"/>
-          </a:xfrm>
-          <a:prstGeom prst="rect">
-            <a:avLst/>
-          </a:prstGeom>
-          <a:noFill/>
-        </p:spPr>
-        <p:txBody>
-          <a:bodyPr wrap="square" lIns="0" rIns="0" tIns="0" bIns="0">
-            <a:spAutoFit/>
-          </a:bodyPr>
-          <a:lstStyle/>
-          <a:p>
-            <a:r>
-              <a:rPr sz="1350" b="1" spc="100">
-                <a:solidFill>
-                  <a:srgbClr val="16213D"/>
-                </a:solidFill>
-                <a:latin typeface="Cambria"/>
-              </a:rPr>
-              <a:t>ACCEPTANCE TEST, BOTH RADIOS</a:t>
-            </a:r>
-          </a:p>
-          <a:p>
-            <a:pPr>
-              <a:spcBef>
-                <a:spcPts val="400"/>
-              </a:spcBef>
-            </a:pPr>
-            <a:r>
-              <a:rPr sz="1150">
-                <a:solidFill>
-                  <a:srgbClr val="222A3F"/>
-                </a:solidFill>
-                <a:latin typeface="Cambria"/>
-              </a:rPr>
-              <a:t>•  Flash, then send a factory reset, then read back with zero provisioning</a:t>
-            </a:r>
-          </a:p>
-          <a:p>
-            <a:pPr>
-              <a:spcBef>
-                <a:spcPts val="400"/>
-              </a:spcBef>
-            </a:pPr>
-            <a:r>
-              <a:rPr sz="1150">
-                <a:solidFill>
-                  <a:srgbClr val="222A3F"/>
-                </a:solidFill>
-                <a:latin typeface="Cambria"/>
-              </a:rPr>
-              <a:t>•  SF came back as SF and RG as RG: Group9 with the 32-byte key, precision 32, No PIN, CLIENT_MUTE, US LONG_FAST</a:t>
-            </a:r>
-          </a:p>
-          <a:p>
-            <a:pPr>
-              <a:spcBef>
-                <a:spcPts val="400"/>
-              </a:spcBef>
-            </a:pPr>
-            <a:r>
-              <a:rPr sz="1150">
-                <a:solidFill>
-                  <a:srgbClr val="222A3F"/>
-                </a:solidFill>
-                <a:latin typeface="Cambria"/>
-              </a:rPr>
-              <a:t>•  The snapshot then restored the 21 presets, the smart-broadcast minimums and the original key pair</a:t>
-            </a:r>
-          </a:p>
-          <a:p>
-            <a:pPr>
-              <a:spcBef>
-                <a:spcPts val="400"/>
-              </a:spcBef>
-            </a:pPr>
-            <a:r>
-              <a:rPr sz="1150">
-                <a:solidFill>
-                  <a:srgbClr val="222A3F"/>
-                </a:solidFill>
-                <a:latin typeface="Cambria"/>
-              </a:rPr>
-              <a:t>•  Both OLEDs read 912.875 before they were unplugged</a:t>
-            </a:r>
-          </a:p>
-        </p:txBody>
-      </p:sp>
-      <p:sp>
-        <p:nvSpPr>
-          <p:cNvPr id="15" name="Rectangle 14"/>
-          <p:cNvSpPr/>
-          <p:nvPr/>
-        </p:nvSpPr>
-        <p:spPr>
-          <a:xfrm>
-            <a:off x="502920" y="3886200"/>
-            <a:ext cx="3611880" cy="1188720"/>
+            <a:off x="1143000" y="1280160"/>
+            <a:ext cx="10515600" cy="777240"/>
           </a:xfrm>
           <a:prstGeom prst="rect">
             <a:avLst/>
@@ -7949,14 +7100,14 @@
       </p:sp>
       <p:sp>
         <p:nvSpPr>
-          <p:cNvPr id="16" name="TextBox 15"/>
+          <p:cNvPr id="11" name="TextBox 10"/>
           <p:cNvSpPr txBox="1"/>
           <p:nvPr/>
         </p:nvSpPr>
         <p:spPr>
           <a:xfrm>
-            <a:off x="502920" y="3995928"/>
-            <a:ext cx="3611880" cy="660400"/>
+            <a:off x="1325880" y="1371600"/>
+            <a:ext cx="2926080" cy="365760"/>
           </a:xfrm>
           <a:prstGeom prst="rect">
             <a:avLst/>
@@ -7969,29 +7120,29 @@
           </a:bodyPr>
           <a:lstStyle/>
           <a:p>
-            <a:pPr algn="ctr"/>
-            <a:r>
-              <a:rPr sz="2600" b="1" i="0">
-                <a:solidFill>
-                  <a:srgbClr val="1F9D68"/>
+            <a:pPr algn="l"/>
+            <a:r>
+              <a:rPr sz="1300" b="1" i="0" spc="100">
+                <a:solidFill>
+                  <a:srgbClr val="16213D"/>
                 </a:solidFill>
                 <a:latin typeface="Cambria"/>
               </a:rPr>
-              <a:t>2 / 2</a:t>
-            </a:r>
-          </a:p>
-        </p:txBody>
-      </p:sp>
-      <p:sp>
-        <p:nvSpPr>
-          <p:cNvPr id="17" name="TextBox 16"/>
+              <a:t>PICK A CLEAR DAY</a:t>
+            </a:r>
+          </a:p>
+        </p:txBody>
+      </p:sp>
+      <p:sp>
+        <p:nvSpPr>
+          <p:cNvPr id="12" name="TextBox 11"/>
           <p:cNvSpPr txBox="1"/>
           <p:nvPr/>
         </p:nvSpPr>
         <p:spPr>
           <a:xfrm>
-            <a:off x="640080" y="4747768"/>
-            <a:ext cx="3337560" cy="254000"/>
+            <a:off x="4297680" y="1481328"/>
+            <a:ext cx="7223760" cy="457200"/>
           </a:xfrm>
           <a:prstGeom prst="rect">
             <a:avLst/>
@@ -8004,29 +7155,108 @@
           </a:bodyPr>
           <a:lstStyle/>
           <a:p>
-            <a:pPr algn="ctr"/>
-            <a:r>
-              <a:rPr sz="1100" b="0" i="0">
+            <a:pPr algn="l"/>
+            <a:r>
+              <a:rPr sz="1300" b="0" i="0">
                 <a:solidFill>
                   <a:srgbClr val="222A3F"/>
                 </a:solidFill>
                 <a:latin typeface="Cambria"/>
               </a:rPr>
-              <a:t>radios flashed and accepted</a:t>
-            </a:r>
-          </a:p>
-        </p:txBody>
-      </p:sp>
-      <p:sp>
-        <p:nvSpPr>
-          <p:cNvPr id="18" name="Rectangle 17"/>
+              <a:t>Check the forecast the day before; no warnings, no rain</a:t>
+            </a:r>
+          </a:p>
+        </p:txBody>
+      </p:sp>
+      <p:sp>
+        <p:nvSpPr>
+          <p:cNvPr id="13" name="Rectangle 12"/>
           <p:cNvSpPr/>
           <p:nvPr/>
         </p:nvSpPr>
         <p:spPr>
           <a:xfrm>
-            <a:off x="4274820" y="3886200"/>
-            <a:ext cx="3611880" cy="1188720"/>
+            <a:off x="502920" y="2194560"/>
+            <a:ext cx="640080" cy="777240"/>
+          </a:xfrm>
+          <a:prstGeom prst="rect">
+            <a:avLst/>
+          </a:prstGeom>
+          <a:solidFill>
+            <a:srgbClr val="16213D"/>
+          </a:solidFill>
+          <a:ln>
+            <a:noFill/>
+          </a:ln>
+          <a:effectLst/>
+        </p:spPr>
+        <p:style>
+          <a:lnRef idx="1">
+            <a:schemeClr val="accent1"/>
+          </a:lnRef>
+          <a:fillRef idx="3">
+            <a:schemeClr val="accent1"/>
+          </a:fillRef>
+          <a:effectRef idx="2">
+            <a:schemeClr val="accent1"/>
+          </a:effectRef>
+          <a:fontRef idx="minor">
+            <a:schemeClr val="lt1"/>
+          </a:fontRef>
+        </p:style>
+        <p:txBody>
+          <a:bodyPr rtlCol="0" anchor="ctr"/>
+          <a:lstStyle/>
+          <a:p>
+            <a:pPr algn="ctr"/>
+          </a:p>
+        </p:txBody>
+      </p:sp>
+      <p:sp>
+        <p:nvSpPr>
+          <p:cNvPr id="14" name="TextBox 13"/>
+          <p:cNvSpPr txBox="1"/>
+          <p:nvPr/>
+        </p:nvSpPr>
+        <p:spPr>
+          <a:xfrm>
+            <a:off x="502920" y="2359152"/>
+            <a:ext cx="640080" cy="457200"/>
+          </a:xfrm>
+          <a:prstGeom prst="rect">
+            <a:avLst/>
+          </a:prstGeom>
+          <a:noFill/>
+        </p:spPr>
+        <p:txBody>
+          <a:bodyPr wrap="square" lIns="0" rIns="0" tIns="0" bIns="0">
+            <a:spAutoFit/>
+          </a:bodyPr>
+          <a:lstStyle/>
+          <a:p>
+            <a:pPr algn="ctr"/>
+            <a:r>
+              <a:rPr sz="2200" b="1" i="0">
+                <a:solidFill>
+                  <a:srgbClr val="FFFFFF"/>
+                </a:solidFill>
+                <a:latin typeface="Cambria"/>
+              </a:rPr>
+              <a:t>2</a:t>
+            </a:r>
+          </a:p>
+        </p:txBody>
+      </p:sp>
+      <p:sp>
+        <p:nvSpPr>
+          <p:cNvPr id="15" name="Rectangle 14"/>
+          <p:cNvSpPr/>
+          <p:nvPr/>
+        </p:nvSpPr>
+        <p:spPr>
+          <a:xfrm>
+            <a:off x="1143000" y="2194560"/>
+            <a:ext cx="10515600" cy="777240"/>
           </a:xfrm>
           <a:prstGeom prst="rect">
             <a:avLst/>
@@ -8065,14 +7295,14 @@
       </p:sp>
       <p:sp>
         <p:nvSpPr>
-          <p:cNvPr id="19" name="TextBox 18"/>
+          <p:cNvPr id="16" name="TextBox 15"/>
           <p:cNvSpPr txBox="1"/>
           <p:nvPr/>
         </p:nvSpPr>
         <p:spPr>
           <a:xfrm>
-            <a:off x="4274820" y="3995928"/>
-            <a:ext cx="3611880" cy="660400"/>
+            <a:off x="1325880" y="2286000"/>
+            <a:ext cx="2926080" cy="365760"/>
           </a:xfrm>
           <a:prstGeom prst="rect">
             <a:avLst/>
@@ -8085,29 +7315,29 @@
           </a:bodyPr>
           <a:lstStyle/>
           <a:p>
-            <a:pPr algn="ctr"/>
-            <a:r>
-              <a:rPr sz="2600" b="1" i="0">
-                <a:solidFill>
-                  <a:srgbClr val="1F9D68"/>
+            <a:pPr algn="l"/>
+            <a:r>
+              <a:rPr sz="1300" b="1" i="0" spc="100">
+                <a:solidFill>
+                  <a:srgbClr val="16213D"/>
                 </a:solidFill>
                 <a:latin typeface="Cambria"/>
               </a:rPr>
-              <a:t>0</a:t>
-            </a:r>
-          </a:p>
-        </p:txBody>
-      </p:sp>
-      <p:sp>
-        <p:nvSpPr>
-          <p:cNvPr id="20" name="TextBox 19"/>
+              <a:t>PRE-FLIGHT</a:t>
+            </a:r>
+          </a:p>
+        </p:txBody>
+      </p:sp>
+      <p:sp>
+        <p:nvSpPr>
+          <p:cNvPr id="17" name="TextBox 16"/>
           <p:cNvSpPr txBox="1"/>
           <p:nvPr/>
         </p:nvSpPr>
         <p:spPr>
           <a:xfrm>
-            <a:off x="4411980" y="4747768"/>
-            <a:ext cx="3337560" cy="254000"/>
+            <a:off x="4297680" y="2395728"/>
+            <a:ext cx="7223760" cy="457200"/>
           </a:xfrm>
           <a:prstGeom prst="rect">
             <a:avLst/>
@@ -8120,29 +7350,108 @@
           </a:bodyPr>
           <a:lstStyle/>
           <a:p>
-            <a:pPr algn="ctr"/>
-            <a:r>
-              <a:rPr sz="1100" b="0" i="0">
+            <a:pPr algn="l"/>
+            <a:r>
+              <a:rPr sz="1300" b="0" i="0">
                 <a:solidFill>
                   <a:srgbClr val="222A3F"/>
                 </a:solidFill>
                 <a:latin typeface="Cambria"/>
               </a:rPr>
-              <a:t>commands needed after a future revert</a:t>
-            </a:r>
-          </a:p>
-        </p:txBody>
-      </p:sp>
-      <p:sp>
-        <p:nvSpPr>
-          <p:cNvPr id="21" name="Rectangle 20"/>
+              <a:t>Both radio screens must read 912.875 MHz; both displays show the link</a:t>
+            </a:r>
+          </a:p>
+        </p:txBody>
+      </p:sp>
+      <p:sp>
+        <p:nvSpPr>
+          <p:cNvPr id="18" name="Rectangle 17"/>
           <p:cNvSpPr/>
           <p:nvPr/>
         </p:nvSpPr>
         <p:spPr>
           <a:xfrm>
-            <a:off x="8046720" y="3886200"/>
-            <a:ext cx="3611880" cy="1188720"/>
+            <a:off x="502920" y="3108960"/>
+            <a:ext cx="640080" cy="777240"/>
+          </a:xfrm>
+          <a:prstGeom prst="rect">
+            <a:avLst/>
+          </a:prstGeom>
+          <a:solidFill>
+            <a:srgbClr val="16213D"/>
+          </a:solidFill>
+          <a:ln>
+            <a:noFill/>
+          </a:ln>
+          <a:effectLst/>
+        </p:spPr>
+        <p:style>
+          <a:lnRef idx="1">
+            <a:schemeClr val="accent1"/>
+          </a:lnRef>
+          <a:fillRef idx="3">
+            <a:schemeClr val="accent1"/>
+          </a:fillRef>
+          <a:effectRef idx="2">
+            <a:schemeClr val="accent1"/>
+          </a:effectRef>
+          <a:fontRef idx="minor">
+            <a:schemeClr val="lt1"/>
+          </a:fontRef>
+        </p:style>
+        <p:txBody>
+          <a:bodyPr rtlCol="0" anchor="ctr"/>
+          <a:lstStyle/>
+          <a:p>
+            <a:pPr algn="ctr"/>
+          </a:p>
+        </p:txBody>
+      </p:sp>
+      <p:sp>
+        <p:nvSpPr>
+          <p:cNvPr id="19" name="TextBox 18"/>
+          <p:cNvSpPr txBox="1"/>
+          <p:nvPr/>
+        </p:nvSpPr>
+        <p:spPr>
+          <a:xfrm>
+            <a:off x="502920" y="3273552"/>
+            <a:ext cx="640080" cy="457200"/>
+          </a:xfrm>
+          <a:prstGeom prst="rect">
+            <a:avLst/>
+          </a:prstGeom>
+          <a:noFill/>
+        </p:spPr>
+        <p:txBody>
+          <a:bodyPr wrap="square" lIns="0" rIns="0" tIns="0" bIns="0">
+            <a:spAutoFit/>
+          </a:bodyPr>
+          <a:lstStyle/>
+          <a:p>
+            <a:pPr algn="ctr"/>
+            <a:r>
+              <a:rPr sz="2200" b="1" i="0">
+                <a:solidFill>
+                  <a:srgbClr val="FFFFFF"/>
+                </a:solidFill>
+                <a:latin typeface="Cambria"/>
+              </a:rPr>
+              <a:t>3</a:t>
+            </a:r>
+          </a:p>
+        </p:txBody>
+      </p:sp>
+      <p:sp>
+        <p:nvSpPr>
+          <p:cNvPr id="20" name="Rectangle 19"/>
+          <p:cNvSpPr/>
+          <p:nvPr/>
+        </p:nvSpPr>
+        <p:spPr>
+          <a:xfrm>
+            <a:off x="1143000" y="3108960"/>
+            <a:ext cx="10515600" cy="777240"/>
           </a:xfrm>
           <a:prstGeom prst="rect">
             <a:avLst/>
@@ -8181,14 +7490,14 @@
       </p:sp>
       <p:sp>
         <p:nvSpPr>
-          <p:cNvPr id="22" name="TextBox 21"/>
+          <p:cNvPr id="21" name="TextBox 20"/>
           <p:cNvSpPr txBox="1"/>
           <p:nvPr/>
         </p:nvSpPr>
         <p:spPr>
           <a:xfrm>
-            <a:off x="8046720" y="3995928"/>
-            <a:ext cx="3611880" cy="660400"/>
+            <a:off x="1325880" y="3200400"/>
+            <a:ext cx="2926080" cy="365760"/>
           </a:xfrm>
           <a:prstGeom prst="rect">
             <a:avLst/>
@@ -8201,29 +7510,29 @@
           </a:bodyPr>
           <a:lstStyle/>
           <a:p>
-            <a:pPr algn="ctr"/>
-            <a:r>
-              <a:rPr sz="2600" b="1" i="0">
-                <a:solidFill>
-                  <a:srgbClr val="E58E1A"/>
+            <a:pPr algn="l"/>
+            <a:r>
+              <a:rPr sz="1300" b="1" i="0" spc="100">
+                <a:solidFill>
+                  <a:srgbClr val="16213D"/>
                 </a:solidFill>
                 <a:latin typeface="Cambria"/>
               </a:rPr>
-              <a:t>90 s</a:t>
-            </a:r>
-          </a:p>
-        </p:txBody>
-      </p:sp>
-      <p:sp>
-        <p:nvSpPr>
-          <p:cNvPr id="23" name="TextBox 22"/>
+              <a:t>ANTENNAS ON THE ROOFS</a:t>
+            </a:r>
+          </a:p>
+        </p:txBody>
+      </p:sp>
+      <p:sp>
+        <p:nvSpPr>
+          <p:cNvPr id="22" name="TextBox 21"/>
           <p:cNvSpPr txBox="1"/>
           <p:nvPr/>
         </p:nvSpPr>
         <p:spPr>
           <a:xfrm>
-            <a:off x="8183880" y="4747768"/>
-            <a:ext cx="3337560" cy="254000"/>
+            <a:off x="4297680" y="3310128"/>
+            <a:ext cx="7223760" cy="457200"/>
           </a:xfrm>
           <a:prstGeom prst="rect">
             <a:avLst/>
@@ -8236,40 +7545,38 @@
           </a:bodyPr>
           <a:lstStyle/>
           <a:p>
-            <a:pPr algn="ctr"/>
-            <a:r>
-              <a:rPr sz="1100" b="0" i="0">
+            <a:pPr algn="l"/>
+            <a:r>
+              <a:rPr sz="1300" b="0" i="0">
                 <a:solidFill>
                   <a:srgbClr val="222A3F"/>
                 </a:solidFill>
                 <a:latin typeface="Cambria"/>
               </a:rPr>
-              <a:t>to restore presets and minimums from the snapshot</a:t>
-            </a:r>
-          </a:p>
-        </p:txBody>
-      </p:sp>
-      <p:sp>
-        <p:nvSpPr>
-          <p:cNvPr id="24" name="Rectangle 23"/>
+              <a:t>One radio per car, antenna mounted on the roof, display on the dash</a:t>
+            </a:r>
+          </a:p>
+        </p:txBody>
+      </p:sp>
+      <p:sp>
+        <p:nvSpPr>
+          <p:cNvPr id="23" name="Rectangle 22"/>
           <p:cNvSpPr/>
           <p:nvPr/>
         </p:nvSpPr>
         <p:spPr>
           <a:xfrm>
-            <a:off x="502920" y="5257800"/>
-            <a:ext cx="11201400" cy="731520"/>
+            <a:off x="502920" y="4023360"/>
+            <a:ext cx="640080" cy="777240"/>
           </a:xfrm>
           <a:prstGeom prst="rect">
             <a:avLst/>
           </a:prstGeom>
           <a:solidFill>
-            <a:srgbClr val="F2F5FA"/>
+            <a:srgbClr val="16213D"/>
           </a:solidFill>
-          <a:ln w="15875">
-            <a:solidFill>
-              <a:srgbClr val="5E6B85"/>
-            </a:solidFill>
+          <a:ln>
+            <a:noFill/>
           </a:ln>
           <a:effectLst/>
         </p:spPr>
@@ -8297,14 +7604,14 @@
       </p:sp>
       <p:sp>
         <p:nvSpPr>
-          <p:cNvPr id="25" name="TextBox 24"/>
+          <p:cNvPr id="24" name="TextBox 23"/>
           <p:cNvSpPr txBox="1"/>
           <p:nvPr/>
         </p:nvSpPr>
         <p:spPr>
           <a:xfrm>
-            <a:off x="667512" y="5376672"/>
-            <a:ext cx="10872216" cy="493776"/>
+            <a:off x="502920" y="4187952"/>
+            <a:ext cx="640080" cy="457200"/>
           </a:xfrm>
           <a:prstGeom prst="rect">
             <a:avLst/>
@@ -8317,30 +7624,361 @@
           </a:bodyPr>
           <a:lstStyle/>
           <a:p>
-            <a:r>
-              <a:rPr sz="1250" b="1" spc="100">
-                <a:solidFill>
-                  <a:srgbClr val="5E6B85"/>
+            <a:pPr algn="ctr"/>
+            <a:r>
+              <a:rPr sz="2200" b="1" i="0">
+                <a:solidFill>
+                  <a:srgbClr val="FFFFFF"/>
                 </a:solidFill>
                 <a:latin typeface="Cambria"/>
               </a:rPr>
-              <a:t>ALSO IN FORCE</a:t>
-            </a:r>
-          </a:p>
-          <a:p>
-            <a:pPr>
-              <a:spcBef>
-                <a:spcPts val="400"/>
-              </a:spcBef>
-            </a:pPr>
-            <a:r>
-              <a:rPr sz="1150">
-                <a:solidFill>
-                  <a:srgbClr val="222A3F"/>
+              <a:t>4</a:t>
+            </a:r>
+          </a:p>
+        </p:txBody>
+      </p:sp>
+      <p:sp>
+        <p:nvSpPr>
+          <p:cNvPr id="25" name="Rectangle 24"/>
+          <p:cNvSpPr/>
+          <p:nvPr/>
+        </p:nvSpPr>
+        <p:spPr>
+          <a:xfrm>
+            <a:off x="1143000" y="4023360"/>
+            <a:ext cx="10515600" cy="777240"/>
+          </a:xfrm>
+          <a:prstGeom prst="rect">
+            <a:avLst/>
+          </a:prstGeom>
+          <a:solidFill>
+            <a:srgbClr val="F2F5FA"/>
+          </a:solidFill>
+          <a:ln w="12700">
+            <a:solidFill>
+              <a:srgbClr val="9AA7BE"/>
+            </a:solidFill>
+          </a:ln>
+          <a:effectLst/>
+        </p:spPr>
+        <p:style>
+          <a:lnRef idx="1">
+            <a:schemeClr val="accent1"/>
+          </a:lnRef>
+          <a:fillRef idx="3">
+            <a:schemeClr val="accent1"/>
+          </a:fillRef>
+          <a:effectRef idx="2">
+            <a:schemeClr val="accent1"/>
+          </a:effectRef>
+          <a:fontRef idx="minor">
+            <a:schemeClr val="lt1"/>
+          </a:fontRef>
+        </p:style>
+        <p:txBody>
+          <a:bodyPr rtlCol="0" anchor="ctr"/>
+          <a:lstStyle/>
+          <a:p>
+            <a:pPr algn="ctr"/>
+          </a:p>
+        </p:txBody>
+      </p:sp>
+      <p:sp>
+        <p:nvSpPr>
+          <p:cNvPr id="26" name="TextBox 25"/>
+          <p:cNvSpPr txBox="1"/>
+          <p:nvPr/>
+        </p:nvSpPr>
+        <p:spPr>
+          <a:xfrm>
+            <a:off x="1325880" y="4114800"/>
+            <a:ext cx="2926080" cy="365760"/>
+          </a:xfrm>
+          <a:prstGeom prst="rect">
+            <a:avLst/>
+          </a:prstGeom>
+          <a:noFill/>
+        </p:spPr>
+        <p:txBody>
+          <a:bodyPr wrap="square" lIns="0" rIns="0" tIns="0" bIns="0">
+            <a:spAutoFit/>
+          </a:bodyPr>
+          <a:lstStyle/>
+          <a:p>
+            <a:pPr algn="l"/>
+            <a:r>
+              <a:rPr sz="1300" b="1" i="0" spc="100">
+                <a:solidFill>
+                  <a:srgbClr val="16213D"/>
                 </a:solidFill>
                 <a:latin typeface="Cambria"/>
               </a:rPr>
-              <a:t>Pre-flight: both OLEDs read 912.875. Config snapshot per radio. Phone-app QR recovery when no laptop is at hand (User Guide 12). Never store a radio flat.</a:t>
+              <a:t>DRIVE APART</a:t>
+            </a:r>
+          </a:p>
+        </p:txBody>
+      </p:sp>
+      <p:sp>
+        <p:nvSpPr>
+          <p:cNvPr id="27" name="TextBox 26"/>
+          <p:cNvSpPr txBox="1"/>
+          <p:nvPr/>
+        </p:nvSpPr>
+        <p:spPr>
+          <a:xfrm>
+            <a:off x="4297680" y="4224528"/>
+            <a:ext cx="7223760" cy="457200"/>
+          </a:xfrm>
+          <a:prstGeom prst="rect">
+            <a:avLst/>
+          </a:prstGeom>
+          <a:noFill/>
+        </p:spPr>
+        <p:txBody>
+          <a:bodyPr wrap="square" lIns="0" rIns="0" tIns="0" bIns="0">
+            <a:spAutoFit/>
+          </a:bodyPr>
+          <a:lstStyle/>
+          <a:p>
+            <a:pPr algn="l"/>
+            <a:r>
+              <a:rPr sz="1300" b="0" i="0">
+                <a:solidFill>
+                  <a:srgbClr val="222A3F"/>
+                </a:solidFill>
+                <a:latin typeface="Cambria"/>
+              </a:rPr>
+              <a:t>Open road, no hills between the cars, until the display says LINK LOST</a:t>
+            </a:r>
+          </a:p>
+        </p:txBody>
+      </p:sp>
+      <p:sp>
+        <p:nvSpPr>
+          <p:cNvPr id="28" name="Rectangle 27"/>
+          <p:cNvSpPr/>
+          <p:nvPr/>
+        </p:nvSpPr>
+        <p:spPr>
+          <a:xfrm>
+            <a:off x="502920" y="4937760"/>
+            <a:ext cx="640080" cy="777240"/>
+          </a:xfrm>
+          <a:prstGeom prst="rect">
+            <a:avLst/>
+          </a:prstGeom>
+          <a:solidFill>
+            <a:srgbClr val="16213D"/>
+          </a:solidFill>
+          <a:ln>
+            <a:noFill/>
+          </a:ln>
+          <a:effectLst/>
+        </p:spPr>
+        <p:style>
+          <a:lnRef idx="1">
+            <a:schemeClr val="accent1"/>
+          </a:lnRef>
+          <a:fillRef idx="3">
+            <a:schemeClr val="accent1"/>
+          </a:fillRef>
+          <a:effectRef idx="2">
+            <a:schemeClr val="accent1"/>
+          </a:effectRef>
+          <a:fontRef idx="minor">
+            <a:schemeClr val="lt1"/>
+          </a:fontRef>
+        </p:style>
+        <p:txBody>
+          <a:bodyPr rtlCol="0" anchor="ctr"/>
+          <a:lstStyle/>
+          <a:p>
+            <a:pPr algn="ctr"/>
+          </a:p>
+        </p:txBody>
+      </p:sp>
+      <p:sp>
+        <p:nvSpPr>
+          <p:cNvPr id="29" name="TextBox 28"/>
+          <p:cNvSpPr txBox="1"/>
+          <p:nvPr/>
+        </p:nvSpPr>
+        <p:spPr>
+          <a:xfrm>
+            <a:off x="502920" y="5102352"/>
+            <a:ext cx="640080" cy="457200"/>
+          </a:xfrm>
+          <a:prstGeom prst="rect">
+            <a:avLst/>
+          </a:prstGeom>
+          <a:noFill/>
+        </p:spPr>
+        <p:txBody>
+          <a:bodyPr wrap="square" lIns="0" rIns="0" tIns="0" bIns="0">
+            <a:spAutoFit/>
+          </a:bodyPr>
+          <a:lstStyle/>
+          <a:p>
+            <a:pPr algn="ctr"/>
+            <a:r>
+              <a:rPr sz="2200" b="1" i="0">
+                <a:solidFill>
+                  <a:srgbClr val="FFFFFF"/>
+                </a:solidFill>
+                <a:latin typeface="Cambria"/>
+              </a:rPr>
+              <a:t>5</a:t>
+            </a:r>
+          </a:p>
+        </p:txBody>
+      </p:sp>
+      <p:sp>
+        <p:nvSpPr>
+          <p:cNvPr id="30" name="Rectangle 29"/>
+          <p:cNvSpPr/>
+          <p:nvPr/>
+        </p:nvSpPr>
+        <p:spPr>
+          <a:xfrm>
+            <a:off x="1143000" y="4937760"/>
+            <a:ext cx="10515600" cy="777240"/>
+          </a:xfrm>
+          <a:prstGeom prst="rect">
+            <a:avLst/>
+          </a:prstGeom>
+          <a:solidFill>
+            <a:srgbClr val="F2F5FA"/>
+          </a:solidFill>
+          <a:ln w="12700">
+            <a:solidFill>
+              <a:srgbClr val="9AA7BE"/>
+            </a:solidFill>
+          </a:ln>
+          <a:effectLst/>
+        </p:spPr>
+        <p:style>
+          <a:lnRef idx="1">
+            <a:schemeClr val="accent1"/>
+          </a:lnRef>
+          <a:fillRef idx="3">
+            <a:schemeClr val="accent1"/>
+          </a:fillRef>
+          <a:effectRef idx="2">
+            <a:schemeClr val="accent1"/>
+          </a:effectRef>
+          <a:fontRef idx="minor">
+            <a:schemeClr val="lt1"/>
+          </a:fontRef>
+        </p:style>
+        <p:txBody>
+          <a:bodyPr rtlCol="0" anchor="ctr"/>
+          <a:lstStyle/>
+          <a:p>
+            <a:pPr algn="ctr"/>
+          </a:p>
+        </p:txBody>
+      </p:sp>
+      <p:sp>
+        <p:nvSpPr>
+          <p:cNvPr id="31" name="TextBox 30"/>
+          <p:cNvSpPr txBox="1"/>
+          <p:nvPr/>
+        </p:nvSpPr>
+        <p:spPr>
+          <a:xfrm>
+            <a:off x="1325880" y="5029200"/>
+            <a:ext cx="2926080" cy="365760"/>
+          </a:xfrm>
+          <a:prstGeom prst="rect">
+            <a:avLst/>
+          </a:prstGeom>
+          <a:noFill/>
+        </p:spPr>
+        <p:txBody>
+          <a:bodyPr wrap="square" lIns="0" rIns="0" tIns="0" bIns="0">
+            <a:spAutoFit/>
+          </a:bodyPr>
+          <a:lstStyle/>
+          <a:p>
+            <a:pPr algn="l"/>
+            <a:r>
+              <a:rPr sz="1300" b="1" i="0" spc="100">
+                <a:solidFill>
+                  <a:srgbClr val="16213D"/>
+                </a:solidFill>
+                <a:latin typeface="Cambria"/>
+              </a:rPr>
+              <a:t>RECORD</a:t>
+            </a:r>
+          </a:p>
+        </p:txBody>
+      </p:sp>
+      <p:sp>
+        <p:nvSpPr>
+          <p:cNvPr id="32" name="TextBox 31"/>
+          <p:cNvSpPr txBox="1"/>
+          <p:nvPr/>
+        </p:nvSpPr>
+        <p:spPr>
+          <a:xfrm>
+            <a:off x="4297680" y="5138928"/>
+            <a:ext cx="7223760" cy="457200"/>
+          </a:xfrm>
+          <a:prstGeom prst="rect">
+            <a:avLst/>
+          </a:prstGeom>
+          <a:noFill/>
+        </p:spPr>
+        <p:txBody>
+          <a:bodyPr wrap="square" lIns="0" rIns="0" tIns="0" bIns="0">
+            <a:spAutoFit/>
+          </a:bodyPr>
+          <a:lstStyle/>
+          <a:p>
+            <a:pPr algn="l"/>
+            <a:r>
+              <a:rPr sz="1300" b="0" i="0">
+                <a:solidFill>
+                  <a:srgbClr val="222A3F"/>
+                </a:solidFill>
+                <a:latin typeface="Cambria"/>
+              </a:rPr>
+              <a:t>Note the distance of the last packet and the distance where the link came back</a:t>
+            </a:r>
+          </a:p>
+        </p:txBody>
+      </p:sp>
+      <p:sp>
+        <p:nvSpPr>
+          <p:cNvPr id="33" name="TextBox 32"/>
+          <p:cNvSpPr txBox="1"/>
+          <p:nvPr/>
+        </p:nvSpPr>
+        <p:spPr>
+          <a:xfrm>
+            <a:off x="502920" y="5897880"/>
+            <a:ext cx="11155680" cy="365760"/>
+          </a:xfrm>
+          <a:prstGeom prst="rect">
+            <a:avLst/>
+          </a:prstGeom>
+          <a:noFill/>
+        </p:spPr>
+        <p:txBody>
+          <a:bodyPr wrap="square" lIns="0" rIns="0" tIns="0" bIns="0">
+            <a:spAutoFit/>
+          </a:bodyPr>
+          <a:lstStyle/>
+          <a:p>
+            <a:pPr algn="l"/>
+            <a:r>
+              <a:rPr sz="1200" b="0" i="1">
+                <a:solidFill>
+                  <a:srgbClr val="5E6B85"/>
+                </a:solidFill>
+                <a:latin typeface="Cambria"/>
+              </a:rPr>
+              <a:t>Both radios now carry the fix on sheet 6, so a flat battery on the drive out cannot cost the test.</a:t>
             </a:r>
           </a:p>
         </p:txBody>
@@ -8551,67 +8189,21 @@
                 </a:solidFill>
                 <a:latin typeface="Courier New"/>
               </a:rPr>
-              <a:t>SHEET 05/06  STATUS  2026-10-28</a:t>
-            </a:r>
-          </a:p>
-        </p:txBody>
-      </p:sp>
-      <p:sp>
-        <p:nvSpPr>
-          <p:cNvPr id="7" name="Rectangle 6"/>
-          <p:cNvSpPr/>
-          <p:nvPr/>
-        </p:nvSpPr>
-        <p:spPr>
-          <a:xfrm>
-            <a:off x="9646920" y="347472"/>
-            <a:ext cx="2148840" cy="420624"/>
-          </a:xfrm>
-          <a:prstGeom prst="rect">
-            <a:avLst/>
-          </a:prstGeom>
-          <a:solidFill>
-            <a:srgbClr val="FFFFFF"/>
-          </a:solidFill>
-          <a:ln w="19050">
-            <a:solidFill>
-              <a:srgbClr val="6D4BDB"/>
-            </a:solidFill>
-          </a:ln>
-          <a:effectLst/>
-        </p:spPr>
-        <p:style>
-          <a:lnRef idx="1">
-            <a:schemeClr val="accent1"/>
-          </a:lnRef>
-          <a:fillRef idx="3">
-            <a:schemeClr val="accent1"/>
-          </a:fillRef>
-          <a:effectRef idx="2">
-            <a:schemeClr val="accent1"/>
-          </a:effectRef>
-          <a:fontRef idx="minor">
-            <a:schemeClr val="lt1"/>
-          </a:fontRef>
-        </p:style>
-        <p:txBody>
-          <a:bodyPr rtlCol="0" anchor="ctr"/>
-          <a:lstStyle/>
-          <a:p>
-            <a:pPr algn="ctr"/>
-          </a:p>
-        </p:txBody>
-      </p:sp>
-      <p:sp>
-        <p:nvSpPr>
-          <p:cNvPr id="8" name="TextBox 7"/>
+              <a:t>SHEET 05/09  STATUS  2026-10-28</a:t>
+            </a:r>
+          </a:p>
+        </p:txBody>
+      </p:sp>
+      <p:sp>
+        <p:nvSpPr>
+          <p:cNvPr id="7" name="TextBox 6"/>
           <p:cNvSpPr txBox="1"/>
           <p:nvPr/>
         </p:nvSpPr>
         <p:spPr>
           <a:xfrm>
-            <a:off x="9646920" y="402336"/>
-            <a:ext cx="2148840" cy="310896"/>
+            <a:off x="457200" y="329184"/>
+            <a:ext cx="9052560" cy="566928"/>
           </a:xfrm>
           <a:prstGeom prst="rect">
             <a:avLst/>
@@ -8624,29 +8216,29 @@
           </a:bodyPr>
           <a:lstStyle/>
           <a:p>
-            <a:pPr algn="ctr"/>
-            <a:r>
-              <a:rPr sz="1100" b="1" i="0">
-                <a:solidFill>
-                  <a:srgbClr val="6D4BDB"/>
-                </a:solidFill>
-                <a:latin typeface="Courier New"/>
+            <a:pPr algn="l"/>
+            <a:r>
+              <a:rPr sz="2300" b="1" i="0" spc="200">
+                <a:solidFill>
+                  <a:srgbClr val="16213D"/>
+                </a:solidFill>
+                <a:latin typeface="Cambria"/>
               </a:rPr>
-              <a:t>OWNER: JOSIAH</a:t>
-            </a:r>
-          </a:p>
-        </p:txBody>
-      </p:sp>
-      <p:sp>
-        <p:nvSpPr>
-          <p:cNvPr id="9" name="TextBox 8"/>
+              <a:t>MEANWHILE: WHY THE RADIOS FORGET</a:t>
+            </a:r>
+          </a:p>
+        </p:txBody>
+      </p:sp>
+      <p:sp>
+        <p:nvSpPr>
+          <p:cNvPr id="8" name="TextBox 7"/>
           <p:cNvSpPr txBox="1"/>
           <p:nvPr/>
         </p:nvSpPr>
         <p:spPr>
           <a:xfrm>
-            <a:off x="457200" y="329184"/>
-            <a:ext cx="9052560" cy="566928"/>
+            <a:off x="475488" y="868680"/>
+            <a:ext cx="9052560" cy="320040"/>
           </a:xfrm>
           <a:prstGeom prst="rect">
             <a:avLst/>
@@ -8661,17 +8253,41 @@
           <a:p>
             <a:pPr algn="l"/>
             <a:r>
-              <a:rPr sz="2300" b="1" i="0" spc="200">
-                <a:solidFill>
-                  <a:srgbClr val="16213D"/>
+              <a:rPr sz="1250" b="0" i="1">
+                <a:solidFill>
+                  <a:srgbClr val="5E6B85"/>
                 </a:solidFill>
                 <a:latin typeface="Cambria"/>
               </a:rPr>
-              <a:t>SINCE THE CANYON: DISPLAY AND DOCUMENTS</a:t>
-            </a:r>
-          </a:p>
-        </p:txBody>
-      </p:sp>
+              <a:t>A Qualcomm engineer asked whether the memory itself was at fault. We measured it.</a:t>
+            </a:r>
+          </a:p>
+        </p:txBody>
+      </p:sp>
+      <p:pic>
+        <p:nvPicPr>
+          <p:cNvPr id="9" name="Picture 8" descr="g_maps_compare.png"/>
+          <p:cNvPicPr>
+            <a:picLocks noChangeAspect="1"/>
+          </p:cNvPicPr>
+          <p:nvPr/>
+        </p:nvPicPr>
+        <p:blipFill>
+          <a:blip r:embed="rId2"/>
+          <a:stretch>
+            <a:fillRect/>
+          </a:stretch>
+        </p:blipFill>
+        <p:spPr>
+          <a:xfrm>
+            <a:off x="502920" y="1280160"/>
+            <a:ext cx="7863840" cy="2283050"/>
+          </a:xfrm>
+          <a:prstGeom prst="rect">
+            <a:avLst/>
+          </a:prstGeom>
+        </p:spPr>
+      </p:pic>
       <p:sp>
         <p:nvSpPr>
           <p:cNvPr id="10" name="Rectangle 9"/>
@@ -8680,152 +8296,8 @@
         </p:nvSpPr>
         <p:spPr>
           <a:xfrm>
-            <a:off x="502920" y="1280160"/>
-            <a:ext cx="3657600" cy="2743200"/>
-          </a:xfrm>
-          <a:prstGeom prst="rect">
-            <a:avLst/>
-          </a:prstGeom>
-          <a:solidFill>
-            <a:srgbClr val="F2F5FA"/>
-          </a:solidFill>
-          <a:ln w="15875">
-            <a:solidFill>
-              <a:srgbClr val="6D4BDB"/>
-            </a:solidFill>
-          </a:ln>
-          <a:effectLst/>
-        </p:spPr>
-        <p:style>
-          <a:lnRef idx="1">
-            <a:schemeClr val="accent1"/>
-          </a:lnRef>
-          <a:fillRef idx="3">
-            <a:schemeClr val="accent1"/>
-          </a:fillRef>
-          <a:effectRef idx="2">
-            <a:schemeClr val="accent1"/>
-          </a:effectRef>
-          <a:fontRef idx="minor">
-            <a:schemeClr val="lt1"/>
-          </a:fontRef>
-        </p:style>
-        <p:txBody>
-          <a:bodyPr rtlCol="0" anchor="ctr"/>
-          <a:lstStyle/>
-          <a:p>
-            <a:pPr algn="ctr"/>
-          </a:p>
-        </p:txBody>
-      </p:sp>
-      <p:sp>
-        <p:nvSpPr>
-          <p:cNvPr id="11" name="TextBox 10"/>
-          <p:cNvSpPr txBox="1"/>
-          <p:nvPr/>
-        </p:nvSpPr>
-        <p:spPr>
-          <a:xfrm>
-            <a:off x="667512" y="1399031"/>
-            <a:ext cx="3328416" cy="2505456"/>
-          </a:xfrm>
-          <a:prstGeom prst="rect">
-            <a:avLst/>
-          </a:prstGeom>
-          <a:noFill/>
-        </p:spPr>
-        <p:txBody>
-          <a:bodyPr wrap="square" lIns="0" rIns="0" tIns="0" bIns="0">
-            <a:spAutoFit/>
-          </a:bodyPr>
-          <a:lstStyle/>
-          <a:p>
-            <a:r>
-              <a:rPr sz="1350" b="1" spc="100">
-                <a:solidFill>
-                  <a:srgbClr val="6D4BDB"/>
-                </a:solidFill>
-                <a:latin typeface="Cambria"/>
-              </a:rPr>
-              <a:t>DISPLAY FIRMWARE</a:t>
-            </a:r>
-          </a:p>
-          <a:p>
-            <a:pPr>
-              <a:spcBef>
-                <a:spcPts val="400"/>
-              </a:spcBef>
-            </a:pPr>
-            <a:r>
-              <a:rPr sz="1150">
-                <a:solidFill>
-                  <a:srgbClr val="222A3F"/>
-                </a:solidFill>
-                <a:latin typeface="Cambria"/>
-              </a:rPr>
-              <a:t>•  Headings as clock positions (12, 3, 6, 9), partner arrow kept</a:t>
-            </a:r>
-          </a:p>
-          <a:p>
-            <a:pPr>
-              <a:spcBef>
-                <a:spcPts val="400"/>
-              </a:spcBef>
-            </a:pPr>
-            <a:r>
-              <a:rPr sz="1150">
-                <a:solidFill>
-                  <a:srgbClr val="222A3F"/>
-                </a:solidFill>
-                <a:latin typeface="Cambria"/>
-              </a:rPr>
-              <a:t>•  Heading held while stopped; 'holding' when both cars are parked</a:t>
-            </a:r>
-          </a:p>
-          <a:p>
-            <a:pPr>
-              <a:spcBef>
-                <a:spcPts val="400"/>
-              </a:spcBef>
-            </a:pPr>
-            <a:r>
-              <a:rPr sz="1150">
-                <a:solidFill>
-                  <a:srgbClr val="222A3F"/>
-                </a:solidFill>
-                <a:latin typeface="Cambria"/>
-              </a:rPr>
-              <a:t>•  LINK LOST alarm when the radio drops</a:t>
-            </a:r>
-          </a:p>
-          <a:p>
-            <a:pPr>
-              <a:spcBef>
-                <a:spcPts val="400"/>
-              </a:spcBef>
-            </a:pPr>
-            <a:r>
-              <a:rPr sz="1150">
-                <a:solidFill>
-                  <a:srgbClr val="222A3F"/>
-                </a:solidFill>
-                <a:latin typeface="Cambria"/>
-              </a:rPr>
-              <a:t>•  Flashed to both displays; 13 of 13 native tests pass</a:t>
-            </a:r>
-          </a:p>
-        </p:txBody>
-      </p:sp>
-      <p:sp>
-        <p:nvSpPr>
-          <p:cNvPr id="12" name="Rectangle 11"/>
-          <p:cNvSpPr/>
-          <p:nvPr/>
-        </p:nvSpPr>
-        <p:spPr>
-          <a:xfrm>
-            <a:off x="4251959" y="1280160"/>
-            <a:ext cx="3657600" cy="2743200"/>
+            <a:off x="8549640" y="1280160"/>
+            <a:ext cx="3154680" cy="4526280"/>
           </a:xfrm>
           <a:prstGeom prst="rect">
             <a:avLst/>
@@ -8864,14 +8336,14 @@
       </p:sp>
       <p:sp>
         <p:nvSpPr>
-          <p:cNvPr id="13" name="TextBox 12"/>
+          <p:cNvPr id="11" name="TextBox 10"/>
           <p:cNvSpPr txBox="1"/>
           <p:nvPr/>
         </p:nvSpPr>
         <p:spPr>
           <a:xfrm>
-            <a:off x="4416551" y="1399031"/>
-            <a:ext cx="3328416" cy="2505456"/>
+            <a:off x="8714232" y="1399031"/>
+            <a:ext cx="2825496" cy="4288536"/>
           </a:xfrm>
           <a:prstGeom prst="rect">
             <a:avLst/>
@@ -8885,13 +8357,13 @@
           <a:lstStyle/>
           <a:p>
             <a:r>
-              <a:rPr sz="1350" b="1" spc="100">
+              <a:rPr sz="1400" b="1" spc="100">
                 <a:solidFill>
                   <a:srgbClr val="E58E1A"/>
                 </a:solidFill>
                 <a:latin typeface="Cambria"/>
               </a:rPr>
-              <a:t>BENCH OBSERVATIONS</a:t>
+              <a:t>IN PLAIN WORDS</a:t>
             </a:r>
           </a:p>
           <a:p>
@@ -8901,13 +8373,13 @@
               </a:spcBef>
             </a:pPr>
             <a:r>
-              <a:rPr sz="1150">
+              <a:rPr sz="1250">
                 <a:solidFill>
                   <a:srgbClr val="222A3F"/>
                 </a:solidFill>
                 <a:latin typeface="Cambria"/>
               </a:rPr>
-              <a:t>•  Two radios on one desk showed 0.21 mi apart: indoor GPS scatter of 100 to 400 m, not a link fault</a:t>
+              <a:t>•  Three times this semester a radio came back from a flat battery with its settings gone</a:t>
             </a:r>
           </a:p>
           <a:p>
@@ -8917,13 +8389,13 @@
               </a:spcBef>
             </a:pPr>
             <a:r>
-              <a:rPr sz="1150">
+              <a:rPr sz="1250">
                 <a:solidFill>
                   <a:srgbClr val="222A3F"/>
                 </a:solidFill>
                 <a:latin typeface="Cambria"/>
               </a:rPr>
-              <a:t>•  Both displays paired in under 8 s with every config write accepted</a:t>
+              <a:t>•  We read the settings area of the memory chip three times in a row, with nothing running</a:t>
             </a:r>
           </a:p>
           <a:p>
@@ -8933,27 +8405,94 @@
               </a:spcBef>
             </a:pPr>
             <a:r>
-              <a:rPr sz="1150">
+              <a:rPr sz="1250">
                 <a:solidFill>
                   <a:srgbClr val="222A3F"/>
                 </a:solidFill>
                 <a:latin typeface="Cambria"/>
               </a:rPr>
-              <a:t>•  Rule: judge a bench distance only with sky view</a:t>
-            </a:r>
-          </a:p>
-        </p:txBody>
-      </p:sp>
-      <p:sp>
-        <p:nvSpPr>
-          <p:cNvPr id="14" name="Rectangle 13"/>
+              <a:t>•  SF: 21 spots gave different answers each time (red). RG: none</a:t>
+            </a:r>
+          </a:p>
+          <a:p>
+            <a:pPr>
+              <a:spcBef>
+                <a:spcPts val="400"/>
+              </a:spcBef>
+            </a:pPr>
+            <a:r>
+              <a:rPr sz="1250">
+                <a:solidFill>
+                  <a:srgbClr val="222A3F"/>
+                </a:solidFill>
+                <a:latin typeface="Cambria"/>
+              </a:rPr>
+              <a:t>•  Rewriting those spots on a good power supply made them perfect. The chip is healthy</a:t>
+            </a:r>
+          </a:p>
+          <a:p>
+            <a:pPr>
+              <a:spcBef>
+                <a:spcPts val="400"/>
+              </a:spcBef>
+            </a:pPr>
+            <a:r>
+              <a:rPr sz="1250">
+                <a:solidFill>
+                  <a:srgbClr val="222A3F"/>
+                </a:solidFill>
+                <a:latin typeface="Cambria"/>
+              </a:rPr>
+              <a:t>•  The cause: the radio writes to memory while the battery is sagging below what the chip needs</a:t>
+            </a:r>
+          </a:p>
+        </p:txBody>
+      </p:sp>
+      <p:sp>
+        <p:nvSpPr>
+          <p:cNvPr id="12" name="TextBox 11"/>
+          <p:cNvSpPr txBox="1"/>
+          <p:nvPr/>
+        </p:nvSpPr>
+        <p:spPr>
+          <a:xfrm>
+            <a:off x="502920" y="3794760"/>
+            <a:ext cx="7863840" cy="1005840"/>
+          </a:xfrm>
+          <a:prstGeom prst="rect">
+            <a:avLst/>
+          </a:prstGeom>
+          <a:noFill/>
+        </p:spPr>
+        <p:txBody>
+          <a:bodyPr wrap="square" lIns="0" rIns="0" tIns="0" bIns="0">
+            <a:spAutoFit/>
+          </a:bodyPr>
+          <a:lstStyle/>
+          <a:p>
+            <a:pPr algn="l"/>
+            <a:r>
+              <a:rPr sz="1250" b="0" i="0">
+                <a:solidFill>
+                  <a:srgbClr val="222A3F"/>
+                </a:solidFill>
+                <a:latin typeface="Cambria"/>
+              </a:rPr>
+              <a:t>Each square is a 4 KB block of the settings area. Red blocks read differently on every pass. Green blocks held the live settings that day. SF was repaired the same day: 21 red blocks to 0. The full evidence is a separate 20-sheet presentation, ready in the repository.</a:t>
+            </a:r>
+          </a:p>
+        </p:txBody>
+      </p:sp>
+      <p:sp>
+        <p:nvSpPr>
+          <p:cNvPr id="13" name="Rectangle 12"/>
           <p:cNvSpPr/>
           <p:nvPr/>
         </p:nvSpPr>
         <p:spPr>
           <a:xfrm>
-            <a:off x="8001000" y="1280160"/>
-            <a:ext cx="3657600" cy="2743200"/>
+            <a:off x="502920" y="5074920"/>
+            <a:ext cx="3794760" cy="960120"/>
           </a:xfrm>
           <a:prstGeom prst="rect">
             <a:avLst/>
@@ -8961,9 +8500,9 @@
           <a:solidFill>
             <a:srgbClr val="F2F5FA"/>
           </a:solidFill>
-          <a:ln w="15875">
+          <a:ln w="12700">
             <a:solidFill>
-              <a:srgbClr val="16213D"/>
+              <a:srgbClr val="9AA7BE"/>
             </a:solidFill>
           </a:ln>
           <a:effectLst/>
@@ -8992,14 +8531,14 @@
       </p:sp>
       <p:sp>
         <p:nvSpPr>
-          <p:cNvPr id="15" name="TextBox 14"/>
+          <p:cNvPr id="14" name="TextBox 13"/>
           <p:cNvSpPr txBox="1"/>
           <p:nvPr/>
         </p:nvSpPr>
         <p:spPr>
           <a:xfrm>
-            <a:off x="8165592" y="1399031"/>
-            <a:ext cx="3328416" cy="2505456"/>
+            <a:off x="502920" y="5184648"/>
+            <a:ext cx="3794760" cy="508000"/>
           </a:xfrm>
           <a:prstGeom prst="rect">
             <a:avLst/>
@@ -9012,100 +8551,64 @@
           </a:bodyPr>
           <a:lstStyle/>
           <a:p>
-            <a:r>
-              <a:rPr sz="1350" b="1" spc="100">
-                <a:solidFill>
-                  <a:srgbClr val="16213D"/>
+            <a:pPr algn="ctr"/>
+            <a:r>
+              <a:rPr sz="2000" b="1" i="0">
+                <a:solidFill>
+                  <a:srgbClr val="C43A4B"/>
                 </a:solidFill>
                 <a:latin typeface="Cambria"/>
               </a:rPr>
-              <a:t>DOCUMENTS</a:t>
-            </a:r>
-          </a:p>
-          <a:p>
-            <a:pPr>
-              <a:spcBef>
-                <a:spcPts val="400"/>
-              </a:spcBef>
-            </a:pPr>
-            <a:r>
-              <a:rPr sz="1150">
+              <a:t>21 -&gt; 0</a:t>
+            </a:r>
+          </a:p>
+        </p:txBody>
+      </p:sp>
+      <p:sp>
+        <p:nvSpPr>
+          <p:cNvPr id="15" name="TextBox 14"/>
+          <p:cNvSpPr txBox="1"/>
+          <p:nvPr/>
+        </p:nvSpPr>
+        <p:spPr>
+          <a:xfrm>
+            <a:off x="640080" y="5784087"/>
+            <a:ext cx="3520440" cy="177799"/>
+          </a:xfrm>
+          <a:prstGeom prst="rect">
+            <a:avLst/>
+          </a:prstGeom>
+          <a:noFill/>
+        </p:spPr>
+        <p:txBody>
+          <a:bodyPr wrap="square" lIns="0" rIns="0" tIns="0" bIns="0">
+            <a:spAutoFit/>
+          </a:bodyPr>
+          <a:lstStyle/>
+          <a:p>
+            <a:pPr algn="ctr"/>
+            <a:r>
+              <a:rPr sz="1100" b="0" i="0">
                 <a:solidFill>
                   <a:srgbClr val="222A3F"/>
                 </a:solidFill>
                 <a:latin typeface="Cambria"/>
               </a:rPr>
-              <a:t>•  User Guide 12: restoring a radio that forgot its settings, phone and laptop paths</a:t>
-            </a:r>
-          </a:p>
-          <a:p>
-            <a:pPr>
-              <a:spcBef>
-                <a:spcPts val="400"/>
-              </a:spcBef>
-            </a:pPr>
-            <a:r>
-              <a:rPr sz="1150">
-                <a:solidFill>
-                  <a:srgbClr val="222A3F"/>
-                </a:solidFill>
-                <a:latin typeface="Cambria"/>
-              </a:rPr>
-              <a:t>•  Technical Manual 15 and 16: verification record and failure catalog updated through 28 October</a:t>
-            </a:r>
-          </a:p>
-          <a:p>
-            <a:pPr>
-              <a:spcBef>
-                <a:spcPts val="400"/>
-              </a:spcBef>
-            </a:pPr>
-            <a:r>
-              <a:rPr sz="1150">
-                <a:solidFill>
-                  <a:srgbClr val="222A3F"/>
-                </a:solidFill>
-                <a:latin typeface="Cambria"/>
-              </a:rPr>
-              <a:t>•  Presentation for 4 November: 20 sheets, built and in the repository</a:t>
-            </a:r>
-          </a:p>
-        </p:txBody>
-      </p:sp>
-      <p:pic>
-        <p:nvPicPr>
-          <p:cNvPr id="16" name="Picture 15" descr="g_lcddiag.png"/>
-          <p:cNvPicPr>
-            <a:picLocks noChangeAspect="1"/>
-          </p:cNvPicPr>
-          <p:nvPr/>
-        </p:nvPicPr>
-        <p:blipFill>
-          <a:blip r:embed="rId2"/>
-          <a:stretch>
-            <a:fillRect/>
-          </a:stretch>
-        </p:blipFill>
-        <p:spPr>
-          <a:xfrm>
-            <a:off x="502920" y="4206240"/>
-            <a:ext cx="5029200" cy="1865671"/>
-          </a:xfrm>
-          <a:prstGeom prst="rect">
-            <a:avLst/>
-          </a:prstGeom>
-        </p:spPr>
-      </p:pic>
-      <p:sp>
-        <p:nvSpPr>
-          <p:cNvPr id="17" name="Rectangle 16"/>
+              <a:t>bad blocks on SF, before and after the repair</a:t>
+            </a:r>
+          </a:p>
+        </p:txBody>
+      </p:sp>
+      <p:sp>
+        <p:nvSpPr>
+          <p:cNvPr id="16" name="Rectangle 15"/>
           <p:cNvSpPr/>
           <p:nvPr/>
         </p:nvSpPr>
         <p:spPr>
           <a:xfrm>
-            <a:off x="5715000" y="4206240"/>
-            <a:ext cx="5989320" cy="1856231"/>
+            <a:off x="4572000" y="5074920"/>
+            <a:ext cx="3794760" cy="960120"/>
           </a:xfrm>
           <a:prstGeom prst="rect">
             <a:avLst/>
@@ -9113,9 +8616,9 @@
           <a:solidFill>
             <a:srgbClr val="F2F5FA"/>
           </a:solidFill>
-          <a:ln w="15875">
+          <a:ln w="12700">
             <a:solidFill>
-              <a:srgbClr val="5E6B85"/>
+              <a:srgbClr val="9AA7BE"/>
             </a:solidFill>
           </a:ln>
           <a:effectLst/>
@@ -9144,14 +8647,14 @@
       </p:sp>
       <p:sp>
         <p:nvSpPr>
-          <p:cNvPr id="18" name="TextBox 17"/>
+          <p:cNvPr id="17" name="TextBox 16"/>
           <p:cNvSpPr txBox="1"/>
           <p:nvPr/>
         </p:nvSpPr>
         <p:spPr>
           <a:xfrm>
-            <a:off x="5879592" y="4325112"/>
-            <a:ext cx="5660136" cy="1618487"/>
+            <a:off x="4572000" y="5184648"/>
+            <a:ext cx="3794760" cy="508000"/>
           </a:xfrm>
           <a:prstGeom prst="rect">
             <a:avLst/>
@@ -9164,30 +8667,50 @@
           </a:bodyPr>
           <a:lstStyle/>
           <a:p>
-            <a:r>
-              <a:rPr sz="1250" b="1" spc="100">
-                <a:solidFill>
-                  <a:srgbClr val="5E6B85"/>
+            <a:pPr algn="ctr"/>
+            <a:r>
+              <a:rPr sz="2000" b="1" i="0">
+                <a:solidFill>
+                  <a:srgbClr val="1F9D68"/>
                 </a:solidFill>
                 <a:latin typeface="Cambria"/>
               </a:rPr>
-              <a:t>THE BENCH RECORD BEHIND THE 0.21 MI</a:t>
-            </a:r>
-          </a:p>
-          <a:p>
-            <a:pPr>
-              <a:spcBef>
-                <a:spcPts val="400"/>
-              </a:spcBef>
-            </a:pPr>
-            <a:r>
-              <a:rPr sz="1100">
+              <a:t>0</a:t>
+            </a:r>
+          </a:p>
+        </p:txBody>
+      </p:sp>
+      <p:sp>
+        <p:nvSpPr>
+          <p:cNvPr id="18" name="TextBox 17"/>
+          <p:cNvSpPr txBox="1"/>
+          <p:nvPr/>
+        </p:nvSpPr>
+        <p:spPr>
+          <a:xfrm>
+            <a:off x="4709160" y="5784087"/>
+            <a:ext cx="3520440" cy="177799"/>
+          </a:xfrm>
+          <a:prstGeom prst="rect">
+            <a:avLst/>
+          </a:prstGeom>
+          <a:noFill/>
+        </p:spPr>
+        <p:txBody>
+          <a:bodyPr wrap="square" lIns="0" rIns="0" tIns="0" bIns="0">
+            <a:spAutoFit/>
+          </a:bodyPr>
+          <a:lstStyle/>
+          <a:p>
+            <a:pPr algn="ctr"/>
+            <a:r>
+              <a:rPr sz="1100" b="0" i="0">
                 <a:solidFill>
                   <a:srgbClr val="222A3F"/>
                 </a:solidFill>
                 <a:latin typeface="Cambria"/>
               </a:rPr>
-              <a:t>Parsed from both displays' serial logs on 24 October: clean boots, pairing in under 8 s, correct node tables, and SF's indoor GPS fix wandering 100 to 400 m between packets with phantom speed. The displays were right; the fixes were wrong. Everything on this sheet is committed and pushed; nothing with the channel key is public.</a:t>
+              <a:t>bad blocks on RG</a:t>
             </a:r>
           </a:p>
         </p:txBody>
@@ -9398,7 +8921,7 @@
                 </a:solidFill>
                 <a:latin typeface="Courier New"/>
               </a:rPr>
-              <a:t>SHEET 06/06  STATUS  2026-10-28</a:t>
+              <a:t>SHEET 06/09  STATUS  2026-10-28</a:t>
             </a:r>
           </a:p>
         </p:txBody>
@@ -9433,7 +8956,1560 @@
                 </a:solidFill>
                 <a:latin typeface="Cambria"/>
               </a:rPr>
-              <a:t>NEXT</a:t>
+              <a:t>THE FIX IS ON BOTH RADIOS</a:t>
+            </a:r>
+          </a:p>
+        </p:txBody>
+      </p:sp>
+      <p:sp>
+        <p:nvSpPr>
+          <p:cNvPr id="8" name="TextBox 7"/>
+          <p:cNvSpPr txBox="1"/>
+          <p:nvPr/>
+        </p:nvSpPr>
+        <p:spPr>
+          <a:xfrm>
+            <a:off x="475488" y="868680"/>
+            <a:ext cx="9052560" cy="320040"/>
+          </a:xfrm>
+          <a:prstGeom prst="rect">
+            <a:avLst/>
+          </a:prstGeom>
+          <a:noFill/>
+        </p:spPr>
+        <p:txBody>
+          <a:bodyPr wrap="square" lIns="0" rIns="0" tIns="0" bIns="0">
+            <a:spAutoFit/>
+          </a:bodyPr>
+          <a:lstStyle/>
+          <a:p>
+            <a:pPr algn="l"/>
+            <a:r>
+              <a:rPr sz="1250" b="0" i="1">
+                <a:solidFill>
+                  <a:srgbClr val="5E6B85"/>
+                </a:solidFill>
+                <a:latin typeface="Cambria"/>
+              </a:rPr>
+              <a:t>Built 27 October, flashed and tested 28 October</a:t>
+            </a:r>
+          </a:p>
+        </p:txBody>
+      </p:sp>
+      <p:sp>
+        <p:nvSpPr>
+          <p:cNvPr id="9" name="Rectangle 8"/>
+          <p:cNvSpPr/>
+          <p:nvPr/>
+        </p:nvSpPr>
+        <p:spPr>
+          <a:xfrm>
+            <a:off x="502920" y="1280160"/>
+            <a:ext cx="5486400" cy="2468880"/>
+          </a:xfrm>
+          <a:prstGeom prst="rect">
+            <a:avLst/>
+          </a:prstGeom>
+          <a:solidFill>
+            <a:srgbClr val="F2F5FA"/>
+          </a:solidFill>
+          <a:ln w="15875">
+            <a:solidFill>
+              <a:srgbClr val="1F9D68"/>
+            </a:solidFill>
+          </a:ln>
+          <a:effectLst/>
+        </p:spPr>
+        <p:style>
+          <a:lnRef idx="1">
+            <a:schemeClr val="accent1"/>
+          </a:lnRef>
+          <a:fillRef idx="3">
+            <a:schemeClr val="accent1"/>
+          </a:fillRef>
+          <a:effectRef idx="2">
+            <a:schemeClr val="accent1"/>
+          </a:effectRef>
+          <a:fontRef idx="minor">
+            <a:schemeClr val="lt1"/>
+          </a:fontRef>
+        </p:style>
+        <p:txBody>
+          <a:bodyPr rtlCol="0" anchor="ctr"/>
+          <a:lstStyle/>
+          <a:p>
+            <a:pPr algn="ctr"/>
+          </a:p>
+        </p:txBody>
+      </p:sp>
+      <p:sp>
+        <p:nvSpPr>
+          <p:cNvPr id="10" name="TextBox 9"/>
+          <p:cNvSpPr txBox="1"/>
+          <p:nvPr/>
+        </p:nvSpPr>
+        <p:spPr>
+          <a:xfrm>
+            <a:off x="667512" y="1399031"/>
+            <a:ext cx="5157216" cy="2231136"/>
+          </a:xfrm>
+          <a:prstGeom prst="rect">
+            <a:avLst/>
+          </a:prstGeom>
+          <a:noFill/>
+        </p:spPr>
+        <p:txBody>
+          <a:bodyPr wrap="square" lIns="0" rIns="0" tIns="0" bIns="0">
+            <a:spAutoFit/>
+          </a:bodyPr>
+          <a:lstStyle/>
+          <a:p>
+            <a:r>
+              <a:rPr sz="1400" b="1" spc="100">
+                <a:solidFill>
+                  <a:srgbClr val="1F9D68"/>
+                </a:solidFill>
+                <a:latin typeface="Cambria"/>
+              </a:rPr>
+              <a:t>WHAT IT IS</a:t>
+            </a:r>
+          </a:p>
+          <a:p>
+            <a:pPr>
+              <a:spcBef>
+                <a:spcPts val="400"/>
+              </a:spcBef>
+            </a:pPr>
+            <a:r>
+              <a:rPr sz="1350">
+                <a:solidFill>
+                  <a:srgbClr val="222A3F"/>
+                </a:solidFill>
+                <a:latin typeface="Cambria"/>
+              </a:rPr>
+              <a:t>The radio firmware was rebuilt so that its factory settings ARE our settings: our channel, our frequency, no PIN, our names. If the radio ever loses its settings again, it falls back to the right ones by itself.</a:t>
+            </a:r>
+          </a:p>
+        </p:txBody>
+      </p:sp>
+      <p:sp>
+        <p:nvSpPr>
+          <p:cNvPr id="11" name="Rectangle 10"/>
+          <p:cNvSpPr/>
+          <p:nvPr/>
+        </p:nvSpPr>
+        <p:spPr>
+          <a:xfrm>
+            <a:off x="6172200" y="1280160"/>
+            <a:ext cx="5532120" cy="2468880"/>
+          </a:xfrm>
+          <a:prstGeom prst="rect">
+            <a:avLst/>
+          </a:prstGeom>
+          <a:solidFill>
+            <a:srgbClr val="F2F5FA"/>
+          </a:solidFill>
+          <a:ln w="15875">
+            <a:solidFill>
+              <a:srgbClr val="16213D"/>
+            </a:solidFill>
+          </a:ln>
+          <a:effectLst/>
+        </p:spPr>
+        <p:style>
+          <a:lnRef idx="1">
+            <a:schemeClr val="accent1"/>
+          </a:lnRef>
+          <a:fillRef idx="3">
+            <a:schemeClr val="accent1"/>
+          </a:fillRef>
+          <a:effectRef idx="2">
+            <a:schemeClr val="accent1"/>
+          </a:effectRef>
+          <a:fontRef idx="minor">
+            <a:schemeClr val="lt1"/>
+          </a:fontRef>
+        </p:style>
+        <p:txBody>
+          <a:bodyPr rtlCol="0" anchor="ctr"/>
+          <a:lstStyle/>
+          <a:p>
+            <a:pPr algn="ctr"/>
+          </a:p>
+        </p:txBody>
+      </p:sp>
+      <p:sp>
+        <p:nvSpPr>
+          <p:cNvPr id="12" name="TextBox 11"/>
+          <p:cNvSpPr txBox="1"/>
+          <p:nvPr/>
+        </p:nvSpPr>
+        <p:spPr>
+          <a:xfrm>
+            <a:off x="6336792" y="1399031"/>
+            <a:ext cx="5202936" cy="2231136"/>
+          </a:xfrm>
+          <a:prstGeom prst="rect">
+            <a:avLst/>
+          </a:prstGeom>
+          <a:noFill/>
+        </p:spPr>
+        <p:txBody>
+          <a:bodyPr wrap="square" lIns="0" rIns="0" tIns="0" bIns="0">
+            <a:spAutoFit/>
+          </a:bodyPr>
+          <a:lstStyle/>
+          <a:p>
+            <a:r>
+              <a:rPr sz="1400" b="1" spc="100">
+                <a:solidFill>
+                  <a:srgbClr val="16213D"/>
+                </a:solidFill>
+                <a:latin typeface="Cambria"/>
+              </a:rPr>
+              <a:t>HOW IT WAS TESTED</a:t>
+            </a:r>
+          </a:p>
+          <a:p>
+            <a:pPr>
+              <a:spcBef>
+                <a:spcPts val="400"/>
+              </a:spcBef>
+            </a:pPr>
+            <a:r>
+              <a:rPr sz="1300">
+                <a:solidFill>
+                  <a:srgbClr val="222A3F"/>
+                </a:solidFill>
+                <a:latin typeface="Cambria"/>
+              </a:rPr>
+              <a:t>•  Flash the radio, then order a factory reset</a:t>
+            </a:r>
+          </a:p>
+          <a:p>
+            <a:pPr>
+              <a:spcBef>
+                <a:spcPts val="400"/>
+              </a:spcBef>
+            </a:pPr>
+            <a:r>
+              <a:rPr sz="1300">
+                <a:solidFill>
+                  <a:srgbClr val="222A3F"/>
+                </a:solidFill>
+                <a:latin typeface="Cambria"/>
+              </a:rPr>
+              <a:t>•  The radio came back on Group9 at 912.875 MHz with the right name and no PIN, with nobody touching it</a:t>
+            </a:r>
+          </a:p>
+          <a:p>
+            <a:pPr>
+              <a:spcBef>
+                <a:spcPts val="400"/>
+              </a:spcBef>
+            </a:pPr>
+            <a:r>
+              <a:rPr sz="1300">
+                <a:solidFill>
+                  <a:srgbClr val="222A3F"/>
+                </a:solidFill>
+                <a:latin typeface="Cambria"/>
+              </a:rPr>
+              <a:t>•  Done on both SF and RG; both screens read 912.875 before they were unplugged</a:t>
+            </a:r>
+          </a:p>
+        </p:txBody>
+      </p:sp>
+      <p:sp>
+        <p:nvSpPr>
+          <p:cNvPr id="13" name="Rectangle 12"/>
+          <p:cNvSpPr/>
+          <p:nvPr/>
+        </p:nvSpPr>
+        <p:spPr>
+          <a:xfrm>
+            <a:off x="502920" y="3977639"/>
+            <a:ext cx="3611880" cy="1234440"/>
+          </a:xfrm>
+          <a:prstGeom prst="rect">
+            <a:avLst/>
+          </a:prstGeom>
+          <a:solidFill>
+            <a:srgbClr val="F2F5FA"/>
+          </a:solidFill>
+          <a:ln w="12700">
+            <a:solidFill>
+              <a:srgbClr val="9AA7BE"/>
+            </a:solidFill>
+          </a:ln>
+          <a:effectLst/>
+        </p:spPr>
+        <p:style>
+          <a:lnRef idx="1">
+            <a:schemeClr val="accent1"/>
+          </a:lnRef>
+          <a:fillRef idx="3">
+            <a:schemeClr val="accent1"/>
+          </a:fillRef>
+          <a:effectRef idx="2">
+            <a:schemeClr val="accent1"/>
+          </a:effectRef>
+          <a:fontRef idx="minor">
+            <a:schemeClr val="lt1"/>
+          </a:fontRef>
+        </p:style>
+        <p:txBody>
+          <a:bodyPr rtlCol="0" anchor="ctr"/>
+          <a:lstStyle/>
+          <a:p>
+            <a:pPr algn="ctr"/>
+          </a:p>
+        </p:txBody>
+      </p:sp>
+      <p:sp>
+        <p:nvSpPr>
+          <p:cNvPr id="14" name="TextBox 13"/>
+          <p:cNvSpPr txBox="1"/>
+          <p:nvPr/>
+        </p:nvSpPr>
+        <p:spPr>
+          <a:xfrm>
+            <a:off x="502920" y="4087368"/>
+            <a:ext cx="3611880" cy="711200"/>
+          </a:xfrm>
+          <a:prstGeom prst="rect">
+            <a:avLst/>
+          </a:prstGeom>
+          <a:noFill/>
+        </p:spPr>
+        <p:txBody>
+          <a:bodyPr wrap="square" lIns="0" rIns="0" tIns="0" bIns="0">
+            <a:spAutoFit/>
+          </a:bodyPr>
+          <a:lstStyle/>
+          <a:p>
+            <a:pPr algn="ctr"/>
+            <a:r>
+              <a:rPr sz="2800" b="1" i="0">
+                <a:solidFill>
+                  <a:srgbClr val="1F9D68"/>
+                </a:solidFill>
+                <a:latin typeface="Cambria"/>
+              </a:rPr>
+              <a:t>2 / 2</a:t>
+            </a:r>
+          </a:p>
+        </p:txBody>
+      </p:sp>
+      <p:sp>
+        <p:nvSpPr>
+          <p:cNvPr id="15" name="TextBox 14"/>
+          <p:cNvSpPr txBox="1"/>
+          <p:nvPr/>
+        </p:nvSpPr>
+        <p:spPr>
+          <a:xfrm>
+            <a:off x="640080" y="4890007"/>
+            <a:ext cx="3337560" cy="248920"/>
+          </a:xfrm>
+          <a:prstGeom prst="rect">
+            <a:avLst/>
+          </a:prstGeom>
+          <a:noFill/>
+        </p:spPr>
+        <p:txBody>
+          <a:bodyPr wrap="square" lIns="0" rIns="0" tIns="0" bIns="0">
+            <a:spAutoFit/>
+          </a:bodyPr>
+          <a:lstStyle/>
+          <a:p>
+            <a:pPr algn="ctr"/>
+            <a:r>
+              <a:rPr sz="1100" b="0" i="0">
+                <a:solidFill>
+                  <a:srgbClr val="222A3F"/>
+                </a:solidFill>
+                <a:latin typeface="Cambria"/>
+              </a:rPr>
+              <a:t>radios flashed and tested</a:t>
+            </a:r>
+          </a:p>
+        </p:txBody>
+      </p:sp>
+      <p:sp>
+        <p:nvSpPr>
+          <p:cNvPr id="16" name="Rectangle 15"/>
+          <p:cNvSpPr/>
+          <p:nvPr/>
+        </p:nvSpPr>
+        <p:spPr>
+          <a:xfrm>
+            <a:off x="4274820" y="3977639"/>
+            <a:ext cx="3611880" cy="1234440"/>
+          </a:xfrm>
+          <a:prstGeom prst="rect">
+            <a:avLst/>
+          </a:prstGeom>
+          <a:solidFill>
+            <a:srgbClr val="F2F5FA"/>
+          </a:solidFill>
+          <a:ln w="12700">
+            <a:solidFill>
+              <a:srgbClr val="9AA7BE"/>
+            </a:solidFill>
+          </a:ln>
+          <a:effectLst/>
+        </p:spPr>
+        <p:style>
+          <a:lnRef idx="1">
+            <a:schemeClr val="accent1"/>
+          </a:lnRef>
+          <a:fillRef idx="3">
+            <a:schemeClr val="accent1"/>
+          </a:fillRef>
+          <a:effectRef idx="2">
+            <a:schemeClr val="accent1"/>
+          </a:effectRef>
+          <a:fontRef idx="minor">
+            <a:schemeClr val="lt1"/>
+          </a:fontRef>
+        </p:style>
+        <p:txBody>
+          <a:bodyPr rtlCol="0" anchor="ctr"/>
+          <a:lstStyle/>
+          <a:p>
+            <a:pPr algn="ctr"/>
+          </a:p>
+        </p:txBody>
+      </p:sp>
+      <p:sp>
+        <p:nvSpPr>
+          <p:cNvPr id="17" name="TextBox 16"/>
+          <p:cNvSpPr txBox="1"/>
+          <p:nvPr/>
+        </p:nvSpPr>
+        <p:spPr>
+          <a:xfrm>
+            <a:off x="4274820" y="4087368"/>
+            <a:ext cx="3611880" cy="711200"/>
+          </a:xfrm>
+          <a:prstGeom prst="rect">
+            <a:avLst/>
+          </a:prstGeom>
+          <a:noFill/>
+        </p:spPr>
+        <p:txBody>
+          <a:bodyPr wrap="square" lIns="0" rIns="0" tIns="0" bIns="0">
+            <a:spAutoFit/>
+          </a:bodyPr>
+          <a:lstStyle/>
+          <a:p>
+            <a:pPr algn="ctr"/>
+            <a:r>
+              <a:rPr sz="2800" b="1" i="0">
+                <a:solidFill>
+                  <a:srgbClr val="1F9D68"/>
+                </a:solidFill>
+                <a:latin typeface="Cambria"/>
+              </a:rPr>
+              <a:t>0</a:t>
+            </a:r>
+          </a:p>
+        </p:txBody>
+      </p:sp>
+      <p:sp>
+        <p:nvSpPr>
+          <p:cNvPr id="18" name="TextBox 17"/>
+          <p:cNvSpPr txBox="1"/>
+          <p:nvPr/>
+        </p:nvSpPr>
+        <p:spPr>
+          <a:xfrm>
+            <a:off x="4411980" y="4890007"/>
+            <a:ext cx="3337560" cy="248920"/>
+          </a:xfrm>
+          <a:prstGeom prst="rect">
+            <a:avLst/>
+          </a:prstGeom>
+          <a:noFill/>
+        </p:spPr>
+        <p:txBody>
+          <a:bodyPr wrap="square" lIns="0" rIns="0" tIns="0" bIns="0">
+            <a:spAutoFit/>
+          </a:bodyPr>
+          <a:lstStyle/>
+          <a:p>
+            <a:pPr algn="ctr"/>
+            <a:r>
+              <a:rPr sz="1100" b="0" i="0">
+                <a:solidFill>
+                  <a:srgbClr val="222A3F"/>
+                </a:solidFill>
+                <a:latin typeface="Cambria"/>
+              </a:rPr>
+              <a:t>commands needed if a radio forgets again</a:t>
+            </a:r>
+          </a:p>
+        </p:txBody>
+      </p:sp>
+      <p:sp>
+        <p:nvSpPr>
+          <p:cNvPr id="19" name="Rectangle 18"/>
+          <p:cNvSpPr/>
+          <p:nvPr/>
+        </p:nvSpPr>
+        <p:spPr>
+          <a:xfrm>
+            <a:off x="8046720" y="3977639"/>
+            <a:ext cx="3611880" cy="1234440"/>
+          </a:xfrm>
+          <a:prstGeom prst="rect">
+            <a:avLst/>
+          </a:prstGeom>
+          <a:solidFill>
+            <a:srgbClr val="F2F5FA"/>
+          </a:solidFill>
+          <a:ln w="12700">
+            <a:solidFill>
+              <a:srgbClr val="9AA7BE"/>
+            </a:solidFill>
+          </a:ln>
+          <a:effectLst/>
+        </p:spPr>
+        <p:style>
+          <a:lnRef idx="1">
+            <a:schemeClr val="accent1"/>
+          </a:lnRef>
+          <a:fillRef idx="3">
+            <a:schemeClr val="accent1"/>
+          </a:fillRef>
+          <a:effectRef idx="2">
+            <a:schemeClr val="accent1"/>
+          </a:effectRef>
+          <a:fontRef idx="minor">
+            <a:schemeClr val="lt1"/>
+          </a:fontRef>
+        </p:style>
+        <p:txBody>
+          <a:bodyPr rtlCol="0" anchor="ctr"/>
+          <a:lstStyle/>
+          <a:p>
+            <a:pPr algn="ctr"/>
+          </a:p>
+        </p:txBody>
+      </p:sp>
+      <p:sp>
+        <p:nvSpPr>
+          <p:cNvPr id="20" name="TextBox 19"/>
+          <p:cNvSpPr txBox="1"/>
+          <p:nvPr/>
+        </p:nvSpPr>
+        <p:spPr>
+          <a:xfrm>
+            <a:off x="8046720" y="4087368"/>
+            <a:ext cx="3611880" cy="711200"/>
+          </a:xfrm>
+          <a:prstGeom prst="rect">
+            <a:avLst/>
+          </a:prstGeom>
+          <a:noFill/>
+        </p:spPr>
+        <p:txBody>
+          <a:bodyPr wrap="square" lIns="0" rIns="0" tIns="0" bIns="0">
+            <a:spAutoFit/>
+          </a:bodyPr>
+          <a:lstStyle/>
+          <a:p>
+            <a:pPr algn="ctr"/>
+            <a:r>
+              <a:rPr sz="2800" b="1" i="0">
+                <a:solidFill>
+                  <a:srgbClr val="E58E1A"/>
+                </a:solidFill>
+                <a:latin typeface="Cambria"/>
+              </a:rPr>
+              <a:t>912.875</a:t>
+            </a:r>
+          </a:p>
+        </p:txBody>
+      </p:sp>
+      <p:sp>
+        <p:nvSpPr>
+          <p:cNvPr id="21" name="TextBox 20"/>
+          <p:cNvSpPr txBox="1"/>
+          <p:nvPr/>
+        </p:nvSpPr>
+        <p:spPr>
+          <a:xfrm>
+            <a:off x="8183880" y="4890007"/>
+            <a:ext cx="3337560" cy="248920"/>
+          </a:xfrm>
+          <a:prstGeom prst="rect">
+            <a:avLst/>
+          </a:prstGeom>
+          <a:noFill/>
+        </p:spPr>
+        <p:txBody>
+          <a:bodyPr wrap="square" lIns="0" rIns="0" tIns="0" bIns="0">
+            <a:spAutoFit/>
+          </a:bodyPr>
+          <a:lstStyle/>
+          <a:p>
+            <a:pPr algn="ctr"/>
+            <a:r>
+              <a:rPr sz="1100" b="0" i="0">
+                <a:solidFill>
+                  <a:srgbClr val="222A3F"/>
+                </a:solidFill>
+                <a:latin typeface="Cambria"/>
+              </a:rPr>
+              <a:t>MHz on both screens, the pre-flight check</a:t>
+            </a:r>
+          </a:p>
+        </p:txBody>
+      </p:sp>
+      <p:sp>
+        <p:nvSpPr>
+          <p:cNvPr id="22" name="TextBox 21"/>
+          <p:cNvSpPr txBox="1"/>
+          <p:nvPr/>
+        </p:nvSpPr>
+        <p:spPr>
+          <a:xfrm>
+            <a:off x="502920" y="5440680"/>
+            <a:ext cx="11155680" cy="548640"/>
+          </a:xfrm>
+          <a:prstGeom prst="rect">
+            <a:avLst/>
+          </a:prstGeom>
+          <a:noFill/>
+        </p:spPr>
+        <p:txBody>
+          <a:bodyPr wrap="square" lIns="0" rIns="0" tIns="0" bIns="0">
+            <a:spAutoFit/>
+          </a:bodyPr>
+          <a:lstStyle/>
+          <a:p>
+            <a:pPr algn="l"/>
+            <a:r>
+              <a:rPr sz="1200" b="0" i="1">
+                <a:solidFill>
+                  <a:srgbClr val="5E6B85"/>
+                </a:solidFill>
+                <a:latin typeface="Cambria"/>
+              </a:rPr>
+              <a:t>Still in force: check both screens read 912.875 before any drive; never store a radio with a flat battery.</a:t>
+            </a:r>
+          </a:p>
+        </p:txBody>
+      </p:sp>
+    </p:spTree>
+  </p:cSld>
+  <p:clrMapOvr>
+    <a:masterClrMapping/>
+  </p:clrMapOvr>
+</p:sld>
+</file>
+
+<file path=ppt/slides/slide7.xml><?xml version="1.0" encoding="utf-8"?>
+<p:sld xmlns:a="http://schemas.openxmlformats.org/drawingml/2006/main" xmlns:p="http://schemas.openxmlformats.org/presentationml/2006/main" xmlns:r="http://schemas.openxmlformats.org/officeDocument/2006/relationships">
+  <p:cSld>
+    <p:spTree>
+      <p:nvGrpSpPr>
+        <p:cNvPr id="1" name=""/>
+        <p:cNvGrpSpPr/>
+        <p:nvPr/>
+      </p:nvGrpSpPr>
+      <p:grpSpPr/>
+      <p:sp>
+        <p:nvSpPr>
+          <p:cNvPr id="2" name="Rectangle 1"/>
+          <p:cNvSpPr/>
+          <p:nvPr/>
+        </p:nvSpPr>
+        <p:spPr>
+          <a:xfrm>
+            <a:off x="164592" y="146304"/>
+            <a:ext cx="11859768" cy="6565392"/>
+          </a:xfrm>
+          <a:prstGeom prst="rect">
+            <a:avLst/>
+          </a:prstGeom>
+          <a:noFill/>
+          <a:ln w="22225">
+            <a:solidFill>
+              <a:srgbClr val="16213D"/>
+            </a:solidFill>
+          </a:ln>
+          <a:effectLst/>
+        </p:spPr>
+        <p:style>
+          <a:lnRef idx="1">
+            <a:schemeClr val="accent1"/>
+          </a:lnRef>
+          <a:fillRef idx="3">
+            <a:schemeClr val="accent1"/>
+          </a:fillRef>
+          <a:effectRef idx="2">
+            <a:schemeClr val="accent1"/>
+          </a:effectRef>
+          <a:fontRef idx="minor">
+            <a:schemeClr val="lt1"/>
+          </a:fontRef>
+        </p:style>
+        <p:txBody>
+          <a:bodyPr rtlCol="0" anchor="ctr"/>
+          <a:lstStyle/>
+          <a:p>
+            <a:pPr algn="ctr"/>
+          </a:p>
+        </p:txBody>
+      </p:sp>
+      <p:sp>
+        <p:nvSpPr>
+          <p:cNvPr id="3" name="Rectangle 2"/>
+          <p:cNvSpPr/>
+          <p:nvPr/>
+        </p:nvSpPr>
+        <p:spPr>
+          <a:xfrm>
+            <a:off x="164592" y="6272784"/>
+            <a:ext cx="11859768" cy="12700"/>
+          </a:xfrm>
+          <a:prstGeom prst="rect">
+            <a:avLst/>
+          </a:prstGeom>
+          <a:solidFill>
+            <a:srgbClr val="16213D"/>
+          </a:solidFill>
+          <a:ln>
+            <a:noFill/>
+          </a:ln>
+          <a:effectLst/>
+        </p:spPr>
+        <p:style>
+          <a:lnRef idx="1">
+            <a:schemeClr val="accent1"/>
+          </a:lnRef>
+          <a:fillRef idx="3">
+            <a:schemeClr val="accent1"/>
+          </a:fillRef>
+          <a:effectRef idx="2">
+            <a:schemeClr val="accent1"/>
+          </a:effectRef>
+          <a:fontRef idx="minor">
+            <a:schemeClr val="lt1"/>
+          </a:fontRef>
+        </p:style>
+        <p:txBody>
+          <a:bodyPr rtlCol="0" anchor="ctr"/>
+          <a:lstStyle/>
+          <a:p>
+            <a:pPr algn="ctr"/>
+          </a:p>
+        </p:txBody>
+      </p:sp>
+      <p:sp>
+        <p:nvSpPr>
+          <p:cNvPr id="4" name="TextBox 3"/>
+          <p:cNvSpPr txBox="1"/>
+          <p:nvPr/>
+        </p:nvSpPr>
+        <p:spPr>
+          <a:xfrm>
+            <a:off x="320040" y="6345936"/>
+            <a:ext cx="4206240" cy="292608"/>
+          </a:xfrm>
+          <a:prstGeom prst="rect">
+            <a:avLst/>
+          </a:prstGeom>
+          <a:noFill/>
+        </p:spPr>
+        <p:txBody>
+          <a:bodyPr wrap="square" lIns="0" rIns="0" tIns="0" bIns="0">
+            <a:spAutoFit/>
+          </a:bodyPr>
+          <a:lstStyle/>
+          <a:p>
+            <a:pPr algn="l"/>
+            <a:r>
+              <a:rPr sz="900" b="0" i="0">
+                <a:solidFill>
+                  <a:srgbClr val="5E6B85"/>
+                </a:solidFill>
+                <a:latin typeface="Courier New"/>
+              </a:rPr>
+              <a:t>GROUP 9  |  OFF-GRID VEHICLE TRACKER</a:t>
+            </a:r>
+          </a:p>
+        </p:txBody>
+      </p:sp>
+      <p:sp>
+        <p:nvSpPr>
+          <p:cNvPr id="5" name="TextBox 4"/>
+          <p:cNvSpPr txBox="1"/>
+          <p:nvPr/>
+        </p:nvSpPr>
+        <p:spPr>
+          <a:xfrm>
+            <a:off x="4572000" y="6345936"/>
+            <a:ext cx="4206240" cy="292608"/>
+          </a:xfrm>
+          <a:prstGeom prst="rect">
+            <a:avLst/>
+          </a:prstGeom>
+          <a:noFill/>
+        </p:spPr>
+        <p:txBody>
+          <a:bodyPr wrap="square" lIns="0" rIns="0" tIns="0" bIns="0">
+            <a:spAutoFit/>
+          </a:bodyPr>
+          <a:lstStyle/>
+          <a:p>
+            <a:pPr algn="ctr"/>
+            <a:r>
+              <a:rPr sz="900" b="0" i="0">
+                <a:solidFill>
+                  <a:srgbClr val="5E6B85"/>
+                </a:solidFill>
+                <a:latin typeface="Courier New"/>
+              </a:rPr>
+              <a:t>STATUS UPDATE</a:t>
+            </a:r>
+          </a:p>
+        </p:txBody>
+      </p:sp>
+      <p:sp>
+        <p:nvSpPr>
+          <p:cNvPr id="6" name="TextBox 5"/>
+          <p:cNvSpPr txBox="1"/>
+          <p:nvPr/>
+        </p:nvSpPr>
+        <p:spPr>
+          <a:xfrm>
+            <a:off x="8869680" y="6345936"/>
+            <a:ext cx="3017520" cy="292608"/>
+          </a:xfrm>
+          <a:prstGeom prst="rect">
+            <a:avLst/>
+          </a:prstGeom>
+          <a:noFill/>
+        </p:spPr>
+        <p:txBody>
+          <a:bodyPr wrap="square" lIns="0" rIns="0" tIns="0" bIns="0">
+            <a:spAutoFit/>
+          </a:bodyPr>
+          <a:lstStyle/>
+          <a:p>
+            <a:pPr algn="r"/>
+            <a:r>
+              <a:rPr sz="900" b="0" i="0">
+                <a:solidFill>
+                  <a:srgbClr val="5E6B85"/>
+                </a:solidFill>
+                <a:latin typeface="Courier New"/>
+              </a:rPr>
+              <a:t>SHEET 07/09  STATUS  2026-10-28</a:t>
+            </a:r>
+          </a:p>
+        </p:txBody>
+      </p:sp>
+      <p:sp>
+        <p:nvSpPr>
+          <p:cNvPr id="7" name="TextBox 6"/>
+          <p:cNvSpPr txBox="1"/>
+          <p:nvPr/>
+        </p:nvSpPr>
+        <p:spPr>
+          <a:xfrm>
+            <a:off x="457200" y="329184"/>
+            <a:ext cx="9052560" cy="566928"/>
+          </a:xfrm>
+          <a:prstGeom prst="rect">
+            <a:avLst/>
+          </a:prstGeom>
+          <a:noFill/>
+        </p:spPr>
+        <p:txBody>
+          <a:bodyPr wrap="square" lIns="0" rIns="0" tIns="0" bIns="0">
+            <a:spAutoFit/>
+          </a:bodyPr>
+          <a:lstStyle/>
+          <a:p>
+            <a:pPr algn="l"/>
+            <a:r>
+              <a:rPr sz="2300" b="1" i="0" spc="200">
+                <a:solidFill>
+                  <a:srgbClr val="16213D"/>
+                </a:solidFill>
+                <a:latin typeface="Cambria"/>
+              </a:rPr>
+              <a:t>THE DISPLAY: WHAT CHANGED SINCE THE CANYON</a:t>
+            </a:r>
+          </a:p>
+        </p:txBody>
+      </p:sp>
+      <p:sp>
+        <p:nvSpPr>
+          <p:cNvPr id="8" name="Rectangle 7"/>
+          <p:cNvSpPr/>
+          <p:nvPr/>
+        </p:nvSpPr>
+        <p:spPr>
+          <a:xfrm>
+            <a:off x="502920" y="1280160"/>
+            <a:ext cx="3657600" cy="2011680"/>
+          </a:xfrm>
+          <a:prstGeom prst="rect">
+            <a:avLst/>
+          </a:prstGeom>
+          <a:solidFill>
+            <a:srgbClr val="F2F5FA"/>
+          </a:solidFill>
+          <a:ln w="15875">
+            <a:solidFill>
+              <a:srgbClr val="6D4BDB"/>
+            </a:solidFill>
+          </a:ln>
+          <a:effectLst/>
+        </p:spPr>
+        <p:style>
+          <a:lnRef idx="1">
+            <a:schemeClr val="accent1"/>
+          </a:lnRef>
+          <a:fillRef idx="3">
+            <a:schemeClr val="accent1"/>
+          </a:fillRef>
+          <a:effectRef idx="2">
+            <a:schemeClr val="accent1"/>
+          </a:effectRef>
+          <a:fontRef idx="minor">
+            <a:schemeClr val="lt1"/>
+          </a:fontRef>
+        </p:style>
+        <p:txBody>
+          <a:bodyPr rtlCol="0" anchor="ctr"/>
+          <a:lstStyle/>
+          <a:p>
+            <a:pPr algn="ctr"/>
+          </a:p>
+        </p:txBody>
+      </p:sp>
+      <p:sp>
+        <p:nvSpPr>
+          <p:cNvPr id="9" name="TextBox 8"/>
+          <p:cNvSpPr txBox="1"/>
+          <p:nvPr/>
+        </p:nvSpPr>
+        <p:spPr>
+          <a:xfrm>
+            <a:off x="667512" y="1399031"/>
+            <a:ext cx="3328416" cy="1773936"/>
+          </a:xfrm>
+          <a:prstGeom prst="rect">
+            <a:avLst/>
+          </a:prstGeom>
+          <a:noFill/>
+        </p:spPr>
+        <p:txBody>
+          <a:bodyPr wrap="square" lIns="0" rIns="0" tIns="0" bIns="0">
+            <a:spAutoFit/>
+          </a:bodyPr>
+          <a:lstStyle/>
+          <a:p>
+            <a:r>
+              <a:rPr sz="1400" b="1" spc="100">
+                <a:solidFill>
+                  <a:srgbClr val="6D4BDB"/>
+                </a:solidFill>
+                <a:latin typeface="Cambria"/>
+              </a:rPr>
+              <a:t>CLOCK-FACE HEADINGS</a:t>
+            </a:r>
+          </a:p>
+          <a:p>
+            <a:pPr>
+              <a:spcBef>
+                <a:spcPts val="400"/>
+              </a:spcBef>
+            </a:pPr>
+            <a:r>
+              <a:rPr sz="1300">
+                <a:solidFill>
+                  <a:srgbClr val="222A3F"/>
+                </a:solidFill>
+                <a:latin typeface="Cambria"/>
+              </a:rPr>
+              <a:t>Directions are given as clock positions: 12 is straight ahead, 3 is to the right, 6 behind, 9 to the left. The partner arrow stays.</a:t>
+            </a:r>
+          </a:p>
+        </p:txBody>
+      </p:sp>
+      <p:sp>
+        <p:nvSpPr>
+          <p:cNvPr id="10" name="Rectangle 9"/>
+          <p:cNvSpPr/>
+          <p:nvPr/>
+        </p:nvSpPr>
+        <p:spPr>
+          <a:xfrm>
+            <a:off x="4251959" y="1280160"/>
+            <a:ext cx="3657600" cy="2011680"/>
+          </a:xfrm>
+          <a:prstGeom prst="rect">
+            <a:avLst/>
+          </a:prstGeom>
+          <a:solidFill>
+            <a:srgbClr val="F2F5FA"/>
+          </a:solidFill>
+          <a:ln w="15875">
+            <a:solidFill>
+              <a:srgbClr val="E58E1A"/>
+            </a:solidFill>
+          </a:ln>
+          <a:effectLst/>
+        </p:spPr>
+        <p:style>
+          <a:lnRef idx="1">
+            <a:schemeClr val="accent1"/>
+          </a:lnRef>
+          <a:fillRef idx="3">
+            <a:schemeClr val="accent1"/>
+          </a:fillRef>
+          <a:effectRef idx="2">
+            <a:schemeClr val="accent1"/>
+          </a:effectRef>
+          <a:fontRef idx="minor">
+            <a:schemeClr val="lt1"/>
+          </a:fontRef>
+        </p:style>
+        <p:txBody>
+          <a:bodyPr rtlCol="0" anchor="ctr"/>
+          <a:lstStyle/>
+          <a:p>
+            <a:pPr algn="ctr"/>
+          </a:p>
+        </p:txBody>
+      </p:sp>
+      <p:sp>
+        <p:nvSpPr>
+          <p:cNvPr id="11" name="TextBox 10"/>
+          <p:cNvSpPr txBox="1"/>
+          <p:nvPr/>
+        </p:nvSpPr>
+        <p:spPr>
+          <a:xfrm>
+            <a:off x="4416551" y="1399031"/>
+            <a:ext cx="3328416" cy="1773936"/>
+          </a:xfrm>
+          <a:prstGeom prst="rect">
+            <a:avLst/>
+          </a:prstGeom>
+          <a:noFill/>
+        </p:spPr>
+        <p:txBody>
+          <a:bodyPr wrap="square" lIns="0" rIns="0" tIns="0" bIns="0">
+            <a:spAutoFit/>
+          </a:bodyPr>
+          <a:lstStyle/>
+          <a:p>
+            <a:r>
+              <a:rPr sz="1400" b="1" spc="100">
+                <a:solidFill>
+                  <a:srgbClr val="E58E1A"/>
+                </a:solidFill>
+                <a:latin typeface="Cambria"/>
+              </a:rPr>
+              <a:t>HOLDING</a:t>
+            </a:r>
+          </a:p>
+          <a:p>
+            <a:pPr>
+              <a:spcBef>
+                <a:spcPts val="400"/>
+              </a:spcBef>
+            </a:pPr>
+            <a:r>
+              <a:rPr sz="1300">
+                <a:solidFill>
+                  <a:srgbClr val="222A3F"/>
+                </a:solidFill>
+                <a:latin typeface="Cambria"/>
+              </a:rPr>
+              <a:t>When the car stops, the heading is held instead of spinning. When both cars are parked the screen says 'holding' instead of inventing a distance.</a:t>
+            </a:r>
+          </a:p>
+        </p:txBody>
+      </p:sp>
+      <p:sp>
+        <p:nvSpPr>
+          <p:cNvPr id="12" name="Rectangle 11"/>
+          <p:cNvSpPr/>
+          <p:nvPr/>
+        </p:nvSpPr>
+        <p:spPr>
+          <a:xfrm>
+            <a:off x="8001000" y="1280160"/>
+            <a:ext cx="3657600" cy="2011680"/>
+          </a:xfrm>
+          <a:prstGeom prst="rect">
+            <a:avLst/>
+          </a:prstGeom>
+          <a:solidFill>
+            <a:srgbClr val="F2F5FA"/>
+          </a:solidFill>
+          <a:ln w="15875">
+            <a:solidFill>
+              <a:srgbClr val="C43A4B"/>
+            </a:solidFill>
+          </a:ln>
+          <a:effectLst/>
+        </p:spPr>
+        <p:style>
+          <a:lnRef idx="1">
+            <a:schemeClr val="accent1"/>
+          </a:lnRef>
+          <a:fillRef idx="3">
+            <a:schemeClr val="accent1"/>
+          </a:fillRef>
+          <a:effectRef idx="2">
+            <a:schemeClr val="accent1"/>
+          </a:effectRef>
+          <a:fontRef idx="minor">
+            <a:schemeClr val="lt1"/>
+          </a:fontRef>
+        </p:style>
+        <p:txBody>
+          <a:bodyPr rtlCol="0" anchor="ctr"/>
+          <a:lstStyle/>
+          <a:p>
+            <a:pPr algn="ctr"/>
+          </a:p>
+        </p:txBody>
+      </p:sp>
+      <p:sp>
+        <p:nvSpPr>
+          <p:cNvPr id="13" name="TextBox 12"/>
+          <p:cNvSpPr txBox="1"/>
+          <p:nvPr/>
+        </p:nvSpPr>
+        <p:spPr>
+          <a:xfrm>
+            <a:off x="8165592" y="1399031"/>
+            <a:ext cx="3328416" cy="1773936"/>
+          </a:xfrm>
+          <a:prstGeom prst="rect">
+            <a:avLst/>
+          </a:prstGeom>
+          <a:noFill/>
+        </p:spPr>
+        <p:txBody>
+          <a:bodyPr wrap="square" lIns="0" rIns="0" tIns="0" bIns="0">
+            <a:spAutoFit/>
+          </a:bodyPr>
+          <a:lstStyle/>
+          <a:p>
+            <a:r>
+              <a:rPr sz="1400" b="1" spc="100">
+                <a:solidFill>
+                  <a:srgbClr val="C43A4B"/>
+                </a:solidFill>
+                <a:latin typeface="Cambria"/>
+              </a:rPr>
+              <a:t>LINK LOST</a:t>
+            </a:r>
+          </a:p>
+          <a:p>
+            <a:pPr>
+              <a:spcBef>
+                <a:spcPts val="400"/>
+              </a:spcBef>
+            </a:pPr>
+            <a:r>
+              <a:rPr sz="1300">
+                <a:solidFill>
+                  <a:srgbClr val="222A3F"/>
+                </a:solidFill>
+                <a:latin typeface="Cambria"/>
+              </a:rPr>
+              <a:t>If the display loses the radio, it says so in large letters. No silent failure.</a:t>
+            </a:r>
+          </a:p>
+        </p:txBody>
+      </p:sp>
+      <p:sp>
+        <p:nvSpPr>
+          <p:cNvPr id="14" name="Rectangle 13"/>
+          <p:cNvSpPr/>
+          <p:nvPr/>
+        </p:nvSpPr>
+        <p:spPr>
+          <a:xfrm>
+            <a:off x="502920" y="3520440"/>
+            <a:ext cx="11201400" cy="1371600"/>
+          </a:xfrm>
+          <a:prstGeom prst="rect">
+            <a:avLst/>
+          </a:prstGeom>
+          <a:solidFill>
+            <a:srgbClr val="F2F5FA"/>
+          </a:solidFill>
+          <a:ln w="15875">
+            <a:solidFill>
+              <a:srgbClr val="16213D"/>
+            </a:solidFill>
+          </a:ln>
+          <a:effectLst/>
+        </p:spPr>
+        <p:style>
+          <a:lnRef idx="1">
+            <a:schemeClr val="accent1"/>
+          </a:lnRef>
+          <a:fillRef idx="3">
+            <a:schemeClr val="accent1"/>
+          </a:fillRef>
+          <a:effectRef idx="2">
+            <a:schemeClr val="accent1"/>
+          </a:effectRef>
+          <a:fontRef idx="minor">
+            <a:schemeClr val="lt1"/>
+          </a:fontRef>
+        </p:style>
+        <p:txBody>
+          <a:bodyPr rtlCol="0" anchor="ctr"/>
+          <a:lstStyle/>
+          <a:p>
+            <a:pPr algn="ctr"/>
+          </a:p>
+        </p:txBody>
+      </p:sp>
+      <p:sp>
+        <p:nvSpPr>
+          <p:cNvPr id="15" name="TextBox 14"/>
+          <p:cNvSpPr txBox="1"/>
+          <p:nvPr/>
+        </p:nvSpPr>
+        <p:spPr>
+          <a:xfrm>
+            <a:off x="667512" y="3639312"/>
+            <a:ext cx="10872216" cy="1133856"/>
+          </a:xfrm>
+          <a:prstGeom prst="rect">
+            <a:avLst/>
+          </a:prstGeom>
+          <a:noFill/>
+        </p:spPr>
+        <p:txBody>
+          <a:bodyPr wrap="square" lIns="0" rIns="0" tIns="0" bIns="0">
+            <a:spAutoFit/>
+          </a:bodyPr>
+          <a:lstStyle/>
+          <a:p>
+            <a:r>
+              <a:rPr sz="1400" b="1" spc="100">
+                <a:solidFill>
+                  <a:srgbClr val="16213D"/>
+                </a:solidFill>
+                <a:latin typeface="Cambria"/>
+              </a:rPr>
+              <a:t>BENCH FINDING</a:t>
+            </a:r>
+          </a:p>
+          <a:p>
+            <a:pPr>
+              <a:spcBef>
+                <a:spcPts val="400"/>
+              </a:spcBef>
+            </a:pPr>
+            <a:r>
+              <a:rPr sz="1300">
+                <a:solidFill>
+                  <a:srgbClr val="222A3F"/>
+                </a:solidFill>
+                <a:latin typeface="Cambria"/>
+              </a:rPr>
+              <a:t>Two radios on one desk once showed 0.21 miles apart. The displays were right; the GPS fixes were wrong, because indoors the receivers scatter by 100 to 400 m. Rule for anyone testing: judge a distance only with a clear view of the sky.</a:t>
+            </a:r>
+          </a:p>
+        </p:txBody>
+      </p:sp>
+      <p:sp>
+        <p:nvSpPr>
+          <p:cNvPr id="16" name="TextBox 15"/>
+          <p:cNvSpPr txBox="1"/>
+          <p:nvPr/>
+        </p:nvSpPr>
+        <p:spPr>
+          <a:xfrm>
+            <a:off x="502920" y="5120640"/>
+            <a:ext cx="11155680" cy="548640"/>
+          </a:xfrm>
+          <a:prstGeom prst="rect">
+            <a:avLst/>
+          </a:prstGeom>
+          <a:noFill/>
+        </p:spPr>
+        <p:txBody>
+          <a:bodyPr wrap="square" lIns="0" rIns="0" tIns="0" bIns="0">
+            <a:spAutoFit/>
+          </a:bodyPr>
+          <a:lstStyle/>
+          <a:p>
+            <a:pPr algn="l"/>
+            <a:r>
+              <a:rPr sz="1200" b="0" i="1">
+                <a:solidFill>
+                  <a:srgbClr val="5E6B85"/>
+                </a:solidFill>
+                <a:latin typeface="Cambria"/>
+              </a:rPr>
+              <a:t>Both displays were flashed on 24 October; 13 of 13 firmware tests pass. The bench record behind the 0.21 mi observation is in the Technical Manual, Section 15.</a:t>
+            </a:r>
+          </a:p>
+        </p:txBody>
+      </p:sp>
+    </p:spTree>
+  </p:cSld>
+  <p:clrMapOvr>
+    <a:masterClrMapping/>
+  </p:clrMapOvr>
+</p:sld>
+</file>
+
+<file path=ppt/slides/slide8.xml><?xml version="1.0" encoding="utf-8"?>
+<p:sld xmlns:a="http://schemas.openxmlformats.org/drawingml/2006/main" xmlns:p="http://schemas.openxmlformats.org/presentationml/2006/main" xmlns:r="http://schemas.openxmlformats.org/officeDocument/2006/relationships">
+  <p:cSld>
+    <p:spTree>
+      <p:nvGrpSpPr>
+        <p:cNvPr id="1" name=""/>
+        <p:cNvGrpSpPr/>
+        <p:nvPr/>
+      </p:nvGrpSpPr>
+      <p:grpSpPr/>
+      <p:sp>
+        <p:nvSpPr>
+          <p:cNvPr id="2" name="Rectangle 1"/>
+          <p:cNvSpPr/>
+          <p:nvPr/>
+        </p:nvSpPr>
+        <p:spPr>
+          <a:xfrm>
+            <a:off x="164592" y="146304"/>
+            <a:ext cx="11859768" cy="6565392"/>
+          </a:xfrm>
+          <a:prstGeom prst="rect">
+            <a:avLst/>
+          </a:prstGeom>
+          <a:noFill/>
+          <a:ln w="22225">
+            <a:solidFill>
+              <a:srgbClr val="16213D"/>
+            </a:solidFill>
+          </a:ln>
+          <a:effectLst/>
+        </p:spPr>
+        <p:style>
+          <a:lnRef idx="1">
+            <a:schemeClr val="accent1"/>
+          </a:lnRef>
+          <a:fillRef idx="3">
+            <a:schemeClr val="accent1"/>
+          </a:fillRef>
+          <a:effectRef idx="2">
+            <a:schemeClr val="accent1"/>
+          </a:effectRef>
+          <a:fontRef idx="minor">
+            <a:schemeClr val="lt1"/>
+          </a:fontRef>
+        </p:style>
+        <p:txBody>
+          <a:bodyPr rtlCol="0" anchor="ctr"/>
+          <a:lstStyle/>
+          <a:p>
+            <a:pPr algn="ctr"/>
+          </a:p>
+        </p:txBody>
+      </p:sp>
+      <p:sp>
+        <p:nvSpPr>
+          <p:cNvPr id="3" name="Rectangle 2"/>
+          <p:cNvSpPr/>
+          <p:nvPr/>
+        </p:nvSpPr>
+        <p:spPr>
+          <a:xfrm>
+            <a:off x="164592" y="6272784"/>
+            <a:ext cx="11859768" cy="12700"/>
+          </a:xfrm>
+          <a:prstGeom prst="rect">
+            <a:avLst/>
+          </a:prstGeom>
+          <a:solidFill>
+            <a:srgbClr val="16213D"/>
+          </a:solidFill>
+          <a:ln>
+            <a:noFill/>
+          </a:ln>
+          <a:effectLst/>
+        </p:spPr>
+        <p:style>
+          <a:lnRef idx="1">
+            <a:schemeClr val="accent1"/>
+          </a:lnRef>
+          <a:fillRef idx="3">
+            <a:schemeClr val="accent1"/>
+          </a:fillRef>
+          <a:effectRef idx="2">
+            <a:schemeClr val="accent1"/>
+          </a:effectRef>
+          <a:fontRef idx="minor">
+            <a:schemeClr val="lt1"/>
+          </a:fontRef>
+        </p:style>
+        <p:txBody>
+          <a:bodyPr rtlCol="0" anchor="ctr"/>
+          <a:lstStyle/>
+          <a:p>
+            <a:pPr algn="ctr"/>
+          </a:p>
+        </p:txBody>
+      </p:sp>
+      <p:sp>
+        <p:nvSpPr>
+          <p:cNvPr id="4" name="TextBox 3"/>
+          <p:cNvSpPr txBox="1"/>
+          <p:nvPr/>
+        </p:nvSpPr>
+        <p:spPr>
+          <a:xfrm>
+            <a:off x="320040" y="6345936"/>
+            <a:ext cx="4206240" cy="292608"/>
+          </a:xfrm>
+          <a:prstGeom prst="rect">
+            <a:avLst/>
+          </a:prstGeom>
+          <a:noFill/>
+        </p:spPr>
+        <p:txBody>
+          <a:bodyPr wrap="square" lIns="0" rIns="0" tIns="0" bIns="0">
+            <a:spAutoFit/>
+          </a:bodyPr>
+          <a:lstStyle/>
+          <a:p>
+            <a:pPr algn="l"/>
+            <a:r>
+              <a:rPr sz="900" b="0" i="0">
+                <a:solidFill>
+                  <a:srgbClr val="5E6B85"/>
+                </a:solidFill>
+                <a:latin typeface="Courier New"/>
+              </a:rPr>
+              <a:t>GROUP 9  |  OFF-GRID VEHICLE TRACKER</a:t>
+            </a:r>
+          </a:p>
+        </p:txBody>
+      </p:sp>
+      <p:sp>
+        <p:nvSpPr>
+          <p:cNvPr id="5" name="TextBox 4"/>
+          <p:cNvSpPr txBox="1"/>
+          <p:nvPr/>
+        </p:nvSpPr>
+        <p:spPr>
+          <a:xfrm>
+            <a:off x="4572000" y="6345936"/>
+            <a:ext cx="4206240" cy="292608"/>
+          </a:xfrm>
+          <a:prstGeom prst="rect">
+            <a:avLst/>
+          </a:prstGeom>
+          <a:noFill/>
+        </p:spPr>
+        <p:txBody>
+          <a:bodyPr wrap="square" lIns="0" rIns="0" tIns="0" bIns="0">
+            <a:spAutoFit/>
+          </a:bodyPr>
+          <a:lstStyle/>
+          <a:p>
+            <a:pPr algn="ctr"/>
+            <a:r>
+              <a:rPr sz="900" b="0" i="0">
+                <a:solidFill>
+                  <a:srgbClr val="5E6B85"/>
+                </a:solidFill>
+                <a:latin typeface="Courier New"/>
+              </a:rPr>
+              <a:t>STATUS UPDATE</a:t>
+            </a:r>
+          </a:p>
+        </p:txBody>
+      </p:sp>
+      <p:sp>
+        <p:nvSpPr>
+          <p:cNvPr id="6" name="TextBox 5"/>
+          <p:cNvSpPr txBox="1"/>
+          <p:nvPr/>
+        </p:nvSpPr>
+        <p:spPr>
+          <a:xfrm>
+            <a:off x="8869680" y="6345936"/>
+            <a:ext cx="3017520" cy="292608"/>
+          </a:xfrm>
+          <a:prstGeom prst="rect">
+            <a:avLst/>
+          </a:prstGeom>
+          <a:noFill/>
+        </p:spPr>
+        <p:txBody>
+          <a:bodyPr wrap="square" lIns="0" rIns="0" tIns="0" bIns="0">
+            <a:spAutoFit/>
+          </a:bodyPr>
+          <a:lstStyle/>
+          <a:p>
+            <a:pPr algn="r"/>
+            <a:r>
+              <a:rPr sz="900" b="0" i="0">
+                <a:solidFill>
+                  <a:srgbClr val="5E6B85"/>
+                </a:solidFill>
+                <a:latin typeface="Courier New"/>
+              </a:rPr>
+              <a:t>SHEET 08/09  STATUS  2026-10-28</a:t>
+            </a:r>
+          </a:p>
+        </p:txBody>
+      </p:sp>
+      <p:sp>
+        <p:nvSpPr>
+          <p:cNvPr id="7" name="TextBox 6"/>
+          <p:cNvSpPr txBox="1"/>
+          <p:nvPr/>
+        </p:nvSpPr>
+        <p:spPr>
+          <a:xfrm>
+            <a:off x="457200" y="329184"/>
+            <a:ext cx="9052560" cy="566928"/>
+          </a:xfrm>
+          <a:prstGeom prst="rect">
+            <a:avLst/>
+          </a:prstGeom>
+          <a:noFill/>
+        </p:spPr>
+        <p:txBody>
+          <a:bodyPr wrap="square" lIns="0" rIns="0" tIns="0" bIns="0">
+            <a:spAutoFit/>
+          </a:bodyPr>
+          <a:lstStyle/>
+          <a:p>
+            <a:pPr algn="l"/>
+            <a:r>
+              <a:rPr sz="2300" b="1" i="0" spc="200">
+                <a:solidFill>
+                  <a:srgbClr val="16213D"/>
+                </a:solidFill>
+                <a:latin typeface="Cambria"/>
+              </a:rPr>
+              <a:t>DOCUMENTS AND REPOSITORY</a:t>
             </a:r>
           </a:p>
         </p:txBody>
@@ -9448,7 +10524,7 @@
         </p:nvGraphicFramePr>
         <p:xfrm>
           <a:off x="502920" y="1280160"/>
-          <a:ext cx="11155680" cy="3200400"/>
+          <a:ext cx="11155680" cy="3657600"/>
         </p:xfrm>
         <a:graphic>
           <a:graphicData uri="http://schemas.openxmlformats.org/drawingml/2006/table">
@@ -9457,19 +10533,728 @@
                 <a:tableStyleId>{5C22544A-7EE6-4342-B048-85BDC9FD1C3A}</a:tableStyleId>
               </a:tblPr>
               <a:tblGrid>
-                <a:gridCol w="1645920"/>
-                <a:gridCol w="4572000"/>
-                <a:gridCol w="3291840"/>
-                <a:gridCol w="1645920"/>
+                <a:gridCol w="2103120"/>
+                <a:gridCol w="5029200"/>
+                <a:gridCol w="4023360"/>
               </a:tblGrid>
-              <a:tr h="640080">
+              <a:tr h="731520">
                 <a:tc>
                   <a:txBody>
                     <a:bodyPr/>
                     <a:lstStyle/>
                     <a:p>
                       <a:r>
-                        <a:rPr sz="1150" b="1">
+                        <a:rPr sz="1250" b="1">
+                          <a:solidFill>
+                            <a:srgbClr val="FFFFFF"/>
+                          </a:solidFill>
+                          <a:latin typeface="Cambria"/>
+                        </a:rPr>
+                        <a:t>Document</a:t>
+                      </a:r>
+                    </a:p>
+                  </a:txBody>
+                  <a:tcPr marL="73152" marR="73152" marT="27432" marB="27432">
+                    <a:solidFill>
+                      <a:srgbClr val="16213D"/>
+                    </a:solidFill>
+                  </a:tcPr>
+                </a:tc>
+                <a:tc>
+                  <a:txBody>
+                    <a:bodyPr/>
+                    <a:lstStyle/>
+                    <a:p>
+                      <a:r>
+                        <a:rPr sz="1250" b="1">
+                          <a:solidFill>
+                            <a:srgbClr val="FFFFFF"/>
+                          </a:solidFill>
+                          <a:latin typeface="Cambria"/>
+                        </a:rPr>
+                        <a:t>What is new</a:t>
+                      </a:r>
+                    </a:p>
+                  </a:txBody>
+                  <a:tcPr marL="73152" marR="73152" marT="27432" marB="27432">
+                    <a:solidFill>
+                      <a:srgbClr val="16213D"/>
+                    </a:solidFill>
+                  </a:tcPr>
+                </a:tc>
+                <a:tc>
+                  <a:txBody>
+                    <a:bodyPr/>
+                    <a:lstStyle/>
+                    <a:p>
+                      <a:r>
+                        <a:rPr sz="1250" b="1">
+                          <a:solidFill>
+                            <a:srgbClr val="FFFFFF"/>
+                          </a:solidFill>
+                          <a:latin typeface="Cambria"/>
+                        </a:rPr>
+                        <a:t>Where</a:t>
+                      </a:r>
+                    </a:p>
+                  </a:txBody>
+                  <a:tcPr marL="73152" marR="73152" marT="27432" marB="27432">
+                    <a:solidFill>
+                      <a:srgbClr val="16213D"/>
+                    </a:solidFill>
+                  </a:tcPr>
+                </a:tc>
+              </a:tr>
+              <a:tr h="731520">
+                <a:tc>
+                  <a:txBody>
+                    <a:bodyPr/>
+                    <a:lstStyle/>
+                    <a:p>
+                      <a:r>
+                        <a:rPr sz="1250" b="0">
+                          <a:solidFill>
+                            <a:srgbClr val="222A3F"/>
+                          </a:solidFill>
+                          <a:latin typeface="Cambria"/>
+                        </a:rPr>
+                        <a:t>Device User Guide</a:t>
+                      </a:r>
+                    </a:p>
+                  </a:txBody>
+                  <a:tcPr marL="73152" marR="73152" marT="27432" marB="27432">
+                    <a:solidFill>
+                      <a:srgbClr val="F2F5FA"/>
+                    </a:solidFill>
+                  </a:tcPr>
+                </a:tc>
+                <a:tc>
+                  <a:txBody>
+                    <a:bodyPr/>
+                    <a:lstStyle/>
+                    <a:p>
+                      <a:r>
+                        <a:rPr sz="1250" b="0">
+                          <a:solidFill>
+                            <a:srgbClr val="222A3F"/>
+                          </a:solidFill>
+                          <a:latin typeface="Cambria"/>
+                        </a:rPr>
+                        <a:t>Section 12: restoring a radio that forgot its settings, with a phone and with a laptop</a:t>
+                      </a:r>
+                    </a:p>
+                  </a:txBody>
+                  <a:tcPr marL="73152" marR="73152" marT="27432" marB="27432">
+                    <a:solidFill>
+                      <a:srgbClr val="F2F5FA"/>
+                    </a:solidFill>
+                  </a:tcPr>
+                </a:tc>
+                <a:tc>
+                  <a:txBody>
+                    <a:bodyPr/>
+                    <a:lstStyle/>
+                    <a:p>
+                      <a:r>
+                        <a:rPr sz="1250" b="0">
+                          <a:solidFill>
+                            <a:srgbClr val="222A3F"/>
+                          </a:solidFill>
+                          <a:latin typeface="Cambria"/>
+                        </a:rPr>
+                        <a:t>docs/manuals/DEVICE_USER_GUIDE.pdf, 16 pages</a:t>
+                      </a:r>
+                    </a:p>
+                  </a:txBody>
+                  <a:tcPr marL="73152" marR="73152" marT="27432" marB="27432">
+                    <a:solidFill>
+                      <a:srgbClr val="F2F5FA"/>
+                    </a:solidFill>
+                  </a:tcPr>
+                </a:tc>
+              </a:tr>
+              <a:tr h="731520">
+                <a:tc>
+                  <a:txBody>
+                    <a:bodyPr/>
+                    <a:lstStyle/>
+                    <a:p>
+                      <a:r>
+                        <a:rPr sz="1250" b="0">
+                          <a:solidFill>
+                            <a:srgbClr val="222A3F"/>
+                          </a:solidFill>
+                          <a:latin typeface="Cambria"/>
+                        </a:rPr>
+                        <a:t>Technical Manual</a:t>
+                      </a:r>
+                    </a:p>
+                  </a:txBody>
+                  <a:tcPr marL="73152" marR="73152" marT="27432" marB="27432">
+                    <a:solidFill>
+                      <a:srgbClr val="FFFFFF"/>
+                    </a:solidFill>
+                  </a:tcPr>
+                </a:tc>
+                <a:tc>
+                  <a:txBody>
+                    <a:bodyPr/>
+                    <a:lstStyle/>
+                    <a:p>
+                      <a:r>
+                        <a:rPr sz="1250" b="0">
+                          <a:solidFill>
+                            <a:srgbClr val="222A3F"/>
+                          </a:solidFill>
+                          <a:latin typeface="Cambria"/>
+                        </a:rPr>
+                        <a:t>Sections 15 and 16: the verification record and the failure catalog, updated through 28 October</a:t>
+                      </a:r>
+                    </a:p>
+                  </a:txBody>
+                  <a:tcPr marL="73152" marR="73152" marT="27432" marB="27432">
+                    <a:solidFill>
+                      <a:srgbClr val="FFFFFF"/>
+                    </a:solidFill>
+                  </a:tcPr>
+                </a:tc>
+                <a:tc>
+                  <a:txBody>
+                    <a:bodyPr/>
+                    <a:lstStyle/>
+                    <a:p>
+                      <a:r>
+                        <a:rPr sz="1250" b="0">
+                          <a:solidFill>
+                            <a:srgbClr val="222A3F"/>
+                          </a:solidFill>
+                          <a:latin typeface="Cambria"/>
+                        </a:rPr>
+                        <a:t>docs/manuals/TECHNICAL_MANUAL.pdf, 62 pages</a:t>
+                      </a:r>
+                    </a:p>
+                  </a:txBody>
+                  <a:tcPr marL="73152" marR="73152" marT="27432" marB="27432">
+                    <a:solidFill>
+                      <a:srgbClr val="FFFFFF"/>
+                    </a:solidFill>
+                  </a:tcPr>
+                </a:tc>
+              </a:tr>
+              <a:tr h="731520">
+                <a:tc>
+                  <a:txBody>
+                    <a:bodyPr/>
+                    <a:lstStyle/>
+                    <a:p>
+                      <a:r>
+                        <a:rPr sz="1250" b="0">
+                          <a:solidFill>
+                            <a:srgbClr val="222A3F"/>
+                          </a:solidFill>
+                          <a:latin typeface="Cambria"/>
+                        </a:rPr>
+                        <a:t>Root-cause presentation</a:t>
+                      </a:r>
+                    </a:p>
+                  </a:txBody>
+                  <a:tcPr marL="73152" marR="73152" marT="27432" marB="27432">
+                    <a:solidFill>
+                      <a:srgbClr val="F2F5FA"/>
+                    </a:solidFill>
+                  </a:tcPr>
+                </a:tc>
+                <a:tc>
+                  <a:txBody>
+                    <a:bodyPr/>
+                    <a:lstStyle/>
+                    <a:p>
+                      <a:r>
+                        <a:rPr sz="1250" b="0">
+                          <a:solidFill>
+                            <a:srgbClr val="222A3F"/>
+                          </a:solidFill>
+                          <a:latin typeface="Cambria"/>
+                        </a:rPr>
+                        <a:t>Tests, failures and the memory investigation, 20 sheets</a:t>
+                      </a:r>
+                    </a:p>
+                  </a:txBody>
+                  <a:tcPr marL="73152" marR="73152" marT="27432" marB="27432">
+                    <a:solidFill>
+                      <a:srgbClr val="F2F5FA"/>
+                    </a:solidFill>
+                  </a:tcPr>
+                </a:tc>
+                <a:tc>
+                  <a:txBody>
+                    <a:bodyPr/>
+                    <a:lstStyle/>
+                    <a:p>
+                      <a:r>
+                        <a:rPr sz="1250" b="0">
+                          <a:solidFill>
+                            <a:srgbClr val="222A3F"/>
+                          </a:solidFill>
+                          <a:latin typeface="Cambria"/>
+                        </a:rPr>
+                        <a:t>docs/presentations/Group9_Presentation.pptx</a:t>
+                      </a:r>
+                    </a:p>
+                  </a:txBody>
+                  <a:tcPr marL="73152" marR="73152" marT="27432" marB="27432">
+                    <a:solidFill>
+                      <a:srgbClr val="F2F5FA"/>
+                    </a:solidFill>
+                  </a:tcPr>
+                </a:tc>
+              </a:tr>
+              <a:tr h="731520">
+                <a:tc>
+                  <a:txBody>
+                    <a:bodyPr/>
+                    <a:lstStyle/>
+                    <a:p>
+                      <a:r>
+                        <a:rPr sz="1250" b="0">
+                          <a:solidFill>
+                            <a:srgbClr val="222A3F"/>
+                          </a:solidFill>
+                          <a:latin typeface="Cambria"/>
+                        </a:rPr>
+                        <a:t>Measurement records</a:t>
+                      </a:r>
+                    </a:p>
+                  </a:txBody>
+                  <a:tcPr marL="73152" marR="73152" marT="27432" marB="27432">
+                    <a:solidFill>
+                      <a:srgbClr val="FFFFFF"/>
+                    </a:solidFill>
+                  </a:tcPr>
+                </a:tc>
+                <a:tc>
+                  <a:txBody>
+                    <a:bodyPr/>
+                    <a:lstStyle/>
+                    <a:p>
+                      <a:r>
+                        <a:rPr sz="1250" b="0">
+                          <a:solidFill>
+                            <a:srgbClr val="222A3F"/>
+                          </a:solidFill>
+                          <a:latin typeface="Cambria"/>
+                        </a:rPr>
+                        <a:t>Every flash read and test from 27 October, reproducible</a:t>
+                      </a:r>
+                    </a:p>
+                  </a:txBody>
+                  <a:tcPr marL="73152" marR="73152" marT="27432" marB="27432">
+                    <a:solidFill>
+                      <a:srgbClr val="FFFFFF"/>
+                    </a:solidFill>
+                  </a:tcPr>
+                </a:tc>
+                <a:tc>
+                  <a:txBody>
+                    <a:bodyPr/>
+                    <a:lstStyle/>
+                    <a:p>
+                      <a:r>
+                        <a:rPr sz="1250" b="0">
+                          <a:solidFill>
+                            <a:srgbClr val="222A3F"/>
+                          </a:solidFill>
+                          <a:latin typeface="Cambria"/>
+                        </a:rPr>
+                        <a:t>docs/src/flash_forensics</a:t>
+                      </a:r>
+                    </a:p>
+                  </a:txBody>
+                  <a:tcPr marL="73152" marR="73152" marT="27432" marB="27432">
+                    <a:solidFill>
+                      <a:srgbClr val="FFFFFF"/>
+                    </a:solidFill>
+                  </a:tcPr>
+                </a:tc>
+              </a:tr>
+            </a:tbl>
+          </a:graphicData>
+        </a:graphic>
+      </p:graphicFrame>
+      <p:sp>
+        <p:nvSpPr>
+          <p:cNvPr id="9" name="Rectangle 8"/>
+          <p:cNvSpPr/>
+          <p:nvPr/>
+        </p:nvSpPr>
+        <p:spPr>
+          <a:xfrm>
+            <a:off x="502920" y="5120640"/>
+            <a:ext cx="11155680" cy="868680"/>
+          </a:xfrm>
+          <a:prstGeom prst="rect">
+            <a:avLst/>
+          </a:prstGeom>
+          <a:solidFill>
+            <a:srgbClr val="F2F5FA"/>
+          </a:solidFill>
+          <a:ln w="15875">
+            <a:solidFill>
+              <a:srgbClr val="5E6B85"/>
+            </a:solidFill>
+          </a:ln>
+          <a:effectLst/>
+        </p:spPr>
+        <p:style>
+          <a:lnRef idx="1">
+            <a:schemeClr val="accent1"/>
+          </a:lnRef>
+          <a:fillRef idx="3">
+            <a:schemeClr val="accent1"/>
+          </a:fillRef>
+          <a:effectRef idx="2">
+            <a:schemeClr val="accent1"/>
+          </a:effectRef>
+          <a:fontRef idx="minor">
+            <a:schemeClr val="lt1"/>
+          </a:fontRef>
+        </p:style>
+        <p:txBody>
+          <a:bodyPr rtlCol="0" anchor="ctr"/>
+          <a:lstStyle/>
+          <a:p>
+            <a:pPr algn="ctr"/>
+          </a:p>
+        </p:txBody>
+      </p:sp>
+      <p:sp>
+        <p:nvSpPr>
+          <p:cNvPr id="10" name="TextBox 9"/>
+          <p:cNvSpPr txBox="1"/>
+          <p:nvPr/>
+        </p:nvSpPr>
+        <p:spPr>
+          <a:xfrm>
+            <a:off x="667512" y="5239512"/>
+            <a:ext cx="10826496" cy="630936"/>
+          </a:xfrm>
+          <a:prstGeom prst="rect">
+            <a:avLst/>
+          </a:prstGeom>
+          <a:noFill/>
+        </p:spPr>
+        <p:txBody>
+          <a:bodyPr wrap="square" lIns="0" rIns="0" tIns="0" bIns="0">
+            <a:spAutoFit/>
+          </a:bodyPr>
+          <a:lstStyle/>
+          <a:p>
+            <a:r>
+              <a:rPr sz="1300" b="1" spc="100">
+                <a:solidFill>
+                  <a:srgbClr val="5E6B85"/>
+                </a:solidFill>
+                <a:latin typeface="Cambria"/>
+              </a:rPr>
+              <a:t>PRIVATE</a:t>
+            </a:r>
+          </a:p>
+          <a:p>
+            <a:pPr>
+              <a:spcBef>
+                <a:spcPts val="400"/>
+              </a:spcBef>
+            </a:pPr>
+            <a:r>
+              <a:rPr sz="1250">
+                <a:solidFill>
+                  <a:srgbClr val="222A3F"/>
+                </a:solidFill>
+                <a:latin typeface="Cambria"/>
+              </a:rPr>
+              <a:t>The channel key, the radio configuration snapshots and the fixed firmware images stay in the private repository only.</a:t>
+            </a:r>
+          </a:p>
+        </p:txBody>
+      </p:sp>
+    </p:spTree>
+  </p:cSld>
+  <p:clrMapOvr>
+    <a:masterClrMapping/>
+  </p:clrMapOvr>
+</p:sld>
+</file>
+
+<file path=ppt/slides/slide9.xml><?xml version="1.0" encoding="utf-8"?>
+<p:sld xmlns:a="http://schemas.openxmlformats.org/drawingml/2006/main" xmlns:p="http://schemas.openxmlformats.org/presentationml/2006/main" xmlns:r="http://schemas.openxmlformats.org/officeDocument/2006/relationships">
+  <p:cSld>
+    <p:spTree>
+      <p:nvGrpSpPr>
+        <p:cNvPr id="1" name=""/>
+        <p:cNvGrpSpPr/>
+        <p:nvPr/>
+      </p:nvGrpSpPr>
+      <p:grpSpPr/>
+      <p:sp>
+        <p:nvSpPr>
+          <p:cNvPr id="2" name="Rectangle 1"/>
+          <p:cNvSpPr/>
+          <p:nvPr/>
+        </p:nvSpPr>
+        <p:spPr>
+          <a:xfrm>
+            <a:off x="164592" y="146304"/>
+            <a:ext cx="11859768" cy="6565392"/>
+          </a:xfrm>
+          <a:prstGeom prst="rect">
+            <a:avLst/>
+          </a:prstGeom>
+          <a:noFill/>
+          <a:ln w="22225">
+            <a:solidFill>
+              <a:srgbClr val="16213D"/>
+            </a:solidFill>
+          </a:ln>
+          <a:effectLst/>
+        </p:spPr>
+        <p:style>
+          <a:lnRef idx="1">
+            <a:schemeClr val="accent1"/>
+          </a:lnRef>
+          <a:fillRef idx="3">
+            <a:schemeClr val="accent1"/>
+          </a:fillRef>
+          <a:effectRef idx="2">
+            <a:schemeClr val="accent1"/>
+          </a:effectRef>
+          <a:fontRef idx="minor">
+            <a:schemeClr val="lt1"/>
+          </a:fontRef>
+        </p:style>
+        <p:txBody>
+          <a:bodyPr rtlCol="0" anchor="ctr"/>
+          <a:lstStyle/>
+          <a:p>
+            <a:pPr algn="ctr"/>
+          </a:p>
+        </p:txBody>
+      </p:sp>
+      <p:sp>
+        <p:nvSpPr>
+          <p:cNvPr id="3" name="Rectangle 2"/>
+          <p:cNvSpPr/>
+          <p:nvPr/>
+        </p:nvSpPr>
+        <p:spPr>
+          <a:xfrm>
+            <a:off x="164592" y="6272784"/>
+            <a:ext cx="11859768" cy="12700"/>
+          </a:xfrm>
+          <a:prstGeom prst="rect">
+            <a:avLst/>
+          </a:prstGeom>
+          <a:solidFill>
+            <a:srgbClr val="16213D"/>
+          </a:solidFill>
+          <a:ln>
+            <a:noFill/>
+          </a:ln>
+          <a:effectLst/>
+        </p:spPr>
+        <p:style>
+          <a:lnRef idx="1">
+            <a:schemeClr val="accent1"/>
+          </a:lnRef>
+          <a:fillRef idx="3">
+            <a:schemeClr val="accent1"/>
+          </a:fillRef>
+          <a:effectRef idx="2">
+            <a:schemeClr val="accent1"/>
+          </a:effectRef>
+          <a:fontRef idx="minor">
+            <a:schemeClr val="lt1"/>
+          </a:fontRef>
+        </p:style>
+        <p:txBody>
+          <a:bodyPr rtlCol="0" anchor="ctr"/>
+          <a:lstStyle/>
+          <a:p>
+            <a:pPr algn="ctr"/>
+          </a:p>
+        </p:txBody>
+      </p:sp>
+      <p:sp>
+        <p:nvSpPr>
+          <p:cNvPr id="4" name="TextBox 3"/>
+          <p:cNvSpPr txBox="1"/>
+          <p:nvPr/>
+        </p:nvSpPr>
+        <p:spPr>
+          <a:xfrm>
+            <a:off x="320040" y="6345936"/>
+            <a:ext cx="4206240" cy="292608"/>
+          </a:xfrm>
+          <a:prstGeom prst="rect">
+            <a:avLst/>
+          </a:prstGeom>
+          <a:noFill/>
+        </p:spPr>
+        <p:txBody>
+          <a:bodyPr wrap="square" lIns="0" rIns="0" tIns="0" bIns="0">
+            <a:spAutoFit/>
+          </a:bodyPr>
+          <a:lstStyle/>
+          <a:p>
+            <a:pPr algn="l"/>
+            <a:r>
+              <a:rPr sz="900" b="0" i="0">
+                <a:solidFill>
+                  <a:srgbClr val="5E6B85"/>
+                </a:solidFill>
+                <a:latin typeface="Courier New"/>
+              </a:rPr>
+              <a:t>GROUP 9  |  OFF-GRID VEHICLE TRACKER</a:t>
+            </a:r>
+          </a:p>
+        </p:txBody>
+      </p:sp>
+      <p:sp>
+        <p:nvSpPr>
+          <p:cNvPr id="5" name="TextBox 4"/>
+          <p:cNvSpPr txBox="1"/>
+          <p:nvPr/>
+        </p:nvSpPr>
+        <p:spPr>
+          <a:xfrm>
+            <a:off x="4572000" y="6345936"/>
+            <a:ext cx="4206240" cy="292608"/>
+          </a:xfrm>
+          <a:prstGeom prst="rect">
+            <a:avLst/>
+          </a:prstGeom>
+          <a:noFill/>
+        </p:spPr>
+        <p:txBody>
+          <a:bodyPr wrap="square" lIns="0" rIns="0" tIns="0" bIns="0">
+            <a:spAutoFit/>
+          </a:bodyPr>
+          <a:lstStyle/>
+          <a:p>
+            <a:pPr algn="ctr"/>
+            <a:r>
+              <a:rPr sz="900" b="0" i="0">
+                <a:solidFill>
+                  <a:srgbClr val="5E6B85"/>
+                </a:solidFill>
+                <a:latin typeface="Courier New"/>
+              </a:rPr>
+              <a:t>STATUS UPDATE</a:t>
+            </a:r>
+          </a:p>
+        </p:txBody>
+      </p:sp>
+      <p:sp>
+        <p:nvSpPr>
+          <p:cNvPr id="6" name="TextBox 5"/>
+          <p:cNvSpPr txBox="1"/>
+          <p:nvPr/>
+        </p:nvSpPr>
+        <p:spPr>
+          <a:xfrm>
+            <a:off x="8869680" y="6345936"/>
+            <a:ext cx="3017520" cy="292608"/>
+          </a:xfrm>
+          <a:prstGeom prst="rect">
+            <a:avLst/>
+          </a:prstGeom>
+          <a:noFill/>
+        </p:spPr>
+        <p:txBody>
+          <a:bodyPr wrap="square" lIns="0" rIns="0" tIns="0" bIns="0">
+            <a:spAutoFit/>
+          </a:bodyPr>
+          <a:lstStyle/>
+          <a:p>
+            <a:pPr algn="r"/>
+            <a:r>
+              <a:rPr sz="900" b="0" i="0">
+                <a:solidFill>
+                  <a:srgbClr val="5E6B85"/>
+                </a:solidFill>
+                <a:latin typeface="Courier New"/>
+              </a:rPr>
+              <a:t>SHEET 09/09  STATUS  2026-10-28</a:t>
+            </a:r>
+          </a:p>
+        </p:txBody>
+      </p:sp>
+      <p:sp>
+        <p:nvSpPr>
+          <p:cNvPr id="7" name="TextBox 6"/>
+          <p:cNvSpPr txBox="1"/>
+          <p:nvPr/>
+        </p:nvSpPr>
+        <p:spPr>
+          <a:xfrm>
+            <a:off x="457200" y="329184"/>
+            <a:ext cx="9052560" cy="566928"/>
+          </a:xfrm>
+          <a:prstGeom prst="rect">
+            <a:avLst/>
+          </a:prstGeom>
+          <a:noFill/>
+        </p:spPr>
+        <p:txBody>
+          <a:bodyPr wrap="square" lIns="0" rIns="0" tIns="0" bIns="0">
+            <a:spAutoFit/>
+          </a:bodyPr>
+          <a:lstStyle/>
+          <a:p>
+            <a:pPr algn="l"/>
+            <a:r>
+              <a:rPr sz="2300" b="1" i="0" spc="200">
+                <a:solidFill>
+                  <a:srgbClr val="16213D"/>
+                </a:solidFill>
+                <a:latin typeface="Cambria"/>
+              </a:rPr>
+              <a:t>NEXT</a:t>
+            </a:r>
+          </a:p>
+        </p:txBody>
+      </p:sp>
+      <p:graphicFrame>
+        <p:nvGraphicFramePr>
+          <p:cNvPr id="8" name="Table 7"/>
+          <p:cNvGraphicFramePr>
+            <a:graphicFrameLocks noGrp="1"/>
+          </p:cNvGraphicFramePr>
+          <p:nvPr/>
+        </p:nvGraphicFramePr>
+        <p:xfrm>
+          <a:off x="502920" y="1280160"/>
+          <a:ext cx="11155680" cy="3657600"/>
+        </p:xfrm>
+        <a:graphic>
+          <a:graphicData uri="http://schemas.openxmlformats.org/drawingml/2006/table">
+            <a:tbl>
+              <a:tblPr firstRow="1" bandRow="1">
+                <a:tableStyleId>{5C22544A-7EE6-4342-B048-85BDC9FD1C3A}</a:tableStyleId>
+              </a:tblPr>
+              <a:tblGrid>
+                <a:gridCol w="1737360"/>
+                <a:gridCol w="5029200"/>
+                <a:gridCol w="2560320"/>
+                <a:gridCol w="1828800"/>
+              </a:tblGrid>
+              <a:tr h="731520">
+                <a:tc>
+                  <a:txBody>
+                    <a:bodyPr/>
+                    <a:lstStyle/>
+                    <a:p>
+                      <a:r>
+                        <a:rPr sz="1250" b="1">
                           <a:solidFill>
                             <a:srgbClr val="FFFFFF"/>
                           </a:solidFill>
@@ -9491,7 +11276,7 @@
                     <a:lstStyle/>
                     <a:p>
                       <a:r>
-                        <a:rPr sz="1150" b="1">
+                        <a:rPr sz="1250" b="1">
                           <a:solidFill>
                             <a:srgbClr val="FFFFFF"/>
                           </a:solidFill>
@@ -9513,13 +11298,13 @@
                     <a:lstStyle/>
                     <a:p>
                       <a:r>
-                        <a:rPr sz="1150" b="1">
+                        <a:rPr sz="1250" b="1">
                           <a:solidFill>
                             <a:srgbClr val="FFFFFF"/>
                           </a:solidFill>
                           <a:latin typeface="Cambria"/>
                         </a:rPr>
-                        <a:t>Pass criterion</a:t>
+                        <a:t>Done when</a:t>
                       </a:r>
                     </a:p>
                   </a:txBody>
@@ -9535,7 +11320,7 @@
                     <a:lstStyle/>
                     <a:p>
                       <a:r>
-                        <a:rPr sz="1150" b="1">
+                        <a:rPr sz="1250" b="1">
                           <a:solidFill>
                             <a:srgbClr val="FFFFFF"/>
                           </a:solidFill>
@@ -9552,14 +11337,14 @@
                   </a:tcPr>
                 </a:tc>
               </a:tr>
-              <a:tr h="640080">
+              <a:tr h="731520">
                 <a:tc>
                   <a:txBody>
                     <a:bodyPr/>
                     <a:lstStyle/>
                     <a:p>
                       <a:r>
-                        <a:rPr sz="1150" b="0">
+                        <a:rPr sz="1250" b="0">
                           <a:solidFill>
                             <a:srgbClr val="222A3F"/>
                           </a:solidFill>
@@ -9581,13 +11366,13 @@
                     <a:lstStyle/>
                     <a:p>
                       <a:r>
-                        <a:rPr sz="1150" b="0">
+                        <a:rPr sz="1250" b="0">
                           <a:solidFill>
                             <a:srgbClr val="222A3F"/>
                           </a:solidFill>
                           <a:latin typeface="Cambria"/>
                         </a:rPr>
-                        <a:t>New Mexico maximum-range drive, rescheduled</a:t>
+                        <a:t>Roof-top antenna range drive, rescheduled (sheet 4)</a:t>
                       </a:r>
                     </a:p>
                   </a:txBody>
@@ -9603,13 +11388,13 @@
                     <a:lstStyle/>
                     <a:p>
                       <a:r>
-                        <a:rPr sz="1150" b="0">
+                        <a:rPr sz="1250" b="0">
                           <a:solidFill>
                             <a:srgbClr val="222A3F"/>
                           </a:solidFill>
                           <a:latin typeface="Cambria"/>
                         </a:rPr>
-                        <a:t>Last packet distance logged; LINK LOST behaviour on the road</a:t>
+                        <a:t>Last-packet distance recorded</a:t>
                       </a:r>
                     </a:p>
                   </a:txBody>
@@ -9625,7 +11410,7 @@
                     <a:lstStyle/>
                     <a:p>
                       <a:r>
-                        <a:rPr sz="1150" b="0">
+                        <a:rPr sz="1250" b="0">
                           <a:solidFill>
                             <a:srgbClr val="222A3F"/>
                           </a:solidFill>
@@ -9642,14 +11427,14 @@
                   </a:tcPr>
                 </a:tc>
               </a:tr>
-              <a:tr h="640080">
+              <a:tr h="731520">
                 <a:tc>
                   <a:txBody>
                     <a:bodyPr/>
                     <a:lstStyle/>
                     <a:p>
                       <a:r>
-                        <a:rPr sz="1150" b="0">
+                        <a:rPr sz="1250" b="0">
                           <a:solidFill>
                             <a:srgbClr val="222A3F"/>
                           </a:solidFill>
@@ -9671,13 +11456,13 @@
                     <a:lstStyle/>
                     <a:p>
                       <a:r>
-                        <a:rPr sz="1150" b="0">
+                        <a:rPr sz="1250" b="0">
                           <a:solidFill>
                             <a:srgbClr val="222A3F"/>
                           </a:solidFill>
                           <a:latin typeface="Cambria"/>
                         </a:rPr>
-                        <a:t>Flat-battery campaign: five full discharges per radio, config and flash map read after each</a:t>
+                        <a:t>Flat-battery test: run each radio flat five times, check settings and memory after each</a:t>
                       </a:r>
                     </a:p>
                   </a:txBody>
@@ -9693,13 +11478,13 @@
                     <a:lstStyle/>
                     <a:p>
                       <a:r>
-                        <a:rPr sz="1150" b="0">
+                        <a:rPr sz="1250" b="0">
                           <a:solidFill>
                             <a:srgbClr val="222A3F"/>
                           </a:solidFill>
                           <a:latin typeface="Cambria"/>
                         </a:rPr>
-                        <a:t>0 of 10 cycles lose configuration; no new unstable sectors</a:t>
+                        <a:t>0 of 10 runs lose settings</a:t>
                       </a:r>
                     </a:p>
                   </a:txBody>
@@ -9715,7 +11500,7 @@
                     <a:lstStyle/>
                     <a:p>
                       <a:r>
-                        <a:rPr sz="1150" b="0">
+                        <a:rPr sz="1250" b="0">
                           <a:solidFill>
                             <a:srgbClr val="222A3F"/>
                           </a:solidFill>
@@ -9732,20 +11517,20 @@
                   </a:tcPr>
                 </a:tc>
               </a:tr>
-              <a:tr h="640080">
+              <a:tr h="731520">
                 <a:tc>
                   <a:txBody>
                     <a:bodyPr/>
                     <a:lstStyle/>
                     <a:p>
                       <a:r>
-                        <a:rPr sz="1150" b="0">
+                        <a:rPr sz="1250" b="0">
                           <a:solidFill>
                             <a:srgbClr val="222A3F"/>
                           </a:solidFill>
                           <a:latin typeface="Cambria"/>
                         </a:rPr>
-                        <a:t>This week</a:t>
+                        <a:t>Next week</a:t>
                       </a:r>
                     </a:p>
                   </a:txBody>
@@ -9761,13 +11546,13 @@
                     <a:lstStyle/>
                     <a:p>
                       <a:r>
-                        <a:rPr sz="1150" b="0">
+                        <a:rPr sz="1250" b="0">
                           <a:solidFill>
                             <a:srgbClr val="222A3F"/>
                           </a:solidFill>
                           <a:latin typeface="Cambria"/>
                         </a:rPr>
-                        <a:t>Oscilloscope on the 3V3 pin during a transmit burst at a 3.4 V cell</a:t>
+                        <a:t>Enclosure for the Waveshare LCD display</a:t>
                       </a:r>
                     </a:p>
                   </a:txBody>
@@ -9783,13 +11568,13 @@
                     <a:lstStyle/>
                     <a:p>
                       <a:r>
-                        <a:rPr sz="1150" b="0">
+                        <a:rPr sz="1250" b="0">
                           <a:solidFill>
                             <a:srgbClr val="222A3F"/>
                           </a:solidFill>
                           <a:latin typeface="Cambria"/>
                         </a:rPr>
-                        <a:t>Minimum rail voltage recorded</a:t>
+                        <a:t>Waterproof</a:t>
                       </a:r>
                     </a:p>
                   </a:txBody>
@@ -9805,13 +11590,13 @@
                     <a:lstStyle/>
                     <a:p>
                       <a:r>
-                        <a:rPr sz="1150" b="0">
+                        <a:rPr sz="1250" b="0">
                           <a:solidFill>
                             <a:srgbClr val="222A3F"/>
                           </a:solidFill>
                           <a:latin typeface="Cambria"/>
                         </a:rPr>
-                        <a:t>Victor</a:t>
+                        <a:t>Josiah</a:t>
                       </a:r>
                     </a:p>
                   </a:txBody>
@@ -9822,20 +11607,20 @@
                   </a:tcPr>
                 </a:tc>
               </a:tr>
-              <a:tr h="640080">
+              <a:tr h="731520">
                 <a:tc>
                   <a:txBody>
                     <a:bodyPr/>
                     <a:lstStyle/>
                     <a:p>
                       <a:r>
-                        <a:rPr sz="1150" b="0">
+                        <a:rPr sz="1250" b="0">
                           <a:solidFill>
                             <a:srgbClr val="222A3F"/>
                           </a:solidFill>
                           <a:latin typeface="Cambria"/>
                         </a:rPr>
-                        <a:t>4 November</a:t>
+                        <a:t>This week</a:t>
                       </a:r>
                     </a:p>
                   </a:txBody>
@@ -9851,13 +11636,13 @@
                     <a:lstStyle/>
                     <a:p>
                       <a:r>
-                        <a:rPr sz="1150" b="0">
+                        <a:rPr sz="1250" b="0">
                           <a:solidFill>
                             <a:srgbClr val="222A3F"/>
                           </a:solidFill>
                           <a:latin typeface="Cambria"/>
                         </a:rPr>
-                        <a:t>Full presentation: tests, failures, root cause</a:t>
+                        <a:t>Oscilloscope on the radio's 3.3 V supply during a transmit burst on a low battery</a:t>
                       </a:r>
                     </a:p>
                   </a:txBody>
@@ -9873,13 +11658,13 @@
                     <a:lstStyle/>
                     <a:p>
                       <a:r>
-                        <a:rPr sz="1150" b="0">
+                        <a:rPr sz="1250" b="0">
                           <a:solidFill>
                             <a:srgbClr val="222A3F"/>
                           </a:solidFill>
                           <a:latin typeface="Cambria"/>
                         </a:rPr>
-                        <a:t>20 sheets, 25 minutes</a:t>
+                        <a:t>Lowest voltage recorded</a:t>
                       </a:r>
                     </a:p>
                   </a:txBody>
@@ -9895,13 +11680,13 @@
                     <a:lstStyle/>
                     <a:p>
                       <a:r>
-                        <a:rPr sz="1150" b="0">
+                        <a:rPr sz="1250" b="0">
                           <a:solidFill>
                             <a:srgbClr val="222A3F"/>
                           </a:solidFill>
                           <a:latin typeface="Cambria"/>
                         </a:rPr>
-                        <a:t>All</a:t>
+                        <a:t>Victor</a:t>
                       </a:r>
                     </a:p>
                   </a:txBody>
@@ -9924,8 +11709,8 @@
         </p:nvSpPr>
         <p:spPr>
           <a:xfrm>
-            <a:off x="502920" y="4663440"/>
-            <a:ext cx="11155680" cy="1280160"/>
+            <a:off x="502920" y="5120640"/>
+            <a:ext cx="11155680" cy="914400"/>
           </a:xfrm>
           <a:prstGeom prst="rect">
             <a:avLst/>
@@ -9970,8 +11755,8 @@
         </p:nvSpPr>
         <p:spPr>
           <a:xfrm>
-            <a:off x="667512" y="4782312"/>
-            <a:ext cx="10826496" cy="1042415"/>
+            <a:off x="667512" y="5239512"/>
+            <a:ext cx="10826496" cy="676656"/>
           </a:xfrm>
           <a:prstGeom prst="rect">
             <a:avLst/>
@@ -10007,7 +11792,7 @@
                 </a:solidFill>
                 <a:latin typeface="Cambria"/>
               </a:rPr>
-              <a:t>Approve the flat-battery campaign before the next field test. It reproduces the exact conditions of all three battery incidents, with the flash read after every cycle, and it is the test that proves the fix rather than hoping for it.</a:t>
+              <a:t>Approve the flat-battery test before the next field drive. It repeats the exact conditions of all three failures and proves the fix instead of hoping for it.</a:t>
             </a:r>
           </a:p>
         </p:txBody>
